--- a/docs/ppt/SIH2026_CAPACITY_CONNECT_26075_OFFICIAL_TEMPLATE.pptx
+++ b/docs/ppt/SIH2026_CAPACITY_CONNECT_26075_OFFICIAL_TEMPLATE.pptx
@@ -8047,7 +8047,7 @@
         <p:spPr>
           <a:xfrm>
             <a:off x="457200" y="1527048"/>
-            <a:ext cx="2697480" cy="1572768"/>
+            <a:ext cx="2697480" cy="1325880"/>
           </a:xfrm>
           <a:prstGeom prst="rect">
             <a:avLst/>
@@ -8136,8 +8136,8 @@
         </p:nvSpPr>
         <p:spPr>
           <a:xfrm>
-            <a:off x="594360" y="1645920"/>
-            <a:ext cx="2377440" cy="256032"/>
+            <a:off x="594360" y="1627632"/>
+            <a:ext cx="2377440" cy="237744"/>
           </a:xfrm>
           <a:prstGeom prst="rect">
             <a:avLst/>
@@ -8159,7 +8159,7 @@
               </a:spcAft>
             </a:pPr>
             <a:r>
-              <a:rPr sz="1150" b="1">
+              <a:rPr sz="1100" b="1">
                 <a:solidFill>
                   <a:srgbClr val="1E6FBA"/>
                 </a:solidFill>
@@ -8178,7 +8178,7 @@
         </p:nvSpPr>
         <p:spPr>
           <a:xfrm>
-            <a:off x="594360" y="1938528"/>
+            <a:off x="594360" y="1911096"/>
             <a:ext cx="2468880" cy="219456"/>
           </a:xfrm>
           <a:prstGeom prst="rect">
@@ -8201,13 +8201,13 @@
               </a:spcAft>
             </a:pPr>
             <a:r>
-              <a:rPr sz="1000" b="1">
+              <a:rPr sz="950" b="1">
                 <a:solidFill>
                   <a:srgbClr val="1E6FBA"/>
                 </a:solidFill>
                 <a:latin typeface="Calibri"/>
               </a:rPr>
-              <a:t>· </a:t>
+              <a:t>- </a:t>
             </a:r>
             <a:r>
               <a:rPr sz="950" b="0">
@@ -8229,7 +8229,7 @@
         </p:nvSpPr>
         <p:spPr>
           <a:xfrm>
-            <a:off x="594360" y="2167128"/>
+            <a:off x="594360" y="2139696"/>
             <a:ext cx="2468880" cy="219456"/>
           </a:xfrm>
           <a:prstGeom prst="rect">
@@ -8252,13 +8252,13 @@
               </a:spcAft>
             </a:pPr>
             <a:r>
-              <a:rPr sz="1000" b="1">
+              <a:rPr sz="950" b="1">
                 <a:solidFill>
                   <a:srgbClr val="1E6FBA"/>
                 </a:solidFill>
                 <a:latin typeface="Calibri"/>
               </a:rPr>
-              <a:t>· </a:t>
+              <a:t>- </a:t>
             </a:r>
             <a:r>
               <a:rPr sz="950" b="0">
@@ -8267,7 +8267,7 @@
                 </a:solidFill>
                 <a:latin typeface="Calibri"/>
               </a:rPr>
-              <a:t>Riverpod state · GoRouter</a:t>
+              <a:t>Riverpod state - GoRouter</a:t>
             </a:r>
           </a:p>
         </p:txBody>
@@ -8280,7 +8280,7 @@
         </p:nvSpPr>
         <p:spPr>
           <a:xfrm>
-            <a:off x="594360" y="2395728"/>
+            <a:off x="594360" y="2368296"/>
             <a:ext cx="2468880" cy="219456"/>
           </a:xfrm>
           <a:prstGeom prst="rect">
@@ -8303,13 +8303,13 @@
               </a:spcAft>
             </a:pPr>
             <a:r>
-              <a:rPr sz="1000" b="1">
+              <a:rPr sz="950" b="1">
                 <a:solidFill>
                   <a:srgbClr val="1E6FBA"/>
                 </a:solidFill>
                 <a:latin typeface="Calibri"/>
               </a:rPr>
-              <a:t>· </a:t>
+              <a:t>- </a:t>
             </a:r>
             <a:r>
               <a:rPr sz="950" b="0">
@@ -8331,7 +8331,7 @@
         </p:nvSpPr>
         <p:spPr>
           <a:xfrm>
-            <a:off x="594360" y="2624328"/>
+            <a:off x="594360" y="2596896"/>
             <a:ext cx="2468880" cy="219456"/>
           </a:xfrm>
           <a:prstGeom prst="rect">
@@ -8354,13 +8354,13 @@
               </a:spcAft>
             </a:pPr>
             <a:r>
-              <a:rPr sz="1000" b="1">
+              <a:rPr sz="950" b="1">
                 <a:solidFill>
                   <a:srgbClr val="1E6FBA"/>
                 </a:solidFill>
                 <a:latin typeface="Calibri"/>
               </a:rPr>
-              <a:t>· </a:t>
+              <a:t>- </a:t>
             </a:r>
             <a:r>
               <a:rPr sz="950" b="0">
@@ -8369,72 +8369,21 @@
                 </a:solidFill>
                 <a:latin typeface="Calibri"/>
               </a:rPr>
-              <a:t>flutter_secure_storage · Dio</a:t>
-            </a:r>
-          </a:p>
-        </p:txBody>
-      </p:sp>
-      <p:sp>
-        <p:nvSpPr>
-          <p:cNvPr id="24" name="TextBox 23"/>
-          <p:cNvSpPr txBox="1"/>
-          <p:nvPr/>
-        </p:nvSpPr>
-        <p:spPr>
-          <a:xfrm>
-            <a:off x="594360" y="2852928"/>
-            <a:ext cx="2468880" cy="219456"/>
-          </a:xfrm>
-          <a:prstGeom prst="rect">
-            <a:avLst/>
-          </a:prstGeom>
-          <a:noFill/>
-        </p:spPr>
-        <p:txBody>
-          <a:bodyPr wrap="square" lIns="0" rIns="0" tIns="0" bIns="0" anchor="t">
-            <a:spAutoFit/>
-          </a:bodyPr>
-          <a:lstStyle/>
-          <a:p>
-            <a:pPr algn="l">
-              <a:lnSpc>
-                <a:spcPct val="108000"/>
-              </a:lnSpc>
-              <a:spcAft>
-                <a:spcPts val="300"/>
-              </a:spcAft>
-            </a:pPr>
-            <a:r>
-              <a:rPr sz="1000" b="1">
-                <a:solidFill>
-                  <a:srgbClr val="1E6FBA"/>
-                </a:solidFill>
-                <a:latin typeface="Calibri"/>
-              </a:rPr>
-              <a:t>· </a:t>
-            </a:r>
-            <a:r>
-              <a:rPr sz="950" b="0">
-                <a:solidFill>
-                  <a:srgbClr val="444C57"/>
-                </a:solidFill>
-                <a:latin typeface="Calibri"/>
-              </a:rPr>
-              <a:t>Android · Windows · Linux · Web</a:t>
-            </a:r>
-          </a:p>
-        </p:txBody>
-      </p:sp>
-      <p:sp>
-        <p:nvSpPr>
-          <p:cNvPr id="25" name="Rectangle 24"/>
+              <a:t>Android - Windows - Linux - Web</a:t>
+            </a:r>
+          </a:p>
+        </p:txBody>
+      </p:sp>
+      <p:sp>
+        <p:nvSpPr>
+          <p:cNvPr id="24" name="Rectangle 23"/>
           <p:cNvSpPr/>
           <p:nvPr/>
         </p:nvSpPr>
         <p:spPr>
           <a:xfrm>
             <a:off x="3310128" y="1527048"/>
-            <a:ext cx="2697480" cy="1572768"/>
+            <a:ext cx="2697480" cy="1325880"/>
           </a:xfrm>
           <a:prstGeom prst="rect">
             <a:avLst/>
@@ -8473,7 +8422,7 @@
       </p:sp>
       <p:sp>
         <p:nvSpPr>
-          <p:cNvPr id="26" name="Rectangle 25"/>
+          <p:cNvPr id="25" name="Rectangle 24"/>
           <p:cNvSpPr/>
           <p:nvPr/>
         </p:nvSpPr>
@@ -8517,14 +8466,56 @@
       </p:sp>
       <p:sp>
         <p:nvSpPr>
+          <p:cNvPr id="26" name="TextBox 25"/>
+          <p:cNvSpPr txBox="1"/>
+          <p:nvPr/>
+        </p:nvSpPr>
+        <p:spPr>
+          <a:xfrm>
+            <a:off x="3447288" y="1627632"/>
+            <a:ext cx="2377440" cy="237744"/>
+          </a:xfrm>
+          <a:prstGeom prst="rect">
+            <a:avLst/>
+          </a:prstGeom>
+          <a:noFill/>
+        </p:spPr>
+        <p:txBody>
+          <a:bodyPr wrap="square" lIns="0" rIns="0" tIns="0" bIns="0" anchor="t">
+            <a:spAutoFit/>
+          </a:bodyPr>
+          <a:lstStyle/>
+          <a:p>
+            <a:pPr algn="l">
+              <a:lnSpc>
+                <a:spcPct val="108000"/>
+              </a:lnSpc>
+              <a:spcAft>
+                <a:spcPts val="300"/>
+              </a:spcAft>
+            </a:pPr>
+            <a:r>
+              <a:rPr sz="1100" b="1">
+                <a:solidFill>
+                  <a:srgbClr val="F27C1E"/>
+                </a:solidFill>
+                <a:latin typeface="Calibri"/>
+              </a:rPr>
+              <a:t>LOCAL AI</a:t>
+            </a:r>
+          </a:p>
+        </p:txBody>
+      </p:sp>
+      <p:sp>
+        <p:nvSpPr>
           <p:cNvPr id="27" name="TextBox 26"/>
           <p:cNvSpPr txBox="1"/>
           <p:nvPr/>
         </p:nvSpPr>
         <p:spPr>
           <a:xfrm>
-            <a:off x="3447288" y="1645920"/>
-            <a:ext cx="2377440" cy="256032"/>
+            <a:off x="3447288" y="1911096"/>
+            <a:ext cx="2468880" cy="219456"/>
           </a:xfrm>
           <a:prstGeom prst="rect">
             <a:avLst/>
@@ -8546,13 +8537,22 @@
               </a:spcAft>
             </a:pPr>
             <a:r>
-              <a:rPr sz="1150" b="1">
+              <a:rPr sz="950" b="1">
                 <a:solidFill>
                   <a:srgbClr val="F27C1E"/>
                 </a:solidFill>
                 <a:latin typeface="Calibri"/>
               </a:rPr>
-              <a:t>LOCAL AI</a:t>
+              <a:t>- </a:t>
+            </a:r>
+            <a:r>
+              <a:rPr sz="950" b="0">
+                <a:solidFill>
+                  <a:srgbClr val="444C57"/>
+                </a:solidFill>
+                <a:latin typeface="Calibri"/>
+              </a:rPr>
+              <a:t>Python 3.11 - FastAPI on 127.0.0.1</a:t>
             </a:r>
           </a:p>
         </p:txBody>
@@ -8565,7 +8565,7 @@
         </p:nvSpPr>
         <p:spPr>
           <a:xfrm>
-            <a:off x="3447288" y="1938528"/>
+            <a:off x="3447288" y="2139696"/>
             <a:ext cx="2468880" cy="219456"/>
           </a:xfrm>
           <a:prstGeom prst="rect">
@@ -8588,13 +8588,13 @@
               </a:spcAft>
             </a:pPr>
             <a:r>
-              <a:rPr sz="1000" b="1">
+              <a:rPr sz="950" b="1">
                 <a:solidFill>
                   <a:srgbClr val="F27C1E"/>
                 </a:solidFill>
                 <a:latin typeface="Calibri"/>
               </a:rPr>
-              <a:t>· </a:t>
+              <a:t>- </a:t>
             </a:r>
             <a:r>
               <a:rPr sz="950" b="0">
@@ -8603,7 +8603,7 @@
                 </a:solidFill>
                 <a:latin typeface="Calibri"/>
               </a:rPr>
-              <a:t>Python 3.11 · FastAPI on 127.0.0.1</a:t>
+              <a:t>Normalise - detect - tokenize</a:t>
             </a:r>
           </a:p>
         </p:txBody>
@@ -8616,7 +8616,7 @@
         </p:nvSpPr>
         <p:spPr>
           <a:xfrm>
-            <a:off x="3447288" y="2167128"/>
+            <a:off x="3447288" y="2368296"/>
             <a:ext cx="2468880" cy="219456"/>
           </a:xfrm>
           <a:prstGeom prst="rect">
@@ -8639,13 +8639,13 @@
               </a:spcAft>
             </a:pPr>
             <a:r>
-              <a:rPr sz="1000" b="1">
+              <a:rPr sz="950" b="1">
                 <a:solidFill>
                   <a:srgbClr val="F27C1E"/>
                 </a:solidFill>
                 <a:latin typeface="Calibri"/>
               </a:rPr>
-              <a:t>· </a:t>
+              <a:t>- </a:t>
             </a:r>
             <a:r>
               <a:rPr sz="950" b="0">
@@ -8654,7 +8654,7 @@
                 </a:solidFill>
                 <a:latin typeface="Calibri"/>
               </a:rPr>
-              <a:t>Normalize · language detect · tokenize</a:t>
+              <a:t>Keyword / phrase / RapidFuzz</a:t>
             </a:r>
           </a:p>
         </p:txBody>
@@ -8667,7 +8667,7 @@
         </p:nvSpPr>
         <p:spPr>
           <a:xfrm>
-            <a:off x="3447288" y="2395728"/>
+            <a:off x="3447288" y="2596896"/>
             <a:ext cx="2468880" cy="219456"/>
           </a:xfrm>
           <a:prstGeom prst="rect">
@@ -8690,13 +8690,13 @@
               </a:spcAft>
             </a:pPr>
             <a:r>
-              <a:rPr sz="1000" b="1">
+              <a:rPr sz="950" b="1">
                 <a:solidFill>
                   <a:srgbClr val="F27C1E"/>
                 </a:solidFill>
                 <a:latin typeface="Calibri"/>
               </a:rPr>
-              <a:t>· </a:t>
+              <a:t>- </a:t>
             </a:r>
             <a:r>
               <a:rPr sz="950" b="0">
@@ -8705,123 +8705,21 @@
                 </a:solidFill>
                 <a:latin typeface="Calibri"/>
               </a:rPr>
-              <a:t>Keyword / phrase / RapidFuzz match</a:t>
-            </a:r>
-          </a:p>
-        </p:txBody>
-      </p:sp>
-      <p:sp>
-        <p:nvSpPr>
-          <p:cNvPr id="31" name="TextBox 30"/>
-          <p:cNvSpPr txBox="1"/>
-          <p:nvPr/>
-        </p:nvSpPr>
-        <p:spPr>
-          <a:xfrm>
-            <a:off x="3447288" y="2624328"/>
-            <a:ext cx="2468880" cy="219456"/>
-          </a:xfrm>
-          <a:prstGeom prst="rect">
-            <a:avLst/>
-          </a:prstGeom>
-          <a:noFill/>
-        </p:spPr>
-        <p:txBody>
-          <a:bodyPr wrap="square" lIns="0" rIns="0" tIns="0" bIns="0" anchor="t">
-            <a:spAutoFit/>
-          </a:bodyPr>
-          <a:lstStyle/>
-          <a:p>
-            <a:pPr algn="l">
-              <a:lnSpc>
-                <a:spcPct val="108000"/>
-              </a:lnSpc>
-              <a:spcAft>
-                <a:spcPts val="300"/>
-              </a:spcAft>
-            </a:pPr>
-            <a:r>
-              <a:rPr sz="1000" b="1">
-                <a:solidFill>
-                  <a:srgbClr val="F27C1E"/>
-                </a:solidFill>
-                <a:latin typeface="Calibri"/>
-              </a:rPr>
-              <a:t>· </a:t>
-            </a:r>
-            <a:r>
-              <a:rPr sz="950" b="0">
-                <a:solidFill>
-                  <a:srgbClr val="444C57"/>
-                </a:solidFill>
-                <a:latin typeface="Calibri"/>
-              </a:rPr>
-              <a:t>TF-IDF knowledge retrieval</a:t>
-            </a:r>
-          </a:p>
-        </p:txBody>
-      </p:sp>
-      <p:sp>
-        <p:nvSpPr>
-          <p:cNvPr id="32" name="TextBox 31"/>
-          <p:cNvSpPr txBox="1"/>
-          <p:nvPr/>
-        </p:nvSpPr>
-        <p:spPr>
-          <a:xfrm>
-            <a:off x="3447288" y="2852928"/>
-            <a:ext cx="2468880" cy="219456"/>
-          </a:xfrm>
-          <a:prstGeom prst="rect">
-            <a:avLst/>
-          </a:prstGeom>
-          <a:noFill/>
-        </p:spPr>
-        <p:txBody>
-          <a:bodyPr wrap="square" lIns="0" rIns="0" tIns="0" bIns="0" anchor="t">
-            <a:spAutoFit/>
-          </a:bodyPr>
-          <a:lstStyle/>
-          <a:p>
-            <a:pPr algn="l">
-              <a:lnSpc>
-                <a:spcPct val="108000"/>
-              </a:lnSpc>
-              <a:spcAft>
-                <a:spcPts val="300"/>
-              </a:spcAft>
-            </a:pPr>
-            <a:r>
-              <a:rPr sz="1000" b="1">
-                <a:solidFill>
-                  <a:srgbClr val="F27C1E"/>
-                </a:solidFill>
-                <a:latin typeface="Calibri"/>
-              </a:rPr>
-              <a:t>· </a:t>
-            </a:r>
-            <a:r>
-              <a:rPr sz="950" b="0">
-                <a:solidFill>
-                  <a:srgbClr val="444C57"/>
-                </a:solidFill>
-                <a:latin typeface="Calibri"/>
-              </a:rPr>
-              <a:t>Pluggable local LLM slot</a:t>
-            </a:r>
-          </a:p>
-        </p:txBody>
-      </p:sp>
-      <p:sp>
-        <p:nvSpPr>
-          <p:cNvPr id="33" name="Rectangle 32"/>
+              <a:t>TF-IDF retrieval, pluggable LLM</a:t>
+            </a:r>
+          </a:p>
+        </p:txBody>
+      </p:sp>
+      <p:sp>
+        <p:nvSpPr>
+          <p:cNvPr id="31" name="Rectangle 30"/>
           <p:cNvSpPr/>
           <p:nvPr/>
         </p:nvSpPr>
         <p:spPr>
           <a:xfrm>
             <a:off x="6163056" y="1527048"/>
-            <a:ext cx="2697480" cy="1572768"/>
+            <a:ext cx="2697480" cy="1325880"/>
           </a:xfrm>
           <a:prstGeom prst="rect">
             <a:avLst/>
@@ -8860,7 +8758,7 @@
       </p:sp>
       <p:sp>
         <p:nvSpPr>
-          <p:cNvPr id="34" name="Rectangle 33"/>
+          <p:cNvPr id="32" name="Rectangle 31"/>
           <p:cNvSpPr/>
           <p:nvPr/>
         </p:nvSpPr>
@@ -8904,14 +8802,107 @@
       </p:sp>
       <p:sp>
         <p:nvSpPr>
+          <p:cNvPr id="33" name="TextBox 32"/>
+          <p:cNvSpPr txBox="1"/>
+          <p:nvPr/>
+        </p:nvSpPr>
+        <p:spPr>
+          <a:xfrm>
+            <a:off x="6300216" y="1627632"/>
+            <a:ext cx="2377440" cy="237744"/>
+          </a:xfrm>
+          <a:prstGeom prst="rect">
+            <a:avLst/>
+          </a:prstGeom>
+          <a:noFill/>
+        </p:spPr>
+        <p:txBody>
+          <a:bodyPr wrap="square" lIns="0" rIns="0" tIns="0" bIns="0" anchor="t">
+            <a:spAutoFit/>
+          </a:bodyPr>
+          <a:lstStyle/>
+          <a:p>
+            <a:pPr algn="l">
+              <a:lnSpc>
+                <a:spcPct val="108000"/>
+              </a:lnSpc>
+              <a:spcAft>
+                <a:spcPts val="300"/>
+              </a:spcAft>
+            </a:pPr>
+            <a:r>
+              <a:rPr sz="1100" b="1">
+                <a:solidFill>
+                  <a:srgbClr val="2E8B57"/>
+                </a:solidFill>
+                <a:latin typeface="Calibri"/>
+              </a:rPr>
+              <a:t>3D &amp; MEDIA</a:t>
+            </a:r>
+          </a:p>
+        </p:txBody>
+      </p:sp>
+      <p:sp>
+        <p:nvSpPr>
+          <p:cNvPr id="34" name="TextBox 33"/>
+          <p:cNvSpPr txBox="1"/>
+          <p:nvPr/>
+        </p:nvSpPr>
+        <p:spPr>
+          <a:xfrm>
+            <a:off x="6300216" y="1911096"/>
+            <a:ext cx="2468880" cy="219456"/>
+          </a:xfrm>
+          <a:prstGeom prst="rect">
+            <a:avLst/>
+          </a:prstGeom>
+          <a:noFill/>
+        </p:spPr>
+        <p:txBody>
+          <a:bodyPr wrap="square" lIns="0" rIns="0" tIns="0" bIns="0" anchor="t">
+            <a:spAutoFit/>
+          </a:bodyPr>
+          <a:lstStyle/>
+          <a:p>
+            <a:pPr algn="l">
+              <a:lnSpc>
+                <a:spcPct val="108000"/>
+              </a:lnSpc>
+              <a:spcAft>
+                <a:spcPts val="300"/>
+              </a:spcAft>
+            </a:pPr>
+            <a:r>
+              <a:rPr sz="950" b="1">
+                <a:solidFill>
+                  <a:srgbClr val="2E8B57"/>
+                </a:solidFill>
+                <a:latin typeface="Calibri"/>
+              </a:rPr>
+              <a:t>- </a:t>
+            </a:r>
+            <a:r>
+              <a:rPr sz="950" b="0">
+                <a:solidFill>
+                  <a:srgbClr val="444C57"/>
+                </a:solidFill>
+                <a:latin typeface="Calibri"/>
+              </a:rPr>
+              <a:t>GLTF / GLB cached locally</a:t>
+            </a:r>
+          </a:p>
+        </p:txBody>
+      </p:sp>
+      <p:sp>
+        <p:nvSpPr>
           <p:cNvPr id="35" name="TextBox 34"/>
           <p:cNvSpPr txBox="1"/>
           <p:nvPr/>
         </p:nvSpPr>
         <p:spPr>
           <a:xfrm>
-            <a:off x="6300216" y="1645920"/>
-            <a:ext cx="2377440" cy="256032"/>
+            <a:off x="6300216" y="2139696"/>
+            <a:ext cx="2468880" cy="219456"/>
           </a:xfrm>
           <a:prstGeom prst="rect">
             <a:avLst/>
@@ -8933,13 +8924,22 @@
               </a:spcAft>
             </a:pPr>
             <a:r>
-              <a:rPr sz="1150" b="1">
+              <a:rPr sz="950" b="1">
                 <a:solidFill>
                   <a:srgbClr val="2E8B57"/>
                 </a:solidFill>
                 <a:latin typeface="Calibri"/>
               </a:rPr>
-              <a:t>3D &amp; MEDIA</a:t>
+              <a:t>- </a:t>
+            </a:r>
+            <a:r>
+              <a:rPr sz="950" b="0">
+                <a:solidFill>
+                  <a:srgbClr val="444C57"/>
+                </a:solidFill>
+                <a:latin typeface="Calibri"/>
+              </a:rPr>
+              <a:t>Mesh mapping + fault state</a:t>
             </a:r>
           </a:p>
         </p:txBody>
@@ -8952,7 +8952,7 @@
         </p:nvSpPr>
         <p:spPr>
           <a:xfrm>
-            <a:off x="6300216" y="1938528"/>
+            <a:off x="6300216" y="2368296"/>
             <a:ext cx="2468880" cy="219456"/>
           </a:xfrm>
           <a:prstGeom prst="rect">
@@ -8975,13 +8975,13 @@
               </a:spcAft>
             </a:pPr>
             <a:r>
-              <a:rPr sz="1000" b="1">
+              <a:rPr sz="950" b="1">
                 <a:solidFill>
                   <a:srgbClr val="2E8B57"/>
                 </a:solidFill>
                 <a:latin typeface="Calibri"/>
               </a:rPr>
-              <a:t>· </a:t>
+              <a:t>- </a:t>
             </a:r>
             <a:r>
               <a:rPr sz="950" b="0">
@@ -8990,7 +8990,7 @@
                 </a:solidFill>
                 <a:latin typeface="Calibri"/>
               </a:rPr>
-              <a:t>GLTF / GLB cached locally</a:t>
+              <a:t>Resumable chunked downloads</a:t>
             </a:r>
           </a:p>
         </p:txBody>
@@ -9003,7 +9003,7 @@
         </p:nvSpPr>
         <p:spPr>
           <a:xfrm>
-            <a:off x="6300216" y="2167128"/>
+            <a:off x="6300216" y="2596896"/>
             <a:ext cx="2468880" cy="219456"/>
           </a:xfrm>
           <a:prstGeom prst="rect">
@@ -9026,13 +9026,13 @@
               </a:spcAft>
             </a:pPr>
             <a:r>
-              <a:rPr sz="1000" b="1">
+              <a:rPr sz="950" b="1">
                 <a:solidFill>
                   <a:srgbClr val="2E8B57"/>
                 </a:solidFill>
                 <a:latin typeface="Calibri"/>
               </a:rPr>
-              <a:t>· </a:t>
+              <a:t>- </a:t>
             </a:r>
             <a:r>
               <a:rPr sz="950" b="0">
@@ -9041,174 +9041,21 @@
                 </a:solidFill>
                 <a:latin typeface="Calibri"/>
               </a:rPr>
-              <a:t>Mesh mapping + fault state layer</a:t>
-            </a:r>
-          </a:p>
-        </p:txBody>
-      </p:sp>
-      <p:sp>
-        <p:nvSpPr>
-          <p:cNvPr id="38" name="TextBox 37"/>
-          <p:cNvSpPr txBox="1"/>
-          <p:nvPr/>
-        </p:nvSpPr>
-        <p:spPr>
-          <a:xfrm>
-            <a:off x="6300216" y="2395728"/>
-            <a:ext cx="2468880" cy="219456"/>
-          </a:xfrm>
-          <a:prstGeom prst="rect">
-            <a:avLst/>
-          </a:prstGeom>
-          <a:noFill/>
-        </p:spPr>
-        <p:txBody>
-          <a:bodyPr wrap="square" lIns="0" rIns="0" tIns="0" bIns="0" anchor="t">
-            <a:spAutoFit/>
-          </a:bodyPr>
-          <a:lstStyle/>
-          <a:p>
-            <a:pPr algn="l">
-              <a:lnSpc>
-                <a:spcPct val="108000"/>
-              </a:lnSpc>
-              <a:spcAft>
-                <a:spcPts val="300"/>
-              </a:spcAft>
-            </a:pPr>
-            <a:r>
-              <a:rPr sz="1000" b="1">
-                <a:solidFill>
-                  <a:srgbClr val="2E8B57"/>
-                </a:solidFill>
-                <a:latin typeface="Calibri"/>
-              </a:rPr>
-              <a:t>· </a:t>
-            </a:r>
-            <a:r>
-              <a:rPr sz="950" b="0">
-                <a:solidFill>
-                  <a:srgbClr val="444C57"/>
-                </a:solidFill>
-                <a:latin typeface="Calibri"/>
-              </a:rPr>
-              <a:t>Chunked resumable downloads</a:t>
-            </a:r>
-          </a:p>
-        </p:txBody>
-      </p:sp>
-      <p:sp>
-        <p:nvSpPr>
-          <p:cNvPr id="39" name="TextBox 38"/>
-          <p:cNvSpPr txBox="1"/>
-          <p:nvPr/>
-        </p:nvSpPr>
-        <p:spPr>
-          <a:xfrm>
-            <a:off x="6300216" y="2624328"/>
-            <a:ext cx="2468880" cy="219456"/>
-          </a:xfrm>
-          <a:prstGeom prst="rect">
-            <a:avLst/>
-          </a:prstGeom>
-          <a:noFill/>
-        </p:spPr>
-        <p:txBody>
-          <a:bodyPr wrap="square" lIns="0" rIns="0" tIns="0" bIns="0" anchor="t">
-            <a:spAutoFit/>
-          </a:bodyPr>
-          <a:lstStyle/>
-          <a:p>
-            <a:pPr algn="l">
-              <a:lnSpc>
-                <a:spcPct val="108000"/>
-              </a:lnSpc>
-              <a:spcAft>
-                <a:spcPts val="300"/>
-              </a:spcAft>
-            </a:pPr>
-            <a:r>
-              <a:rPr sz="1000" b="1">
-                <a:solidFill>
-                  <a:srgbClr val="2E8B57"/>
-                </a:solidFill>
-                <a:latin typeface="Calibri"/>
-              </a:rPr>
-              <a:t>· </a:t>
-            </a:r>
-            <a:r>
-              <a:rPr sz="950" b="0">
-                <a:solidFill>
-                  <a:srgbClr val="444C57"/>
-                </a:solidFill>
-                <a:latin typeface="Calibri"/>
-              </a:rPr>
-              <a:t>Streaming video · PDF viewer</a:t>
-            </a:r>
-          </a:p>
-        </p:txBody>
-      </p:sp>
-      <p:sp>
-        <p:nvSpPr>
-          <p:cNvPr id="40" name="TextBox 39"/>
-          <p:cNvSpPr txBox="1"/>
-          <p:nvPr/>
-        </p:nvSpPr>
-        <p:spPr>
-          <a:xfrm>
-            <a:off x="6300216" y="2852928"/>
-            <a:ext cx="2468880" cy="219456"/>
-          </a:xfrm>
-          <a:prstGeom prst="rect">
-            <a:avLst/>
-          </a:prstGeom>
-          <a:noFill/>
-        </p:spPr>
-        <p:txBody>
-          <a:bodyPr wrap="square" lIns="0" rIns="0" tIns="0" bIns="0" anchor="t">
-            <a:spAutoFit/>
-          </a:bodyPr>
-          <a:lstStyle/>
-          <a:p>
-            <a:pPr algn="l">
-              <a:lnSpc>
-                <a:spcPct val="108000"/>
-              </a:lnSpc>
-              <a:spcAft>
-                <a:spcPts val="300"/>
-              </a:spcAft>
-            </a:pPr>
-            <a:r>
-              <a:rPr sz="1000" b="1">
-                <a:solidFill>
-                  <a:srgbClr val="2E8B57"/>
-                </a:solidFill>
-                <a:latin typeface="Calibri"/>
-              </a:rPr>
-              <a:t>· </a:t>
-            </a:r>
-            <a:r>
-              <a:rPr sz="950" b="0">
-                <a:solidFill>
-                  <a:srgbClr val="444C57"/>
-                </a:solidFill>
-                <a:latin typeface="Calibri"/>
-              </a:rPr>
-              <a:t>Optional speech-to-text input</a:t>
-            </a:r>
-          </a:p>
-        </p:txBody>
-      </p:sp>
-      <p:sp>
-        <p:nvSpPr>
-          <p:cNvPr id="41" name="Rectangle 40"/>
+              <a:t>Streaming video - PDF viewer</a:t>
+            </a:r>
+          </a:p>
+        </p:txBody>
+      </p:sp>
+      <p:sp>
+        <p:nvSpPr>
+          <p:cNvPr id="38" name="Rectangle 37"/>
           <p:cNvSpPr/>
           <p:nvPr/>
         </p:nvSpPr>
         <p:spPr>
           <a:xfrm>
             <a:off x="9015984" y="1527048"/>
-            <a:ext cx="2697480" cy="1572768"/>
+            <a:ext cx="2697480" cy="1325880"/>
           </a:xfrm>
           <a:prstGeom prst="rect">
             <a:avLst/>
@@ -9247,7 +9094,7 @@
       </p:sp>
       <p:sp>
         <p:nvSpPr>
-          <p:cNvPr id="42" name="Rectangle 41"/>
+          <p:cNvPr id="39" name="Rectangle 38"/>
           <p:cNvSpPr/>
           <p:nvPr/>
         </p:nvSpPr>
@@ -9291,14 +9138,158 @@
       </p:sp>
       <p:sp>
         <p:nvSpPr>
+          <p:cNvPr id="40" name="TextBox 39"/>
+          <p:cNvSpPr txBox="1"/>
+          <p:nvPr/>
+        </p:nvSpPr>
+        <p:spPr>
+          <a:xfrm>
+            <a:off x="9153144" y="1627632"/>
+            <a:ext cx="2377440" cy="237744"/>
+          </a:xfrm>
+          <a:prstGeom prst="rect">
+            <a:avLst/>
+          </a:prstGeom>
+          <a:noFill/>
+        </p:spPr>
+        <p:txBody>
+          <a:bodyPr wrap="square" lIns="0" rIns="0" tIns="0" bIns="0" anchor="t">
+            <a:spAutoFit/>
+          </a:bodyPr>
+          <a:lstStyle/>
+          <a:p>
+            <a:pPr algn="l">
+              <a:lnSpc>
+                <a:spcPct val="108000"/>
+              </a:lnSpc>
+              <a:spcAft>
+                <a:spcPts val="300"/>
+              </a:spcAft>
+            </a:pPr>
+            <a:r>
+              <a:rPr sz="1100" b="1">
+                <a:solidFill>
+                  <a:srgbClr val="1F3864"/>
+                </a:solidFill>
+                <a:latin typeface="Calibri"/>
+              </a:rPr>
+              <a:t>BACKEND &amp; OPS</a:t>
+            </a:r>
+          </a:p>
+        </p:txBody>
+      </p:sp>
+      <p:sp>
+        <p:nvSpPr>
+          <p:cNvPr id="41" name="TextBox 40"/>
+          <p:cNvSpPr txBox="1"/>
+          <p:nvPr/>
+        </p:nvSpPr>
+        <p:spPr>
+          <a:xfrm>
+            <a:off x="9153144" y="1911096"/>
+            <a:ext cx="2468880" cy="219456"/>
+          </a:xfrm>
+          <a:prstGeom prst="rect">
+            <a:avLst/>
+          </a:prstGeom>
+          <a:noFill/>
+        </p:spPr>
+        <p:txBody>
+          <a:bodyPr wrap="square" lIns="0" rIns="0" tIns="0" bIns="0" anchor="t">
+            <a:spAutoFit/>
+          </a:bodyPr>
+          <a:lstStyle/>
+          <a:p>
+            <a:pPr algn="l">
+              <a:lnSpc>
+                <a:spcPct val="108000"/>
+              </a:lnSpc>
+              <a:spcAft>
+                <a:spcPts val="300"/>
+              </a:spcAft>
+            </a:pPr>
+            <a:r>
+              <a:rPr sz="950" b="1">
+                <a:solidFill>
+                  <a:srgbClr val="1F3864"/>
+                </a:solidFill>
+                <a:latin typeface="Calibri"/>
+              </a:rPr>
+              <a:t>- </a:t>
+            </a:r>
+            <a:r>
+              <a:rPr sz="950" b="0">
+                <a:solidFill>
+                  <a:srgbClr val="444C57"/>
+                </a:solidFill>
+                <a:latin typeface="Calibri"/>
+              </a:rPr>
+              <a:t>FastAPI - SQLAlchemy - Pydantic</a:t>
+            </a:r>
+          </a:p>
+        </p:txBody>
+      </p:sp>
+      <p:sp>
+        <p:nvSpPr>
+          <p:cNvPr id="42" name="TextBox 41"/>
+          <p:cNvSpPr txBox="1"/>
+          <p:nvPr/>
+        </p:nvSpPr>
+        <p:spPr>
+          <a:xfrm>
+            <a:off x="9153144" y="2139696"/>
+            <a:ext cx="2468880" cy="219456"/>
+          </a:xfrm>
+          <a:prstGeom prst="rect">
+            <a:avLst/>
+          </a:prstGeom>
+          <a:noFill/>
+        </p:spPr>
+        <p:txBody>
+          <a:bodyPr wrap="square" lIns="0" rIns="0" tIns="0" bIns="0" anchor="t">
+            <a:spAutoFit/>
+          </a:bodyPr>
+          <a:lstStyle/>
+          <a:p>
+            <a:pPr algn="l">
+              <a:lnSpc>
+                <a:spcPct val="108000"/>
+              </a:lnSpc>
+              <a:spcAft>
+                <a:spcPts val="300"/>
+              </a:spcAft>
+            </a:pPr>
+            <a:r>
+              <a:rPr sz="950" b="1">
+                <a:solidFill>
+                  <a:srgbClr val="1F3864"/>
+                </a:solidFill>
+                <a:latin typeface="Calibri"/>
+              </a:rPr>
+              <a:t>- </a:t>
+            </a:r>
+            <a:r>
+              <a:rPr sz="950" b="0">
+                <a:solidFill>
+                  <a:srgbClr val="444C57"/>
+                </a:solidFill>
+                <a:latin typeface="Calibri"/>
+              </a:rPr>
+              <a:t>PostgreSQL + Alembic</a:t>
+            </a:r>
+          </a:p>
+        </p:txBody>
+      </p:sp>
+      <p:sp>
+        <p:nvSpPr>
           <p:cNvPr id="43" name="TextBox 42"/>
           <p:cNvSpPr txBox="1"/>
           <p:nvPr/>
         </p:nvSpPr>
         <p:spPr>
           <a:xfrm>
-            <a:off x="9153144" y="1645920"/>
-            <a:ext cx="2377440" cy="256032"/>
+            <a:off x="9153144" y="2368296"/>
+            <a:ext cx="2468880" cy="219456"/>
           </a:xfrm>
           <a:prstGeom prst="rect">
             <a:avLst/>
@@ -9320,13 +9311,22 @@
               </a:spcAft>
             </a:pPr>
             <a:r>
-              <a:rPr sz="1150" b="1">
+              <a:rPr sz="950" b="1">
                 <a:solidFill>
                   <a:srgbClr val="1F3864"/>
                 </a:solidFill>
                 <a:latin typeface="Calibri"/>
               </a:rPr>
-              <a:t>BACKEND &amp; OPS</a:t>
+              <a:t>- </a:t>
+            </a:r>
+            <a:r>
+              <a:rPr sz="950" b="0">
+                <a:solidFill>
+                  <a:srgbClr val="444C57"/>
+                </a:solidFill>
+                <a:latin typeface="Calibri"/>
+              </a:rPr>
+              <a:t>JWT + refresh - Docker - CI</a:t>
             </a:r>
           </a:p>
         </p:txBody>
@@ -9339,7 +9339,7 @@
         </p:nvSpPr>
         <p:spPr>
           <a:xfrm>
-            <a:off x="9153144" y="1938528"/>
+            <a:off x="9153144" y="2596896"/>
             <a:ext cx="2468880" cy="219456"/>
           </a:xfrm>
           <a:prstGeom prst="rect">
@@ -9362,13 +9362,13 @@
               </a:spcAft>
             </a:pPr>
             <a:r>
-              <a:rPr sz="1000" b="1">
+              <a:rPr sz="950" b="1">
                 <a:solidFill>
                   <a:srgbClr val="1F3864"/>
                 </a:solidFill>
                 <a:latin typeface="Calibri"/>
               </a:rPr>
-              <a:t>· </a:t>
+              <a:t>- </a:t>
             </a:r>
             <a:r>
               <a:rPr sz="950" b="0">
@@ -9377,224 +9377,20 @@
                 </a:solidFill>
                 <a:latin typeface="Calibri"/>
               </a:rPr>
-              <a:t>FastAPI · SQLAlchemy · Pydantic</a:t>
-            </a:r>
-          </a:p>
-        </p:txBody>
-      </p:sp>
-      <p:sp>
-        <p:nvSpPr>
-          <p:cNvPr id="45" name="TextBox 44"/>
-          <p:cNvSpPr txBox="1"/>
-          <p:nvPr/>
-        </p:nvSpPr>
-        <p:spPr>
-          <a:xfrm>
-            <a:off x="9153144" y="2167128"/>
-            <a:ext cx="2468880" cy="219456"/>
-          </a:xfrm>
-          <a:prstGeom prst="rect">
-            <a:avLst/>
-          </a:prstGeom>
-          <a:noFill/>
-        </p:spPr>
-        <p:txBody>
-          <a:bodyPr wrap="square" lIns="0" rIns="0" tIns="0" bIns="0" anchor="t">
-            <a:spAutoFit/>
-          </a:bodyPr>
-          <a:lstStyle/>
-          <a:p>
-            <a:pPr algn="l">
-              <a:lnSpc>
-                <a:spcPct val="108000"/>
-              </a:lnSpc>
-              <a:spcAft>
-                <a:spcPts val="300"/>
-              </a:spcAft>
-            </a:pPr>
-            <a:r>
-              <a:rPr sz="1000" b="1">
-                <a:solidFill>
-                  <a:srgbClr val="1F3864"/>
-                </a:solidFill>
-                <a:latin typeface="Calibri"/>
-              </a:rPr>
-              <a:t>· </a:t>
-            </a:r>
-            <a:r>
-              <a:rPr sz="950" b="0">
-                <a:solidFill>
-                  <a:srgbClr val="444C57"/>
-                </a:solidFill>
-                <a:latin typeface="Calibri"/>
-              </a:rPr>
-              <a:t>PostgreSQL + Alembic migrations</a:t>
-            </a:r>
-          </a:p>
-        </p:txBody>
-      </p:sp>
-      <p:sp>
-        <p:nvSpPr>
-          <p:cNvPr id="46" name="TextBox 45"/>
-          <p:cNvSpPr txBox="1"/>
-          <p:nvPr/>
-        </p:nvSpPr>
-        <p:spPr>
-          <a:xfrm>
-            <a:off x="9153144" y="2395728"/>
-            <a:ext cx="2468880" cy="219456"/>
-          </a:xfrm>
-          <a:prstGeom prst="rect">
-            <a:avLst/>
-          </a:prstGeom>
-          <a:noFill/>
-        </p:spPr>
-        <p:txBody>
-          <a:bodyPr wrap="square" lIns="0" rIns="0" tIns="0" bIns="0" anchor="t">
-            <a:spAutoFit/>
-          </a:bodyPr>
-          <a:lstStyle/>
-          <a:p>
-            <a:pPr algn="l">
-              <a:lnSpc>
-                <a:spcPct val="108000"/>
-              </a:lnSpc>
-              <a:spcAft>
-                <a:spcPts val="300"/>
-              </a:spcAft>
-            </a:pPr>
-            <a:r>
-              <a:rPr sz="1000" b="1">
-                <a:solidFill>
-                  <a:srgbClr val="1F3864"/>
-                </a:solidFill>
-                <a:latin typeface="Calibri"/>
-              </a:rPr>
-              <a:t>· </a:t>
-            </a:r>
-            <a:r>
-              <a:rPr sz="950" b="0">
-                <a:solidFill>
-                  <a:srgbClr val="444C57"/>
-                </a:solidFill>
-                <a:latin typeface="Calibri"/>
-              </a:rPr>
-              <a:t>Celery workers · JWT + refresh</a:t>
-            </a:r>
-          </a:p>
-        </p:txBody>
-      </p:sp>
-      <p:sp>
-        <p:nvSpPr>
-          <p:cNvPr id="47" name="TextBox 46"/>
-          <p:cNvSpPr txBox="1"/>
-          <p:nvPr/>
-        </p:nvSpPr>
-        <p:spPr>
-          <a:xfrm>
-            <a:off x="9153144" y="2624328"/>
-            <a:ext cx="2468880" cy="219456"/>
-          </a:xfrm>
-          <a:prstGeom prst="rect">
-            <a:avLst/>
-          </a:prstGeom>
-          <a:noFill/>
-        </p:spPr>
-        <p:txBody>
-          <a:bodyPr wrap="square" lIns="0" rIns="0" tIns="0" bIns="0" anchor="t">
-            <a:spAutoFit/>
-          </a:bodyPr>
-          <a:lstStyle/>
-          <a:p>
-            <a:pPr algn="l">
-              <a:lnSpc>
-                <a:spcPct val="108000"/>
-              </a:lnSpc>
-              <a:spcAft>
-                <a:spcPts val="300"/>
-              </a:spcAft>
-            </a:pPr>
-            <a:r>
-              <a:rPr sz="1000" b="1">
-                <a:solidFill>
-                  <a:srgbClr val="1F3864"/>
-                </a:solidFill>
-                <a:latin typeface="Calibri"/>
-              </a:rPr>
-              <a:t>· </a:t>
-            </a:r>
-            <a:r>
-              <a:rPr sz="950" b="0">
-                <a:solidFill>
-                  <a:srgbClr val="444C57"/>
-                </a:solidFill>
-                <a:latin typeface="Calibri"/>
-              </a:rPr>
-              <a:t>Docker · GitHub Actions CI</a:t>
-            </a:r>
-          </a:p>
-        </p:txBody>
-      </p:sp>
-      <p:sp>
-        <p:nvSpPr>
-          <p:cNvPr id="48" name="TextBox 47"/>
-          <p:cNvSpPr txBox="1"/>
-          <p:nvPr/>
-        </p:nvSpPr>
-        <p:spPr>
-          <a:xfrm>
-            <a:off x="9153144" y="2852928"/>
-            <a:ext cx="2468880" cy="219456"/>
-          </a:xfrm>
-          <a:prstGeom prst="rect">
-            <a:avLst/>
-          </a:prstGeom>
-          <a:noFill/>
-        </p:spPr>
-        <p:txBody>
-          <a:bodyPr wrap="square" lIns="0" rIns="0" tIns="0" bIns="0" anchor="t">
-            <a:spAutoFit/>
-          </a:bodyPr>
-          <a:lstStyle/>
-          <a:p>
-            <a:pPr algn="l">
-              <a:lnSpc>
-                <a:spcPct val="108000"/>
-              </a:lnSpc>
-              <a:spcAft>
-                <a:spcPts val="300"/>
-              </a:spcAft>
-            </a:pPr>
-            <a:r>
-              <a:rPr sz="1000" b="1">
-                <a:solidFill>
-                  <a:srgbClr val="1F3864"/>
-                </a:solidFill>
-                <a:latin typeface="Calibri"/>
-              </a:rPr>
-              <a:t>· </a:t>
-            </a:r>
-            <a:r>
-              <a:rPr sz="950" b="0">
-                <a:solidFill>
-                  <a:srgbClr val="444C57"/>
-                </a:solidFill>
-                <a:latin typeface="Calibri"/>
-              </a:rPr>
-              <a:t>pytest · flutter test/analyze</a:t>
-            </a:r>
-          </a:p>
-        </p:txBody>
-      </p:sp>
-      <p:sp>
-        <p:nvSpPr>
-          <p:cNvPr id="49" name="Rounded Rectangle 48"/>
+              <a:t>pytest - flutter test/analyze</a:t>
+            </a:r>
+          </a:p>
+        </p:txBody>
+      </p:sp>
+      <p:sp>
+        <p:nvSpPr>
+          <p:cNvPr id="45" name="Rounded Rectangle 44"/>
           <p:cNvSpPr/>
           <p:nvPr/>
         </p:nvSpPr>
         <p:spPr>
           <a:xfrm>
-            <a:off x="457200" y="3310128"/>
+            <a:off x="457200" y="3063240"/>
             <a:ext cx="11292840" cy="347472"/>
           </a:xfrm>
           <a:prstGeom prst="roundRect">
@@ -9634,14 +9430,166 @@
       </p:sp>
       <p:sp>
         <p:nvSpPr>
+          <p:cNvPr id="46" name="TextBox 45"/>
+          <p:cNvSpPr txBox="1"/>
+          <p:nvPr/>
+        </p:nvSpPr>
+        <p:spPr>
+          <a:xfrm>
+            <a:off x="603504" y="3127248"/>
+            <a:ext cx="11018520" cy="256032"/>
+          </a:xfrm>
+          <a:prstGeom prst="rect">
+            <a:avLst/>
+          </a:prstGeom>
+          <a:noFill/>
+        </p:spPr>
+        <p:txBody>
+          <a:bodyPr wrap="square" lIns="0" rIns="0" tIns="0" bIns="0" anchor="t">
+            <a:spAutoFit/>
+          </a:bodyPr>
+          <a:lstStyle/>
+          <a:p>
+            <a:pPr algn="l">
+              <a:lnSpc>
+                <a:spcPct val="108000"/>
+              </a:lnSpc>
+              <a:spcAft>
+                <a:spcPts val="300"/>
+              </a:spcAft>
+            </a:pPr>
+            <a:r>
+              <a:rPr sz="1200" b="1">
+                <a:solidFill>
+                  <a:srgbClr val="F27C1E"/>
+                </a:solidFill>
+                <a:latin typeface="Calibri"/>
+              </a:rPr>
+              <a:t>Methodology and process for implementation</a:t>
+            </a:r>
+          </a:p>
+        </p:txBody>
+      </p:sp>
+      <p:sp>
+        <p:nvSpPr>
+          <p:cNvPr id="47" name="Rectangle 46"/>
+          <p:cNvSpPr/>
+          <p:nvPr/>
+        </p:nvSpPr>
+        <p:spPr>
+          <a:xfrm>
+            <a:off x="8759190" y="3501390"/>
+            <a:ext cx="3009900" cy="1638300"/>
+          </a:xfrm>
+          <a:prstGeom prst="rect">
+            <a:avLst/>
+          </a:prstGeom>
+          <a:solidFill>
+            <a:srgbClr val="1F3864"/>
+          </a:solidFill>
+          <a:ln>
+            <a:noFill/>
+          </a:ln>
+          <a:effectLst/>
+        </p:spPr>
+        <p:style>
+          <a:lnRef idx="1">
+            <a:schemeClr val="accent1"/>
+          </a:lnRef>
+          <a:fillRef idx="3">
+            <a:schemeClr val="accent1"/>
+          </a:fillRef>
+          <a:effectRef idx="2">
+            <a:schemeClr val="accent1"/>
+          </a:effectRef>
+          <a:fontRef idx="minor">
+            <a:schemeClr val="lt1"/>
+          </a:fontRef>
+        </p:style>
+        <p:txBody>
+          <a:bodyPr rtlCol="0" anchor="ctr"/>
+          <a:lstStyle/>
+          <a:p>
+            <a:pPr algn="ctr"/>
+          </a:p>
+        </p:txBody>
+      </p:sp>
+      <p:pic>
+        <p:nvPicPr>
+          <p:cNvPr id="48" name="Picture 47" descr="s3_arch.png"/>
+          <p:cNvPicPr>
+            <a:picLocks noChangeAspect="1"/>
+          </p:cNvPicPr>
+          <p:nvPr/>
+        </p:nvPicPr>
+        <p:blipFill>
+          <a:blip r:embed="rId2"/>
+          <a:stretch>
+            <a:fillRect/>
+          </a:stretch>
+        </p:blipFill>
+        <p:spPr>
+          <a:xfrm>
+            <a:off x="8778240" y="3520440"/>
+            <a:ext cx="2971800" cy="1600200"/>
+          </a:xfrm>
+          <a:prstGeom prst="rect">
+            <a:avLst/>
+          </a:prstGeom>
+        </p:spPr>
+      </p:pic>
+      <p:sp>
+        <p:nvSpPr>
+          <p:cNvPr id="49" name="TextBox 48"/>
+          <p:cNvSpPr txBox="1"/>
+          <p:nvPr/>
+        </p:nvSpPr>
+        <p:spPr>
+          <a:xfrm>
+            <a:off x="8778240" y="5166360"/>
+            <a:ext cx="2971800" cy="201168"/>
+          </a:xfrm>
+          <a:prstGeom prst="rect">
+            <a:avLst/>
+          </a:prstGeom>
+          <a:noFill/>
+        </p:spPr>
+        <p:txBody>
+          <a:bodyPr wrap="square" lIns="0" rIns="0" tIns="0" bIns="0" anchor="t">
+            <a:spAutoFit/>
+          </a:bodyPr>
+          <a:lstStyle/>
+          <a:p>
+            <a:pPr algn="l">
+              <a:lnSpc>
+                <a:spcPct val="108000"/>
+              </a:lnSpc>
+              <a:spcAft>
+                <a:spcPts val="300"/>
+              </a:spcAft>
+            </a:pPr>
+            <a:r>
+              <a:rPr sz="800" b="0">
+                <a:solidFill>
+                  <a:srgbClr val="444C57"/>
+                </a:solidFill>
+                <a:latin typeface="Calibri"/>
+              </a:rPr>
+              <a:t>Offline-first edge + cloud, joined by a sync ledger</a:t>
+            </a:r>
+          </a:p>
+        </p:txBody>
+      </p:sp>
+      <p:sp>
+        <p:nvSpPr>
           <p:cNvPr id="50" name="TextBox 49"/>
           <p:cNvSpPr txBox="1"/>
           <p:nvPr/>
         </p:nvSpPr>
         <p:spPr>
           <a:xfrm>
-            <a:off x="603504" y="3374136"/>
-            <a:ext cx="11018520" cy="256032"/>
+            <a:off x="457200" y="3538728"/>
+            <a:ext cx="8138160" cy="228600"/>
           </a:xfrm>
           <a:prstGeom prst="rect">
             <a:avLst/>
@@ -9663,69 +9611,27 @@
               </a:spcAft>
             </a:pPr>
             <a:r>
-              <a:rPr sz="1200" b="1">
-                <a:solidFill>
-                  <a:srgbClr val="F27C1E"/>
-                </a:solidFill>
-                <a:latin typeface="Calibri"/>
-              </a:rPr>
-              <a:t>Methodology and process for implementation</a:t>
-            </a:r>
-          </a:p>
-        </p:txBody>
-      </p:sp>
-      <p:sp>
-        <p:nvSpPr>
-          <p:cNvPr id="51" name="TextBox 50"/>
-          <p:cNvSpPr txBox="1"/>
-          <p:nvPr/>
-        </p:nvSpPr>
-        <p:spPr>
-          <a:xfrm>
-            <a:off x="457200" y="3785616"/>
-            <a:ext cx="11247120" cy="228600"/>
-          </a:xfrm>
-          <a:prstGeom prst="rect">
-            <a:avLst/>
-          </a:prstGeom>
-          <a:noFill/>
-        </p:spPr>
-        <p:txBody>
-          <a:bodyPr wrap="square" lIns="0" rIns="0" tIns="0" bIns="0" anchor="t">
-            <a:spAutoFit/>
-          </a:bodyPr>
-          <a:lstStyle/>
-          <a:p>
-            <a:pPr algn="l">
-              <a:lnSpc>
-                <a:spcPct val="108000"/>
-              </a:lnSpc>
-              <a:spcAft>
-                <a:spcPts val="300"/>
-              </a:spcAft>
-            </a:pPr>
-            <a:r>
               <a:rPr sz="1050" b="1">
                 <a:solidFill>
                   <a:srgbClr val="1F3864"/>
                 </a:solidFill>
                 <a:latin typeface="Calibri"/>
               </a:rPr>
-              <a:t>A. System architecture — edge application works with zero connectivity; cloud platform is independently deployable</a:t>
-            </a:r>
-          </a:p>
-        </p:txBody>
-      </p:sp>
-      <p:sp>
-        <p:nvSpPr>
-          <p:cNvPr id="52" name="Rounded Rectangle 51"/>
+              <a:t>A. System architecture - the edge application works with zero connectivity</a:t>
+            </a:r>
+          </a:p>
+        </p:txBody>
+      </p:sp>
+      <p:sp>
+        <p:nvSpPr>
+          <p:cNvPr id="51" name="Rounded Rectangle 50"/>
           <p:cNvSpPr/>
           <p:nvPr/>
         </p:nvSpPr>
         <p:spPr>
           <a:xfrm>
-            <a:off x="457200" y="4059936"/>
-            <a:ext cx="1283589" cy="530352"/>
+            <a:off x="457200" y="3794760"/>
+            <a:ext cx="1234440" cy="502920"/>
           </a:xfrm>
           <a:prstGeom prst="roundRect">
             <a:avLst>
@@ -9766,14 +9672,14 @@
       </p:sp>
       <p:sp>
         <p:nvSpPr>
-          <p:cNvPr id="53" name="TextBox 52"/>
-          <p:cNvSpPr txBox="1"/>
-          <p:nvPr/>
-        </p:nvSpPr>
-        <p:spPr>
-          <a:xfrm>
-            <a:off x="493776" y="4059936"/>
-            <a:ext cx="1210437" cy="530352"/>
+          <p:cNvPr id="52" name="TextBox 51"/>
+          <p:cNvSpPr txBox="1"/>
+          <p:nvPr/>
+        </p:nvSpPr>
+        <p:spPr>
+          <a:xfrm>
+            <a:off x="493776" y="3794760"/>
+            <a:ext cx="1161288" cy="502920"/>
           </a:xfrm>
           <a:prstGeom prst="rect">
             <a:avLst/>
@@ -9801,21 +9707,21 @@
                 </a:solidFill>
                 <a:latin typeface="Calibri"/>
               </a:rPr>
-              <a:t>Flutter Client
-(Material 3)</a:t>
-            </a:r>
-          </a:p>
-        </p:txBody>
-      </p:sp>
-      <p:sp>
-        <p:nvSpPr>
-          <p:cNvPr id="54" name="Right Arrow 53"/>
+              <a:t>Flutter
+Client</a:t>
+            </a:r>
+          </a:p>
+        </p:txBody>
+      </p:sp>
+      <p:sp>
+        <p:nvSpPr>
+          <p:cNvPr id="53" name="Right Arrow 52"/>
           <p:cNvSpPr/>
           <p:nvPr/>
         </p:nvSpPr>
         <p:spPr>
           <a:xfrm>
-            <a:off x="1754505" y="4274820"/>
+            <a:off x="1705356" y="3995928"/>
             <a:ext cx="118872" cy="100584"/>
           </a:xfrm>
           <a:prstGeom prst="rightArrow">
@@ -9853,14 +9759,14 @@
       </p:sp>
       <p:sp>
         <p:nvSpPr>
-          <p:cNvPr id="55" name="Rounded Rectangle 54"/>
+          <p:cNvPr id="54" name="Rounded Rectangle 53"/>
           <p:cNvSpPr/>
           <p:nvPr/>
         </p:nvSpPr>
         <p:spPr>
           <a:xfrm>
-            <a:off x="1887093" y="4059936"/>
-            <a:ext cx="1283589" cy="530352"/>
+            <a:off x="1837944" y="3794760"/>
+            <a:ext cx="1234440" cy="502920"/>
           </a:xfrm>
           <a:prstGeom prst="roundRect">
             <a:avLst>
@@ -9901,14 +9807,14 @@
       </p:sp>
       <p:sp>
         <p:nvSpPr>
-          <p:cNvPr id="56" name="TextBox 55"/>
-          <p:cNvSpPr txBox="1"/>
-          <p:nvPr/>
-        </p:nvSpPr>
-        <p:spPr>
-          <a:xfrm>
-            <a:off x="1923669" y="4059936"/>
-            <a:ext cx="1210437" cy="530352"/>
+          <p:cNvPr id="55" name="TextBox 54"/>
+          <p:cNvSpPr txBox="1"/>
+          <p:nvPr/>
+        </p:nvSpPr>
+        <p:spPr>
+          <a:xfrm>
+            <a:off x="1874520" y="3794760"/>
+            <a:ext cx="1161288" cy="502920"/>
           </a:xfrm>
           <a:prstGeom prst="rect">
             <a:avLst/>
@@ -9936,7 +9842,7 @@
                 </a:solidFill>
                 <a:latin typeface="Calibri"/>
               </a:rPr>
-              <a:t>Local AI Node
+              <a:t>Local AI
 127.0.0.1</a:t>
             </a:r>
           </a:p>
@@ -9944,13 +9850,13 @@
       </p:sp>
       <p:sp>
         <p:nvSpPr>
-          <p:cNvPr id="57" name="Right Arrow 56"/>
+          <p:cNvPr id="56" name="Right Arrow 55"/>
           <p:cNvSpPr/>
           <p:nvPr/>
         </p:nvSpPr>
         <p:spPr>
           <a:xfrm>
-            <a:off x="3184398" y="4274820"/>
+            <a:off x="3086100" y="3995928"/>
             <a:ext cx="118872" cy="100584"/>
           </a:xfrm>
           <a:prstGeom prst="rightArrow">
@@ -9988,14 +9894,14 @@
       </p:sp>
       <p:sp>
         <p:nvSpPr>
-          <p:cNvPr id="58" name="Rounded Rectangle 57"/>
+          <p:cNvPr id="57" name="Rounded Rectangle 56"/>
           <p:cNvSpPr/>
           <p:nvPr/>
         </p:nvSpPr>
         <p:spPr>
           <a:xfrm>
-            <a:off x="3316986" y="4059936"/>
-            <a:ext cx="1283589" cy="530352"/>
+            <a:off x="3218688" y="3794760"/>
+            <a:ext cx="1234440" cy="502920"/>
           </a:xfrm>
           <a:prstGeom prst="roundRect">
             <a:avLst>
@@ -10036,14 +9942,14 @@
       </p:sp>
       <p:sp>
         <p:nvSpPr>
-          <p:cNvPr id="59" name="TextBox 58"/>
-          <p:cNvSpPr txBox="1"/>
-          <p:nvPr/>
-        </p:nvSpPr>
-        <p:spPr>
-          <a:xfrm>
-            <a:off x="3353562" y="4059936"/>
-            <a:ext cx="1210437" cy="530352"/>
+          <p:cNvPr id="58" name="TextBox 57"/>
+          <p:cNvSpPr txBox="1"/>
+          <p:nvPr/>
+        </p:nvSpPr>
+        <p:spPr>
+          <a:xfrm>
+            <a:off x="3255264" y="3794760"/>
+            <a:ext cx="1161288" cy="502920"/>
           </a:xfrm>
           <a:prstGeom prst="rect">
             <a:avLst/>
@@ -10079,13 +9985,13 @@
       </p:sp>
       <p:sp>
         <p:nvSpPr>
-          <p:cNvPr id="60" name="Right Arrow 59"/>
+          <p:cNvPr id="59" name="Right Arrow 58"/>
           <p:cNvSpPr/>
           <p:nvPr/>
         </p:nvSpPr>
         <p:spPr>
           <a:xfrm>
-            <a:off x="4614291" y="4274820"/>
+            <a:off x="4466844" y="3995928"/>
             <a:ext cx="118872" cy="100584"/>
           </a:xfrm>
           <a:prstGeom prst="rightArrow">
@@ -10123,14 +10029,14 @@
       </p:sp>
       <p:sp>
         <p:nvSpPr>
-          <p:cNvPr id="61" name="Rounded Rectangle 60"/>
+          <p:cNvPr id="60" name="Rounded Rectangle 59"/>
           <p:cNvSpPr/>
           <p:nvPr/>
         </p:nvSpPr>
         <p:spPr>
           <a:xfrm>
-            <a:off x="4746879" y="4059936"/>
-            <a:ext cx="1283589" cy="530352"/>
+            <a:off x="4599432" y="3794760"/>
+            <a:ext cx="1234440" cy="502920"/>
           </a:xfrm>
           <a:prstGeom prst="roundRect">
             <a:avLst>
@@ -10171,14 +10077,14 @@
       </p:sp>
       <p:sp>
         <p:nvSpPr>
-          <p:cNvPr id="62" name="TextBox 61"/>
-          <p:cNvSpPr txBox="1"/>
-          <p:nvPr/>
-        </p:nvSpPr>
-        <p:spPr>
-          <a:xfrm>
-            <a:off x="4783455" y="4059936"/>
-            <a:ext cx="1210437" cy="530352"/>
+          <p:cNvPr id="61" name="TextBox 60"/>
+          <p:cNvSpPr txBox="1"/>
+          <p:nvPr/>
+        </p:nvSpPr>
+        <p:spPr>
+          <a:xfrm>
+            <a:off x="4636008" y="3794760"/>
+            <a:ext cx="1161288" cy="502920"/>
           </a:xfrm>
           <a:prstGeom prst="rect">
             <a:avLst/>
@@ -10214,13 +10120,13 @@
       </p:sp>
       <p:sp>
         <p:nvSpPr>
-          <p:cNvPr id="63" name="Right Arrow 62"/>
+          <p:cNvPr id="62" name="Right Arrow 61"/>
           <p:cNvSpPr/>
           <p:nvPr/>
         </p:nvSpPr>
         <p:spPr>
           <a:xfrm>
-            <a:off x="6044184" y="4274820"/>
+            <a:off x="5847588" y="3995928"/>
             <a:ext cx="118872" cy="100584"/>
           </a:xfrm>
           <a:prstGeom prst="rightArrow">
@@ -10258,14 +10164,14 @@
       </p:sp>
       <p:sp>
         <p:nvSpPr>
-          <p:cNvPr id="64" name="Rounded Rectangle 63"/>
+          <p:cNvPr id="63" name="Rounded Rectangle 62"/>
           <p:cNvSpPr/>
           <p:nvPr/>
         </p:nvSpPr>
         <p:spPr>
           <a:xfrm>
-            <a:off x="6176772" y="4059936"/>
-            <a:ext cx="1283589" cy="530352"/>
+            <a:off x="5980176" y="3794760"/>
+            <a:ext cx="1234440" cy="502920"/>
           </a:xfrm>
           <a:prstGeom prst="roundRect">
             <a:avLst>
@@ -10306,14 +10212,14 @@
       </p:sp>
       <p:sp>
         <p:nvSpPr>
-          <p:cNvPr id="65" name="TextBox 64"/>
-          <p:cNvSpPr txBox="1"/>
-          <p:nvPr/>
-        </p:nvSpPr>
-        <p:spPr>
-          <a:xfrm>
-            <a:off x="6213348" y="4059936"/>
-            <a:ext cx="1210437" cy="530352"/>
+          <p:cNvPr id="64" name="TextBox 63"/>
+          <p:cNvSpPr txBox="1"/>
+          <p:nvPr/>
+        </p:nvSpPr>
+        <p:spPr>
+          <a:xfrm>
+            <a:off x="6016752" y="3794760"/>
+            <a:ext cx="1161288" cy="502920"/>
           </a:xfrm>
           <a:prstGeom prst="rect">
             <a:avLst/>
@@ -10341,21 +10247,21 @@
                 </a:solidFill>
                 <a:latin typeface="Calibri"/>
               </a:rPr>
-              <a:t>Sync Ledger
-(encrypted)</a:t>
-            </a:r>
-          </a:p>
-        </p:txBody>
-      </p:sp>
-      <p:sp>
-        <p:nvSpPr>
-          <p:cNvPr id="66" name="Right Arrow 65"/>
+              <a:t>Sync
+Ledger</a:t>
+            </a:r>
+          </a:p>
+        </p:txBody>
+      </p:sp>
+      <p:sp>
+        <p:nvSpPr>
+          <p:cNvPr id="65" name="Right Arrow 64"/>
           <p:cNvSpPr/>
           <p:nvPr/>
         </p:nvSpPr>
         <p:spPr>
           <a:xfrm>
-            <a:off x="7474077" y="4274820"/>
+            <a:off x="7228332" y="3995928"/>
             <a:ext cx="118872" cy="100584"/>
           </a:xfrm>
           <a:prstGeom prst="rightArrow">
@@ -10393,14 +10299,14 @@
       </p:sp>
       <p:sp>
         <p:nvSpPr>
-          <p:cNvPr id="67" name="Rounded Rectangle 66"/>
+          <p:cNvPr id="66" name="Rounded Rectangle 65"/>
           <p:cNvSpPr/>
           <p:nvPr/>
         </p:nvSpPr>
         <p:spPr>
           <a:xfrm>
-            <a:off x="7606665" y="4059936"/>
-            <a:ext cx="1283589" cy="530352"/>
+            <a:off x="7360920" y="3794760"/>
+            <a:ext cx="1234440" cy="502920"/>
           </a:xfrm>
           <a:prstGeom prst="roundRect">
             <a:avLst>
@@ -10441,369 +10347,99 @@
       </p:sp>
       <p:sp>
         <p:nvSpPr>
+          <p:cNvPr id="67" name="TextBox 66"/>
+          <p:cNvSpPr txBox="1"/>
+          <p:nvPr/>
+        </p:nvSpPr>
+        <p:spPr>
+          <a:xfrm>
+            <a:off x="7397496" y="3794760"/>
+            <a:ext cx="1161288" cy="502920"/>
+          </a:xfrm>
+          <a:prstGeom prst="rect">
+            <a:avLst/>
+          </a:prstGeom>
+          <a:noFill/>
+        </p:spPr>
+        <p:txBody>
+          <a:bodyPr wrap="square" lIns="0" rIns="0" tIns="0" bIns="0" anchor="ctr">
+            <a:spAutoFit/>
+          </a:bodyPr>
+          <a:lstStyle/>
+          <a:p>
+            <a:pPr algn="ctr">
+              <a:lnSpc>
+                <a:spcPct val="100000"/>
+              </a:lnSpc>
+              <a:spcAft>
+                <a:spcPts val="300"/>
+              </a:spcAft>
+            </a:pPr>
+            <a:r>
+              <a:rPr sz="850" b="1">
+                <a:solidFill>
+                  <a:srgbClr val="1F3864"/>
+                </a:solidFill>
+                <a:latin typeface="Calibri"/>
+              </a:rPr>
+              <a:t>Cloud API
++ DB</a:t>
+            </a:r>
+          </a:p>
+        </p:txBody>
+      </p:sp>
+      <p:sp>
+        <p:nvSpPr>
           <p:cNvPr id="68" name="TextBox 67"/>
           <p:cNvSpPr txBox="1"/>
           <p:nvPr/>
         </p:nvSpPr>
         <p:spPr>
           <a:xfrm>
-            <a:off x="7643241" y="4059936"/>
-            <a:ext cx="1210437" cy="530352"/>
-          </a:xfrm>
-          <a:prstGeom prst="rect">
-            <a:avLst/>
-          </a:prstGeom>
-          <a:noFill/>
-        </p:spPr>
-        <p:txBody>
-          <a:bodyPr wrap="square" lIns="0" rIns="0" tIns="0" bIns="0" anchor="ctr">
-            <a:spAutoFit/>
-          </a:bodyPr>
-          <a:lstStyle/>
-          <a:p>
-            <a:pPr algn="ctr">
-              <a:lnSpc>
-                <a:spcPct val="100000"/>
-              </a:lnSpc>
-              <a:spcAft>
-                <a:spcPts val="300"/>
-              </a:spcAft>
-            </a:pPr>
-            <a:r>
-              <a:rPr sz="850" b="1">
+            <a:off x="457200" y="4407408"/>
+            <a:ext cx="8138160" cy="228600"/>
+          </a:xfrm>
+          <a:prstGeom prst="rect">
+            <a:avLst/>
+          </a:prstGeom>
+          <a:noFill/>
+        </p:spPr>
+        <p:txBody>
+          <a:bodyPr wrap="square" lIns="0" rIns="0" tIns="0" bIns="0" anchor="t">
+            <a:spAutoFit/>
+          </a:bodyPr>
+          <a:lstStyle/>
+          <a:p>
+            <a:pPr algn="l">
+              <a:lnSpc>
+                <a:spcPct val="108000"/>
+              </a:lnSpc>
+              <a:spcAft>
+                <a:spcPts val="300"/>
+              </a:spcAft>
+            </a:pPr>
+            <a:r>
+              <a:rPr sz="1050" b="1">
                 <a:solidFill>
                   <a:srgbClr val="1F3864"/>
                 </a:solidFill>
                 <a:latin typeface="Calibri"/>
               </a:rPr>
-              <a:t>FastAPI
-/api/v1</a:t>
-            </a:r>
-          </a:p>
-        </p:txBody>
-      </p:sp>
-      <p:sp>
-        <p:nvSpPr>
-          <p:cNvPr id="69" name="Right Arrow 68"/>
+              <a:t>B. Local AI troubleshooting pipeline - returns structured JSON</a:t>
+            </a:r>
+          </a:p>
+        </p:txBody>
+      </p:sp>
+      <p:sp>
+        <p:nvSpPr>
+          <p:cNvPr id="69" name="Rounded Rectangle 68"/>
           <p:cNvSpPr/>
           <p:nvPr/>
         </p:nvSpPr>
         <p:spPr>
           <a:xfrm>
-            <a:off x="8903970" y="4274820"/>
-            <a:ext cx="118872" cy="100584"/>
-          </a:xfrm>
-          <a:prstGeom prst="rightArrow">
-            <a:avLst/>
-          </a:prstGeom>
-          <a:solidFill>
-            <a:srgbClr val="F27C1E"/>
-          </a:solidFill>
-          <a:ln>
-            <a:noFill/>
-          </a:ln>
-          <a:effectLst/>
-        </p:spPr>
-        <p:style>
-          <a:lnRef idx="1">
-            <a:schemeClr val="accent1"/>
-          </a:lnRef>
-          <a:fillRef idx="3">
-            <a:schemeClr val="accent1"/>
-          </a:fillRef>
-          <a:effectRef idx="2">
-            <a:schemeClr val="accent1"/>
-          </a:effectRef>
-          <a:fontRef idx="minor">
-            <a:schemeClr val="lt1"/>
-          </a:fontRef>
-        </p:style>
-        <p:txBody>
-          <a:bodyPr rtlCol="0" anchor="ctr"/>
-          <a:lstStyle/>
-          <a:p>
-            <a:pPr algn="ctr"/>
-          </a:p>
-        </p:txBody>
-      </p:sp>
-      <p:sp>
-        <p:nvSpPr>
-          <p:cNvPr id="70" name="Rounded Rectangle 69"/>
-          <p:cNvSpPr/>
-          <p:nvPr/>
-        </p:nvSpPr>
-        <p:spPr>
-          <a:xfrm>
-            <a:off x="9036558" y="4059936"/>
-            <a:ext cx="1283589" cy="530352"/>
-          </a:xfrm>
-          <a:prstGeom prst="roundRect">
-            <a:avLst>
-              <a:gd name="adj" fmla="val 6000"/>
-            </a:avLst>
-          </a:prstGeom>
-          <a:solidFill>
-            <a:srgbClr val="E8F1FA"/>
-          </a:solidFill>
-          <a:ln w="12700">
-            <a:solidFill>
-              <a:srgbClr val="1E6FBA"/>
-            </a:solidFill>
-          </a:ln>
-          <a:effectLst/>
-        </p:spPr>
-        <p:style>
-          <a:lnRef idx="1">
-            <a:schemeClr val="accent1"/>
-          </a:lnRef>
-          <a:fillRef idx="3">
-            <a:schemeClr val="accent1"/>
-          </a:fillRef>
-          <a:effectRef idx="2">
-            <a:schemeClr val="accent1"/>
-          </a:effectRef>
-          <a:fontRef idx="minor">
-            <a:schemeClr val="lt1"/>
-          </a:fontRef>
-        </p:style>
-        <p:txBody>
-          <a:bodyPr rtlCol="0" anchor="ctr"/>
-          <a:lstStyle/>
-          <a:p>
-            <a:pPr algn="ctr"/>
-          </a:p>
-        </p:txBody>
-      </p:sp>
-      <p:sp>
-        <p:nvSpPr>
-          <p:cNvPr id="71" name="TextBox 70"/>
-          <p:cNvSpPr txBox="1"/>
-          <p:nvPr/>
-        </p:nvSpPr>
-        <p:spPr>
-          <a:xfrm>
-            <a:off x="9073134" y="4059936"/>
-            <a:ext cx="1210437" cy="530352"/>
-          </a:xfrm>
-          <a:prstGeom prst="rect">
-            <a:avLst/>
-          </a:prstGeom>
-          <a:noFill/>
-        </p:spPr>
-        <p:txBody>
-          <a:bodyPr wrap="square" lIns="0" rIns="0" tIns="0" bIns="0" anchor="ctr">
-            <a:spAutoFit/>
-          </a:bodyPr>
-          <a:lstStyle/>
-          <a:p>
-            <a:pPr algn="ctr">
-              <a:lnSpc>
-                <a:spcPct val="100000"/>
-              </a:lnSpc>
-              <a:spcAft>
-                <a:spcPts val="300"/>
-              </a:spcAft>
-            </a:pPr>
-            <a:r>
-              <a:rPr sz="850" b="1">
-                <a:solidFill>
-                  <a:srgbClr val="1F3864"/>
-                </a:solidFill>
-                <a:latin typeface="Calibri"/>
-              </a:rPr>
-              <a:t>PostgreSQL
-+ workers</a:t>
-            </a:r>
-          </a:p>
-        </p:txBody>
-      </p:sp>
-      <p:sp>
-        <p:nvSpPr>
-          <p:cNvPr id="72" name="Right Arrow 71"/>
-          <p:cNvSpPr/>
-          <p:nvPr/>
-        </p:nvSpPr>
-        <p:spPr>
-          <a:xfrm>
-            <a:off x="10333863" y="4274820"/>
-            <a:ext cx="118872" cy="100584"/>
-          </a:xfrm>
-          <a:prstGeom prst="rightArrow">
-            <a:avLst/>
-          </a:prstGeom>
-          <a:solidFill>
-            <a:srgbClr val="F27C1E"/>
-          </a:solidFill>
-          <a:ln>
-            <a:noFill/>
-          </a:ln>
-          <a:effectLst/>
-        </p:spPr>
-        <p:style>
-          <a:lnRef idx="1">
-            <a:schemeClr val="accent1"/>
-          </a:lnRef>
-          <a:fillRef idx="3">
-            <a:schemeClr val="accent1"/>
-          </a:fillRef>
-          <a:effectRef idx="2">
-            <a:schemeClr val="accent1"/>
-          </a:effectRef>
-          <a:fontRef idx="minor">
-            <a:schemeClr val="lt1"/>
-          </a:fontRef>
-        </p:style>
-        <p:txBody>
-          <a:bodyPr rtlCol="0" anchor="ctr"/>
-          <a:lstStyle/>
-          <a:p>
-            <a:pPr algn="ctr"/>
-          </a:p>
-        </p:txBody>
-      </p:sp>
-      <p:sp>
-        <p:nvSpPr>
-          <p:cNvPr id="73" name="Rounded Rectangle 72"/>
-          <p:cNvSpPr/>
-          <p:nvPr/>
-        </p:nvSpPr>
-        <p:spPr>
-          <a:xfrm>
-            <a:off x="10466451" y="4059936"/>
-            <a:ext cx="1283589" cy="530352"/>
-          </a:xfrm>
-          <a:prstGeom prst="roundRect">
-            <a:avLst>
-              <a:gd name="adj" fmla="val 6000"/>
-            </a:avLst>
-          </a:prstGeom>
-          <a:solidFill>
-            <a:srgbClr val="E8F1FA"/>
-          </a:solidFill>
-          <a:ln w="12700">
-            <a:solidFill>
-              <a:srgbClr val="1E6FBA"/>
-            </a:solidFill>
-          </a:ln>
-          <a:effectLst/>
-        </p:spPr>
-        <p:style>
-          <a:lnRef idx="1">
-            <a:schemeClr val="accent1"/>
-          </a:lnRef>
-          <a:fillRef idx="3">
-            <a:schemeClr val="accent1"/>
-          </a:fillRef>
-          <a:effectRef idx="2">
-            <a:schemeClr val="accent1"/>
-          </a:effectRef>
-          <a:fontRef idx="minor">
-            <a:schemeClr val="lt1"/>
-          </a:fontRef>
-        </p:style>
-        <p:txBody>
-          <a:bodyPr rtlCol="0" anchor="ctr"/>
-          <a:lstStyle/>
-          <a:p>
-            <a:pPr algn="ctr"/>
-          </a:p>
-        </p:txBody>
-      </p:sp>
-      <p:sp>
-        <p:nvSpPr>
-          <p:cNvPr id="74" name="TextBox 73"/>
-          <p:cNvSpPr txBox="1"/>
-          <p:nvPr/>
-        </p:nvSpPr>
-        <p:spPr>
-          <a:xfrm>
-            <a:off x="10503027" y="4059936"/>
-            <a:ext cx="1210437" cy="530352"/>
-          </a:xfrm>
-          <a:prstGeom prst="rect">
-            <a:avLst/>
-          </a:prstGeom>
-          <a:noFill/>
-        </p:spPr>
-        <p:txBody>
-          <a:bodyPr wrap="square" lIns="0" rIns="0" tIns="0" bIns="0" anchor="ctr">
-            <a:spAutoFit/>
-          </a:bodyPr>
-          <a:lstStyle/>
-          <a:p>
-            <a:pPr algn="ctr">
-              <a:lnSpc>
-                <a:spcPct val="100000"/>
-              </a:lnSpc>
-              <a:spcAft>
-                <a:spcPts val="300"/>
-              </a:spcAft>
-            </a:pPr>
-            <a:r>
-              <a:rPr sz="850" b="1">
-                <a:solidFill>
-                  <a:srgbClr val="1F3864"/>
-                </a:solidFill>
-                <a:latin typeface="Calibri"/>
-              </a:rPr>
-              <a:t>Admin Portal
-&amp; Dashboards</a:t>
-            </a:r>
-          </a:p>
-        </p:txBody>
-      </p:sp>
-      <p:sp>
-        <p:nvSpPr>
-          <p:cNvPr id="75" name="TextBox 74"/>
-          <p:cNvSpPr txBox="1"/>
-          <p:nvPr/>
-        </p:nvSpPr>
-        <p:spPr>
-          <a:xfrm>
-            <a:off x="457200" y="4773168"/>
-            <a:ext cx="11247120" cy="228600"/>
-          </a:xfrm>
-          <a:prstGeom prst="rect">
-            <a:avLst/>
-          </a:prstGeom>
-          <a:noFill/>
-        </p:spPr>
-        <p:txBody>
-          <a:bodyPr wrap="square" lIns="0" rIns="0" tIns="0" bIns="0" anchor="t">
-            <a:spAutoFit/>
-          </a:bodyPr>
-          <a:lstStyle/>
-          <a:p>
-            <a:pPr algn="l">
-              <a:lnSpc>
-                <a:spcPct val="108000"/>
-              </a:lnSpc>
-              <a:spcAft>
-                <a:spcPts val="300"/>
-              </a:spcAft>
-            </a:pPr>
-            <a:r>
-              <a:rPr sz="1050" b="1">
-                <a:solidFill>
-                  <a:srgbClr val="1F3864"/>
-                </a:solidFill>
-                <a:latin typeface="Calibri"/>
-              </a:rPr>
-              <a:t>B. Local AI troubleshooting pipeline — returns structured JSON, confidence is a defined weighted score</a:t>
-            </a:r>
-          </a:p>
-        </p:txBody>
-      </p:sp>
-      <p:sp>
-        <p:nvSpPr>
-          <p:cNvPr id="76" name="Rounded Rectangle 75"/>
-          <p:cNvSpPr/>
-          <p:nvPr/>
-        </p:nvSpPr>
-        <p:spPr>
-          <a:xfrm>
-            <a:off x="457200" y="5047488"/>
-            <a:ext cx="1283589" cy="502920"/>
+            <a:off x="457200" y="4663440"/>
+            <a:ext cx="1234440" cy="502920"/>
           </a:xfrm>
           <a:prstGeom prst="roundRect">
             <a:avLst>
@@ -10844,14 +10480,14 @@
       </p:sp>
       <p:sp>
         <p:nvSpPr>
-          <p:cNvPr id="77" name="TextBox 76"/>
-          <p:cNvSpPr txBox="1"/>
-          <p:nvPr/>
-        </p:nvSpPr>
-        <p:spPr>
-          <a:xfrm>
-            <a:off x="493776" y="5047488"/>
-            <a:ext cx="1210437" cy="502920"/>
+          <p:cNvPr id="70" name="TextBox 69"/>
+          <p:cNvSpPr txBox="1"/>
+          <p:nvPr/>
+        </p:nvSpPr>
+        <p:spPr>
+          <a:xfrm>
+            <a:off x="493776" y="4663440"/>
+            <a:ext cx="1161288" cy="502920"/>
           </a:xfrm>
           <a:prstGeom prst="rect">
             <a:avLst/>
@@ -10886,13 +10522,13 @@
       </p:sp>
       <p:sp>
         <p:nvSpPr>
-          <p:cNvPr id="78" name="Right Arrow 77"/>
+          <p:cNvPr id="71" name="Right Arrow 70"/>
           <p:cNvSpPr/>
           <p:nvPr/>
         </p:nvSpPr>
         <p:spPr>
           <a:xfrm>
-            <a:off x="1754505" y="5248656"/>
+            <a:off x="1705356" y="4864608"/>
             <a:ext cx="118872" cy="100584"/>
           </a:xfrm>
           <a:prstGeom prst="rightArrow">
@@ -10930,14 +10566,14 @@
       </p:sp>
       <p:sp>
         <p:nvSpPr>
-          <p:cNvPr id="79" name="Rounded Rectangle 78"/>
+          <p:cNvPr id="72" name="Rounded Rectangle 71"/>
           <p:cNvSpPr/>
           <p:nvPr/>
         </p:nvSpPr>
         <p:spPr>
           <a:xfrm>
-            <a:off x="1887093" y="5047488"/>
-            <a:ext cx="1283589" cy="502920"/>
+            <a:off x="1837944" y="4663440"/>
+            <a:ext cx="1234440" cy="502920"/>
           </a:xfrm>
           <a:prstGeom prst="roundRect">
             <a:avLst>
@@ -10978,14 +10614,14 @@
       </p:sp>
       <p:sp>
         <p:nvSpPr>
-          <p:cNvPr id="80" name="TextBox 79"/>
-          <p:cNvSpPr txBox="1"/>
-          <p:nvPr/>
-        </p:nvSpPr>
-        <p:spPr>
-          <a:xfrm>
-            <a:off x="1923669" y="5047488"/>
-            <a:ext cx="1210437" cy="502920"/>
+          <p:cNvPr id="73" name="TextBox 72"/>
+          <p:cNvSpPr txBox="1"/>
+          <p:nvPr/>
+        </p:nvSpPr>
+        <p:spPr>
+          <a:xfrm>
+            <a:off x="1874520" y="4663440"/>
+            <a:ext cx="1161288" cy="502920"/>
           </a:xfrm>
           <a:prstGeom prst="rect">
             <a:avLst/>
@@ -11013,20 +10649,21 @@
                 </a:solidFill>
                 <a:latin typeface="Calibri"/>
               </a:rPr>
-              <a:t>Normalize</a:t>
-            </a:r>
-          </a:p>
-        </p:txBody>
-      </p:sp>
-      <p:sp>
-        <p:nvSpPr>
-          <p:cNvPr id="81" name="Right Arrow 80"/>
+              <a:t>Normalise
++ tokenize</a:t>
+            </a:r>
+          </a:p>
+        </p:txBody>
+      </p:sp>
+      <p:sp>
+        <p:nvSpPr>
+          <p:cNvPr id="74" name="Right Arrow 73"/>
           <p:cNvSpPr/>
           <p:nvPr/>
         </p:nvSpPr>
         <p:spPr>
           <a:xfrm>
-            <a:off x="3184398" y="5248656"/>
+            <a:off x="3086100" y="4864608"/>
             <a:ext cx="118872" cy="100584"/>
           </a:xfrm>
           <a:prstGeom prst="rightArrow">
@@ -11064,14 +10701,14 @@
       </p:sp>
       <p:sp>
         <p:nvSpPr>
-          <p:cNvPr id="82" name="Rounded Rectangle 81"/>
+          <p:cNvPr id="75" name="Rounded Rectangle 74"/>
           <p:cNvSpPr/>
           <p:nvPr/>
         </p:nvSpPr>
         <p:spPr>
           <a:xfrm>
-            <a:off x="3316986" y="5047488"/>
-            <a:ext cx="1283589" cy="502920"/>
+            <a:off x="3218688" y="4663440"/>
+            <a:ext cx="1234440" cy="502920"/>
           </a:xfrm>
           <a:prstGeom prst="roundRect">
             <a:avLst>
@@ -11112,14 +10749,14 @@
       </p:sp>
       <p:sp>
         <p:nvSpPr>
-          <p:cNvPr id="83" name="TextBox 82"/>
-          <p:cNvSpPr txBox="1"/>
-          <p:nvPr/>
-        </p:nvSpPr>
-        <p:spPr>
-          <a:xfrm>
-            <a:off x="3353562" y="5047488"/>
-            <a:ext cx="1210437" cy="502920"/>
+          <p:cNvPr id="76" name="TextBox 75"/>
+          <p:cNvSpPr txBox="1"/>
+          <p:nvPr/>
+        </p:nvSpPr>
+        <p:spPr>
+          <a:xfrm>
+            <a:off x="3255264" y="4663440"/>
+            <a:ext cx="1161288" cy="502920"/>
           </a:xfrm>
           <a:prstGeom prst="rect">
             <a:avLst/>
@@ -11147,20 +10784,21 @@
                 </a:solidFill>
                 <a:latin typeface="Calibri"/>
               </a:rPr>
-              <a:t>Tokenize</a:t>
-            </a:r>
-          </a:p>
-        </p:txBody>
-      </p:sp>
-      <p:sp>
-        <p:nvSpPr>
-          <p:cNvPr id="84" name="Right Arrow 83"/>
+              <a:t>Keyword /
+fuzzy match</a:t>
+            </a:r>
+          </a:p>
+        </p:txBody>
+      </p:sp>
+      <p:sp>
+        <p:nvSpPr>
+          <p:cNvPr id="77" name="Right Arrow 76"/>
           <p:cNvSpPr/>
           <p:nvPr/>
         </p:nvSpPr>
         <p:spPr>
           <a:xfrm>
-            <a:off x="4614291" y="5248656"/>
+            <a:off x="4466844" y="4864608"/>
             <a:ext cx="118872" cy="100584"/>
           </a:xfrm>
           <a:prstGeom prst="rightArrow">
@@ -11198,14 +10836,14 @@
       </p:sp>
       <p:sp>
         <p:nvSpPr>
-          <p:cNvPr id="85" name="Rounded Rectangle 84"/>
+          <p:cNvPr id="78" name="Rounded Rectangle 77"/>
           <p:cNvSpPr/>
           <p:nvPr/>
         </p:nvSpPr>
         <p:spPr>
           <a:xfrm>
-            <a:off x="4746879" y="5047488"/>
-            <a:ext cx="1283589" cy="502920"/>
+            <a:off x="4599432" y="4663440"/>
+            <a:ext cx="1234440" cy="502920"/>
           </a:xfrm>
           <a:prstGeom prst="roundRect">
             <a:avLst>
@@ -11246,14 +10884,14 @@
       </p:sp>
       <p:sp>
         <p:nvSpPr>
-          <p:cNvPr id="86" name="TextBox 85"/>
-          <p:cNvSpPr txBox="1"/>
-          <p:nvPr/>
-        </p:nvSpPr>
-        <p:spPr>
-          <a:xfrm>
-            <a:off x="4783455" y="5047488"/>
-            <a:ext cx="1210437" cy="502920"/>
+          <p:cNvPr id="79" name="TextBox 78"/>
+          <p:cNvSpPr txBox="1"/>
+          <p:nvPr/>
+        </p:nvSpPr>
+        <p:spPr>
+          <a:xfrm>
+            <a:off x="4636008" y="4663440"/>
+            <a:ext cx="1161288" cy="502920"/>
           </a:xfrm>
           <a:prstGeom prst="rect">
             <a:avLst/>
@@ -11281,21 +10919,21 @@
                 </a:solidFill>
                 <a:latin typeface="Calibri"/>
               </a:rPr>
-              <a:t>Keyword +
-Phrase</a:t>
-            </a:r>
-          </a:p>
-        </p:txBody>
-      </p:sp>
-      <p:sp>
-        <p:nvSpPr>
-          <p:cNvPr id="87" name="Right Arrow 86"/>
+              <a:t>Knowledge
+retrieval</a:t>
+            </a:r>
+          </a:p>
+        </p:txBody>
+      </p:sp>
+      <p:sp>
+        <p:nvSpPr>
+          <p:cNvPr id="80" name="Right Arrow 79"/>
           <p:cNvSpPr/>
           <p:nvPr/>
         </p:nvSpPr>
         <p:spPr>
           <a:xfrm>
-            <a:off x="6044184" y="5248656"/>
+            <a:off x="5847588" y="4864608"/>
             <a:ext cx="118872" cy="100584"/>
           </a:xfrm>
           <a:prstGeom prst="rightArrow">
@@ -11333,14 +10971,14 @@
       </p:sp>
       <p:sp>
         <p:nvSpPr>
-          <p:cNvPr id="88" name="Rounded Rectangle 87"/>
+          <p:cNvPr id="81" name="Rounded Rectangle 80"/>
           <p:cNvSpPr/>
           <p:nvPr/>
         </p:nvSpPr>
         <p:spPr>
           <a:xfrm>
-            <a:off x="6176772" y="5047488"/>
-            <a:ext cx="1283589" cy="502920"/>
+            <a:off x="5980176" y="4663440"/>
+            <a:ext cx="1234440" cy="502920"/>
           </a:xfrm>
           <a:prstGeom prst="roundRect">
             <a:avLst>
@@ -11381,14 +11019,14 @@
       </p:sp>
       <p:sp>
         <p:nvSpPr>
-          <p:cNvPr id="89" name="TextBox 88"/>
-          <p:cNvSpPr txBox="1"/>
-          <p:nvPr/>
-        </p:nvSpPr>
-        <p:spPr>
-          <a:xfrm>
-            <a:off x="6213348" y="5047488"/>
-            <a:ext cx="1210437" cy="502920"/>
+          <p:cNvPr id="82" name="TextBox 81"/>
+          <p:cNvSpPr txBox="1"/>
+          <p:nvPr/>
+        </p:nvSpPr>
+        <p:spPr>
+          <a:xfrm>
+            <a:off x="6016752" y="4663440"/>
+            <a:ext cx="1161288" cy="502920"/>
           </a:xfrm>
           <a:prstGeom prst="rect">
             <a:avLst/>
@@ -11416,21 +11054,21 @@
                 </a:solidFill>
                 <a:latin typeface="Calibri"/>
               </a:rPr>
-              <a:t>Fuzzy
-Match</a:t>
-            </a:r>
-          </a:p>
-        </p:txBody>
-      </p:sp>
-      <p:sp>
-        <p:nvSpPr>
-          <p:cNvPr id="90" name="Right Arrow 89"/>
+              <a:t>Component
++ severity</a:t>
+            </a:r>
+          </a:p>
+        </p:txBody>
+      </p:sp>
+      <p:sp>
+        <p:nvSpPr>
+          <p:cNvPr id="83" name="Right Arrow 82"/>
           <p:cNvSpPr/>
           <p:nvPr/>
         </p:nvSpPr>
         <p:spPr>
           <a:xfrm>
-            <a:off x="7474077" y="5248656"/>
+            <a:off x="7228332" y="4864608"/>
             <a:ext cx="118872" cy="100584"/>
           </a:xfrm>
           <a:prstGeom prst="rightArrow">
@@ -11468,14 +11106,14 @@
       </p:sp>
       <p:sp>
         <p:nvSpPr>
-          <p:cNvPr id="91" name="Rounded Rectangle 90"/>
+          <p:cNvPr id="84" name="Rounded Rectangle 83"/>
           <p:cNvSpPr/>
           <p:nvPr/>
         </p:nvSpPr>
         <p:spPr>
           <a:xfrm>
-            <a:off x="7606665" y="5047488"/>
-            <a:ext cx="1283589" cy="502920"/>
+            <a:off x="7360920" y="4663440"/>
+            <a:ext cx="1234440" cy="502920"/>
           </a:xfrm>
           <a:prstGeom prst="roundRect">
             <a:avLst>
@@ -11516,14 +11154,14 @@
       </p:sp>
       <p:sp>
         <p:nvSpPr>
-          <p:cNvPr id="92" name="TextBox 91"/>
-          <p:cNvSpPr txBox="1"/>
-          <p:nvPr/>
-        </p:nvSpPr>
-        <p:spPr>
-          <a:xfrm>
-            <a:off x="7643241" y="5047488"/>
-            <a:ext cx="1210437" cy="502920"/>
+          <p:cNvPr id="85" name="TextBox 84"/>
+          <p:cNvSpPr txBox="1"/>
+          <p:nvPr/>
+        </p:nvSpPr>
+        <p:spPr>
+          <a:xfrm>
+            <a:off x="7397496" y="4663440"/>
+            <a:ext cx="1161288" cy="502920"/>
           </a:xfrm>
           <a:prstGeom prst="rect">
             <a:avLst/>
@@ -11551,292 +11189,22 @@
                 </a:solidFill>
                 <a:latin typeface="Calibri"/>
               </a:rPr>
-              <a:t>Knowledge
-Retrieval</a:t>
-            </a:r>
-          </a:p>
-        </p:txBody>
-      </p:sp>
-      <p:sp>
-        <p:nvSpPr>
-          <p:cNvPr id="93" name="Right Arrow 92"/>
+              <a:t>3D mesh
+mapping</a:t>
+            </a:r>
+          </a:p>
+        </p:txBody>
+      </p:sp>
+      <p:sp>
+        <p:nvSpPr>
+          <p:cNvPr id="86" name="Rectangle 85"/>
           <p:cNvSpPr/>
           <p:nvPr/>
         </p:nvSpPr>
         <p:spPr>
           <a:xfrm>
-            <a:off x="8903970" y="5248656"/>
-            <a:ext cx="118872" cy="100584"/>
-          </a:xfrm>
-          <a:prstGeom prst="rightArrow">
-            <a:avLst/>
-          </a:prstGeom>
-          <a:solidFill>
-            <a:srgbClr val="F27C1E"/>
-          </a:solidFill>
-          <a:ln>
-            <a:noFill/>
-          </a:ln>
-          <a:effectLst/>
-        </p:spPr>
-        <p:style>
-          <a:lnRef idx="1">
-            <a:schemeClr val="accent1"/>
-          </a:lnRef>
-          <a:fillRef idx="3">
-            <a:schemeClr val="accent1"/>
-          </a:fillRef>
-          <a:effectRef idx="2">
-            <a:schemeClr val="accent1"/>
-          </a:effectRef>
-          <a:fontRef idx="minor">
-            <a:schemeClr val="lt1"/>
-          </a:fontRef>
-        </p:style>
-        <p:txBody>
-          <a:bodyPr rtlCol="0" anchor="ctr"/>
-          <a:lstStyle/>
-          <a:p>
-            <a:pPr algn="ctr"/>
-          </a:p>
-        </p:txBody>
-      </p:sp>
-      <p:sp>
-        <p:nvSpPr>
-          <p:cNvPr id="94" name="Rounded Rectangle 93"/>
-          <p:cNvSpPr/>
-          <p:nvPr/>
-        </p:nvSpPr>
-        <p:spPr>
-          <a:xfrm>
-            <a:off x="9036558" y="5047488"/>
-            <a:ext cx="1283589" cy="502920"/>
-          </a:xfrm>
-          <a:prstGeom prst="roundRect">
-            <a:avLst>
-              <a:gd name="adj" fmla="val 6000"/>
-            </a:avLst>
-          </a:prstGeom>
-          <a:solidFill>
-            <a:srgbClr val="FDF0E2"/>
-          </a:solidFill>
-          <a:ln w="12700">
-            <a:solidFill>
-              <a:srgbClr val="F27C1E"/>
-            </a:solidFill>
-          </a:ln>
-          <a:effectLst/>
-        </p:spPr>
-        <p:style>
-          <a:lnRef idx="1">
-            <a:schemeClr val="accent1"/>
-          </a:lnRef>
-          <a:fillRef idx="3">
-            <a:schemeClr val="accent1"/>
-          </a:fillRef>
-          <a:effectRef idx="2">
-            <a:schemeClr val="accent1"/>
-          </a:effectRef>
-          <a:fontRef idx="minor">
-            <a:schemeClr val="lt1"/>
-          </a:fontRef>
-        </p:style>
-        <p:txBody>
-          <a:bodyPr rtlCol="0" anchor="ctr"/>
-          <a:lstStyle/>
-          <a:p>
-            <a:pPr algn="ctr"/>
-          </a:p>
-        </p:txBody>
-      </p:sp>
-      <p:sp>
-        <p:nvSpPr>
-          <p:cNvPr id="95" name="TextBox 94"/>
-          <p:cNvSpPr txBox="1"/>
-          <p:nvPr/>
-        </p:nvSpPr>
-        <p:spPr>
-          <a:xfrm>
-            <a:off x="9073134" y="5047488"/>
-            <a:ext cx="1210437" cy="502920"/>
-          </a:xfrm>
-          <a:prstGeom prst="rect">
-            <a:avLst/>
-          </a:prstGeom>
-          <a:noFill/>
-        </p:spPr>
-        <p:txBody>
-          <a:bodyPr wrap="square" lIns="0" rIns="0" tIns="0" bIns="0" anchor="ctr">
-            <a:spAutoFit/>
-          </a:bodyPr>
-          <a:lstStyle/>
-          <a:p>
-            <a:pPr algn="ctr">
-              <a:lnSpc>
-                <a:spcPct val="100000"/>
-              </a:lnSpc>
-              <a:spcAft>
-                <a:spcPts val="300"/>
-              </a:spcAft>
-            </a:pPr>
-            <a:r>
-              <a:rPr sz="850" b="1">
-                <a:solidFill>
-                  <a:srgbClr val="1F3864"/>
-                </a:solidFill>
-                <a:latin typeface="Calibri"/>
-              </a:rPr>
-              <a:t>Component
-+ Severity</a:t>
-            </a:r>
-          </a:p>
-        </p:txBody>
-      </p:sp>
-      <p:sp>
-        <p:nvSpPr>
-          <p:cNvPr id="96" name="Right Arrow 95"/>
-          <p:cNvSpPr/>
-          <p:nvPr/>
-        </p:nvSpPr>
-        <p:spPr>
-          <a:xfrm>
-            <a:off x="10333863" y="5248656"/>
-            <a:ext cx="118872" cy="100584"/>
-          </a:xfrm>
-          <a:prstGeom prst="rightArrow">
-            <a:avLst/>
-          </a:prstGeom>
-          <a:solidFill>
-            <a:srgbClr val="F27C1E"/>
-          </a:solidFill>
-          <a:ln>
-            <a:noFill/>
-          </a:ln>
-          <a:effectLst/>
-        </p:spPr>
-        <p:style>
-          <a:lnRef idx="1">
-            <a:schemeClr val="accent1"/>
-          </a:lnRef>
-          <a:fillRef idx="3">
-            <a:schemeClr val="accent1"/>
-          </a:fillRef>
-          <a:effectRef idx="2">
-            <a:schemeClr val="accent1"/>
-          </a:effectRef>
-          <a:fontRef idx="minor">
-            <a:schemeClr val="lt1"/>
-          </a:fontRef>
-        </p:style>
-        <p:txBody>
-          <a:bodyPr rtlCol="0" anchor="ctr"/>
-          <a:lstStyle/>
-          <a:p>
-            <a:pPr algn="ctr"/>
-          </a:p>
-        </p:txBody>
-      </p:sp>
-      <p:sp>
-        <p:nvSpPr>
-          <p:cNvPr id="97" name="Rounded Rectangle 96"/>
-          <p:cNvSpPr/>
-          <p:nvPr/>
-        </p:nvSpPr>
-        <p:spPr>
-          <a:xfrm>
-            <a:off x="10466451" y="5047488"/>
-            <a:ext cx="1283589" cy="502920"/>
-          </a:xfrm>
-          <a:prstGeom prst="roundRect">
-            <a:avLst>
-              <a:gd name="adj" fmla="val 6000"/>
-            </a:avLst>
-          </a:prstGeom>
-          <a:solidFill>
-            <a:srgbClr val="FDF0E2"/>
-          </a:solidFill>
-          <a:ln w="12700">
-            <a:solidFill>
-              <a:srgbClr val="F27C1E"/>
-            </a:solidFill>
-          </a:ln>
-          <a:effectLst/>
-        </p:spPr>
-        <p:style>
-          <a:lnRef idx="1">
-            <a:schemeClr val="accent1"/>
-          </a:lnRef>
-          <a:fillRef idx="3">
-            <a:schemeClr val="accent1"/>
-          </a:fillRef>
-          <a:effectRef idx="2">
-            <a:schemeClr val="accent1"/>
-          </a:effectRef>
-          <a:fontRef idx="minor">
-            <a:schemeClr val="lt1"/>
-          </a:fontRef>
-        </p:style>
-        <p:txBody>
-          <a:bodyPr rtlCol="0" anchor="ctr"/>
-          <a:lstStyle/>
-          <a:p>
-            <a:pPr algn="ctr"/>
-          </a:p>
-        </p:txBody>
-      </p:sp>
-      <p:sp>
-        <p:nvSpPr>
-          <p:cNvPr id="98" name="TextBox 97"/>
-          <p:cNvSpPr txBox="1"/>
-          <p:nvPr/>
-        </p:nvSpPr>
-        <p:spPr>
-          <a:xfrm>
-            <a:off x="10503027" y="5047488"/>
-            <a:ext cx="1210437" cy="502920"/>
-          </a:xfrm>
-          <a:prstGeom prst="rect">
-            <a:avLst/>
-          </a:prstGeom>
-          <a:noFill/>
-        </p:spPr>
-        <p:txBody>
-          <a:bodyPr wrap="square" lIns="0" rIns="0" tIns="0" bIns="0" anchor="ctr">
-            <a:spAutoFit/>
-          </a:bodyPr>
-          <a:lstStyle/>
-          <a:p>
-            <a:pPr algn="ctr">
-              <a:lnSpc>
-                <a:spcPct val="100000"/>
-              </a:lnSpc>
-              <a:spcAft>
-                <a:spcPts val="300"/>
-              </a:spcAft>
-            </a:pPr>
-            <a:r>
-              <a:rPr sz="850" b="1">
-                <a:solidFill>
-                  <a:srgbClr val="1F3864"/>
-                </a:solidFill>
-                <a:latin typeface="Calibri"/>
-              </a:rPr>
-              <a:t>3D Mesh
-Mapping</a:t>
-            </a:r>
-          </a:p>
-        </p:txBody>
-      </p:sp>
-      <p:sp>
-        <p:nvSpPr>
-          <p:cNvPr id="99" name="Rectangle 98"/>
-          <p:cNvSpPr/>
-          <p:nvPr/>
-        </p:nvSpPr>
-        <p:spPr>
-          <a:xfrm>
-            <a:off x="457200" y="5705856"/>
-            <a:ext cx="11292840" cy="658368"/>
+            <a:off x="457200" y="5413247"/>
+            <a:ext cx="11292840" cy="621792"/>
           </a:xfrm>
           <a:prstGeom prst="rect">
             <a:avLst/>
@@ -11875,14 +11243,14 @@
       </p:sp>
       <p:sp>
         <p:nvSpPr>
-          <p:cNvPr id="100" name="TextBox 99"/>
-          <p:cNvSpPr txBox="1"/>
-          <p:nvPr/>
-        </p:nvSpPr>
-        <p:spPr>
-          <a:xfrm>
-            <a:off x="640080" y="5788152"/>
-            <a:ext cx="10972800" cy="502920"/>
+          <p:cNvPr id="87" name="TextBox 86"/>
+          <p:cNvSpPr txBox="1"/>
+          <p:nvPr/>
+        </p:nvSpPr>
+        <p:spPr>
+          <a:xfrm>
+            <a:off x="640080" y="5486399"/>
+            <a:ext cx="10972800" cy="475488"/>
           </a:xfrm>
           <a:prstGeom prst="rect">
             <a:avLst/>
@@ -11910,7 +11278,7 @@
                 </a:solidFill>
                 <a:latin typeface="Calibri"/>
               </a:rPr>
-              <a:t>Worked example: "Sonar transducer showing abnormal vibration and casing fracture" → </a:t>
+              <a:t>Worked example: "Sonar transducer showing abnormal vibration and casing fracture" -&gt; </a:t>
             </a:r>
             <a:r>
               <a:rPr sz="1050" b="1">
@@ -11919,7 +11287,7 @@
                 </a:solidFill>
                 <a:latin typeface="Calibri"/>
               </a:rPr>
-              <a:t>SONAR-001 · Sonar Transducer Array · Mesh_042 · severity HIGH · confidence 0.94 → Digital Twin highlight + diagnostic procedure + diagnostic record saved offline.</a:t>
+              <a:t>SONAR-001 - Mesh_042 - severity HIGH - confidence 0.94 -&gt; twin highlight, diagnostic procedure and record saved offline.</a:t>
             </a:r>
           </a:p>
         </p:txBody>
@@ -12615,8 +11983,118 @@
         </p:nvSpPr>
         <p:spPr>
           <a:xfrm>
+            <a:off x="8759190" y="1507998"/>
+            <a:ext cx="3009900" cy="1409700"/>
+          </a:xfrm>
+          <a:prstGeom prst="rect">
+            <a:avLst/>
+          </a:prstGeom>
+          <a:solidFill>
+            <a:srgbClr val="1F3864"/>
+          </a:solidFill>
+          <a:ln>
+            <a:noFill/>
+          </a:ln>
+          <a:effectLst/>
+        </p:spPr>
+        <p:style>
+          <a:lnRef idx="1">
+            <a:schemeClr val="accent1"/>
+          </a:lnRef>
+          <a:fillRef idx="3">
+            <a:schemeClr val="accent1"/>
+          </a:fillRef>
+          <a:effectRef idx="2">
+            <a:schemeClr val="accent1"/>
+          </a:effectRef>
+          <a:fontRef idx="minor">
+            <a:schemeClr val="lt1"/>
+          </a:fontRef>
+        </p:style>
+        <p:txBody>
+          <a:bodyPr rtlCol="0" anchor="ctr"/>
+          <a:lstStyle/>
+          <a:p>
+            <a:pPr algn="ctr"/>
+          </a:p>
+        </p:txBody>
+      </p:sp>
+      <p:pic>
+        <p:nvPicPr>
+          <p:cNvPr id="18" name="Picture 17" descr="s4_field.jpg"/>
+          <p:cNvPicPr>
+            <a:picLocks noChangeAspect="1"/>
+          </p:cNvPicPr>
+          <p:nvPr/>
+        </p:nvPicPr>
+        <p:blipFill>
+          <a:blip r:embed="rId2"/>
+          <a:stretch>
+            <a:fillRect/>
+          </a:stretch>
+        </p:blipFill>
+        <p:spPr>
+          <a:xfrm>
+            <a:off x="8778240" y="1527048"/>
+            <a:ext cx="2971800" cy="1371600"/>
+          </a:xfrm>
+          <a:prstGeom prst="rect">
+            <a:avLst/>
+          </a:prstGeom>
+        </p:spPr>
+      </p:pic>
+      <p:sp>
+        <p:nvSpPr>
+          <p:cNvPr id="19" name="TextBox 18"/>
+          <p:cNvSpPr txBox="1"/>
+          <p:nvPr/>
+        </p:nvSpPr>
+        <p:spPr>
+          <a:xfrm>
+            <a:off x="8778240" y="2944368"/>
+            <a:ext cx="2971800" cy="201168"/>
+          </a:xfrm>
+          <a:prstGeom prst="rect">
+            <a:avLst/>
+          </a:prstGeom>
+          <a:noFill/>
+        </p:spPr>
+        <p:txBody>
+          <a:bodyPr wrap="square" lIns="0" rIns="0" tIns="0" bIns="0" anchor="t">
+            <a:spAutoFit/>
+          </a:bodyPr>
+          <a:lstStyle/>
+          <a:p>
+            <a:pPr algn="l">
+              <a:lnSpc>
+                <a:spcPct val="108000"/>
+              </a:lnSpc>
+              <a:spcAft>
+                <a:spcPts val="300"/>
+              </a:spcAft>
+            </a:pPr>
+            <a:r>
+              <a:rPr sz="800" b="0">
+                <a:solidFill>
+                  <a:srgbClr val="444C57"/>
+                </a:solidFill>
+                <a:latin typeface="Calibri"/>
+              </a:rPr>
+              <a:t>Target user: MoES / IMD field and shipboard personnel</a:t>
+            </a:r>
+          </a:p>
+        </p:txBody>
+      </p:sp>
+      <p:sp>
+        <p:nvSpPr>
+          <p:cNvPr id="20" name="Rectangle 19"/>
+          <p:cNvSpPr/>
+          <p:nvPr/>
+        </p:nvSpPr>
+        <p:spPr>
+          <a:xfrm>
             <a:off x="457200" y="1527048"/>
-            <a:ext cx="5486400" cy="621792"/>
+            <a:ext cx="4023360" cy="640080"/>
           </a:xfrm>
           <a:prstGeom prst="rect">
             <a:avLst/>
@@ -12655,14 +12133,14 @@
       </p:sp>
       <p:sp>
         <p:nvSpPr>
-          <p:cNvPr id="18" name="Rectangle 17"/>
+          <p:cNvPr id="21" name="Rectangle 20"/>
           <p:cNvSpPr/>
           <p:nvPr/>
         </p:nvSpPr>
         <p:spPr>
           <a:xfrm>
             <a:off x="457200" y="1527048"/>
-            <a:ext cx="50800" cy="621792"/>
+            <a:ext cx="50800" cy="640080"/>
           </a:xfrm>
           <a:prstGeom prst="rect">
             <a:avLst/>
@@ -12699,14 +12177,14 @@
       </p:sp>
       <p:sp>
         <p:nvSpPr>
-          <p:cNvPr id="19" name="TextBox 18"/>
-          <p:cNvSpPr txBox="1"/>
-          <p:nvPr/>
-        </p:nvSpPr>
-        <p:spPr>
-          <a:xfrm>
-            <a:off x="621792" y="1600200"/>
-            <a:ext cx="5120640" cy="228600"/>
+          <p:cNvPr id="22" name="TextBox 21"/>
+          <p:cNvSpPr txBox="1"/>
+          <p:nvPr/>
+        </p:nvSpPr>
+        <p:spPr>
+          <a:xfrm>
+            <a:off x="603504" y="1591056"/>
+            <a:ext cx="3749039" cy="219456"/>
           </a:xfrm>
           <a:prstGeom prst="rect">
             <a:avLst/>
@@ -12728,7 +12206,7 @@
               </a:spcAft>
             </a:pPr>
             <a:r>
-              <a:rPr sz="1100" b="1">
+              <a:rPr sz="1050" b="1">
                 <a:solidFill>
                   <a:srgbClr val="1F3864"/>
                 </a:solidFill>
@@ -12741,14 +12219,14 @@
       </p:sp>
       <p:sp>
         <p:nvSpPr>
-          <p:cNvPr id="20" name="TextBox 19"/>
-          <p:cNvSpPr txBox="1"/>
-          <p:nvPr/>
-        </p:nvSpPr>
-        <p:spPr>
-          <a:xfrm>
-            <a:off x="621792" y="1819656"/>
-            <a:ext cx="5166360" cy="320040"/>
+          <p:cNvPr id="23" name="TextBox 22"/>
+          <p:cNvSpPr txBox="1"/>
+          <p:nvPr/>
+        </p:nvSpPr>
+        <p:spPr>
+          <a:xfrm>
+            <a:off x="603504" y="1810512"/>
+            <a:ext cx="3794760" cy="329184"/>
           </a:xfrm>
           <a:prstGeom prst="rect">
             <a:avLst/>
@@ -12770,27 +12248,27 @@
               </a:spcAft>
             </a:pPr>
             <a:r>
-              <a:rPr sz="950" b="0">
+              <a:rPr sz="900" b="0">
                 <a:solidFill>
                   <a:srgbClr val="444C57"/>
                 </a:solidFill>
                 <a:latin typeface="Calibri"/>
               </a:rPr>
-              <a:t>Flutter, FastAPI and PostgreSQL are mature and fully open-source; one Dart codebase covers Android, Windows, Linux and Web.</a:t>
-            </a:r>
-          </a:p>
-        </p:txBody>
-      </p:sp>
-      <p:sp>
-        <p:nvSpPr>
-          <p:cNvPr id="21" name="Rectangle 20"/>
+              <a:t>Flutter, FastAPI, PostgreSQL - one Dart codebase covers Android, Windows, Linux, Web.</a:t>
+            </a:r>
+          </a:p>
+        </p:txBody>
+      </p:sp>
+      <p:sp>
+        <p:nvSpPr>
+          <p:cNvPr id="24" name="Rectangle 23"/>
           <p:cNvSpPr/>
           <p:nvPr/>
         </p:nvSpPr>
         <p:spPr>
           <a:xfrm>
-            <a:off x="6172200" y="1527048"/>
-            <a:ext cx="5486400" cy="621792"/>
+            <a:off x="4663440" y="1527048"/>
+            <a:ext cx="4023360" cy="640080"/>
           </a:xfrm>
           <a:prstGeom prst="rect">
             <a:avLst/>
@@ -12829,14 +12307,14 @@
       </p:sp>
       <p:sp>
         <p:nvSpPr>
-          <p:cNvPr id="22" name="Rectangle 21"/>
+          <p:cNvPr id="25" name="Rectangle 24"/>
           <p:cNvSpPr/>
           <p:nvPr/>
         </p:nvSpPr>
         <p:spPr>
           <a:xfrm>
-            <a:off x="6172200" y="1527048"/>
-            <a:ext cx="50800" cy="621792"/>
+            <a:off x="4663440" y="1527048"/>
+            <a:ext cx="50800" cy="640080"/>
           </a:xfrm>
           <a:prstGeom prst="rect">
             <a:avLst/>
@@ -12873,14 +12351,14 @@
       </p:sp>
       <p:sp>
         <p:nvSpPr>
-          <p:cNvPr id="23" name="TextBox 22"/>
-          <p:cNvSpPr txBox="1"/>
-          <p:nvPr/>
-        </p:nvSpPr>
-        <p:spPr>
-          <a:xfrm>
-            <a:off x="6336792" y="1600200"/>
-            <a:ext cx="5120640" cy="228600"/>
+          <p:cNvPr id="26" name="TextBox 25"/>
+          <p:cNvSpPr txBox="1"/>
+          <p:nvPr/>
+        </p:nvSpPr>
+        <p:spPr>
+          <a:xfrm>
+            <a:off x="4809744" y="1591056"/>
+            <a:ext cx="3749039" cy="219456"/>
           </a:xfrm>
           <a:prstGeom prst="rect">
             <a:avLst/>
@@ -12902,7 +12380,7 @@
               </a:spcAft>
             </a:pPr>
             <a:r>
-              <a:rPr sz="1100" b="1">
+              <a:rPr sz="1050" b="1">
                 <a:solidFill>
                   <a:srgbClr val="1F3864"/>
                 </a:solidFill>
@@ -12915,14 +12393,14 @@
       </p:sp>
       <p:sp>
         <p:nvSpPr>
-          <p:cNvPr id="24" name="TextBox 23"/>
-          <p:cNvSpPr txBox="1"/>
-          <p:nvPr/>
-        </p:nvSpPr>
-        <p:spPr>
-          <a:xfrm>
-            <a:off x="6336792" y="1819656"/>
-            <a:ext cx="5166360" cy="320040"/>
+          <p:cNvPr id="27" name="TextBox 26"/>
+          <p:cNvSpPr txBox="1"/>
+          <p:nvPr/>
+        </p:nvSpPr>
+        <p:spPr>
+          <a:xfrm>
+            <a:off x="4809744" y="1810512"/>
+            <a:ext cx="3794760" cy="329184"/>
           </a:xfrm>
           <a:prstGeom prst="rect">
             <a:avLst/>
@@ -12944,27 +12422,27 @@
               </a:spcAft>
             </a:pPr>
             <a:r>
-              <a:rPr sz="950" b="0">
+              <a:rPr sz="900" b="0">
                 <a:solidFill>
                   <a:srgbClr val="444C57"/>
                 </a:solidFill>
                 <a:latin typeface="Calibri"/>
               </a:rPr>
-              <a:t>Runs on existing MoES/IMD field tablets and vessel workstations; backend is containerised on existing infrastructure.</a:t>
-            </a:r>
-          </a:p>
-        </p:txBody>
-      </p:sp>
-      <p:sp>
-        <p:nvSpPr>
-          <p:cNvPr id="25" name="Rectangle 24"/>
+              <a:t>Runs on existing field tablets and vessel workstations; backend is containerised.</a:t>
+            </a:r>
+          </a:p>
+        </p:txBody>
+      </p:sp>
+      <p:sp>
+        <p:nvSpPr>
+          <p:cNvPr id="28" name="Rectangle 27"/>
           <p:cNvSpPr/>
           <p:nvPr/>
         </p:nvSpPr>
         <p:spPr>
           <a:xfrm>
-            <a:off x="457200" y="2221992"/>
-            <a:ext cx="5486400" cy="621792"/>
+            <a:off x="457200" y="2240280"/>
+            <a:ext cx="4023360" cy="640080"/>
           </a:xfrm>
           <a:prstGeom prst="rect">
             <a:avLst/>
@@ -13003,14 +12481,14 @@
       </p:sp>
       <p:sp>
         <p:nvSpPr>
-          <p:cNvPr id="26" name="Rectangle 25"/>
+          <p:cNvPr id="29" name="Rectangle 28"/>
           <p:cNvSpPr/>
           <p:nvPr/>
         </p:nvSpPr>
         <p:spPr>
           <a:xfrm>
-            <a:off x="457200" y="2221992"/>
-            <a:ext cx="50800" cy="621792"/>
+            <a:off x="457200" y="2240280"/>
+            <a:ext cx="50800" cy="640080"/>
           </a:xfrm>
           <a:prstGeom prst="rect">
             <a:avLst/>
@@ -13047,14 +12525,14 @@
       </p:sp>
       <p:sp>
         <p:nvSpPr>
-          <p:cNvPr id="27" name="TextBox 26"/>
-          <p:cNvSpPr txBox="1"/>
-          <p:nvPr/>
-        </p:nvSpPr>
-        <p:spPr>
-          <a:xfrm>
-            <a:off x="621792" y="2295144"/>
-            <a:ext cx="5120640" cy="228600"/>
+          <p:cNvPr id="30" name="TextBox 29"/>
+          <p:cNvSpPr txBox="1"/>
+          <p:nvPr/>
+        </p:nvSpPr>
+        <p:spPr>
+          <a:xfrm>
+            <a:off x="603504" y="2304288"/>
+            <a:ext cx="3749039" cy="219456"/>
           </a:xfrm>
           <a:prstGeom prst="rect">
             <a:avLst/>
@@ -13076,7 +12554,7 @@
               </a:spcAft>
             </a:pPr>
             <a:r>
-              <a:rPr sz="1100" b="1">
+              <a:rPr sz="1050" b="1">
                 <a:solidFill>
                   <a:srgbClr val="1F3864"/>
                 </a:solidFill>
@@ -13089,14 +12567,14 @@
       </p:sp>
       <p:sp>
         <p:nvSpPr>
-          <p:cNvPr id="28" name="TextBox 27"/>
-          <p:cNvSpPr txBox="1"/>
-          <p:nvPr/>
-        </p:nvSpPr>
-        <p:spPr>
-          <a:xfrm>
-            <a:off x="621792" y="2514600"/>
-            <a:ext cx="5166360" cy="320040"/>
+          <p:cNvPr id="31" name="TextBox 30"/>
+          <p:cNvSpPr txBox="1"/>
+          <p:nvPr/>
+        </p:nvSpPr>
+        <p:spPr>
+          <a:xfrm>
+            <a:off x="603504" y="2523744"/>
+            <a:ext cx="3794760" cy="329184"/>
           </a:xfrm>
           <a:prstGeom prst="rect">
             <a:avLst/>
@@ -13118,27 +12596,27 @@
               </a:spcAft>
             </a:pPr>
             <a:r>
-              <a:rPr sz="950" b="0">
+              <a:rPr sz="900" b="0">
                 <a:solidFill>
                   <a:srgbClr val="444C57"/>
                 </a:solidFill>
                 <a:latin typeface="Calibri"/>
               </a:rPr>
-              <a:t>Entirely open-source; no per-seat fees, so scaling to more users and institutes costs only storage and compute.</a:t>
-            </a:r>
-          </a:p>
-        </p:txBody>
-      </p:sp>
-      <p:sp>
-        <p:nvSpPr>
-          <p:cNvPr id="29" name="Rectangle 28"/>
+              <a:t>Entirely open-source - scaling costs only storage and compute, no per-seat fees.</a:t>
+            </a:r>
+          </a:p>
+        </p:txBody>
+      </p:sp>
+      <p:sp>
+        <p:nvSpPr>
+          <p:cNvPr id="32" name="Rectangle 31"/>
           <p:cNvSpPr/>
           <p:nvPr/>
         </p:nvSpPr>
         <p:spPr>
           <a:xfrm>
-            <a:off x="6172200" y="2221992"/>
-            <a:ext cx="5486400" cy="621792"/>
+            <a:off x="4663440" y="2240280"/>
+            <a:ext cx="4023360" cy="640080"/>
           </a:xfrm>
           <a:prstGeom prst="rect">
             <a:avLst/>
@@ -13177,14 +12655,14 @@
       </p:sp>
       <p:sp>
         <p:nvSpPr>
-          <p:cNvPr id="30" name="Rectangle 29"/>
+          <p:cNvPr id="33" name="Rectangle 32"/>
           <p:cNvSpPr/>
           <p:nvPr/>
         </p:nvSpPr>
         <p:spPr>
           <a:xfrm>
-            <a:off x="6172200" y="2221992"/>
-            <a:ext cx="50800" cy="621792"/>
+            <a:off x="4663440" y="2240280"/>
+            <a:ext cx="50800" cy="640080"/>
           </a:xfrm>
           <a:prstGeom prst="rect">
             <a:avLst/>
@@ -13221,14 +12699,14 @@
       </p:sp>
       <p:sp>
         <p:nvSpPr>
-          <p:cNvPr id="31" name="TextBox 30"/>
-          <p:cNvSpPr txBox="1"/>
-          <p:nvPr/>
-        </p:nvSpPr>
-        <p:spPr>
-          <a:xfrm>
-            <a:off x="6336792" y="2295144"/>
-            <a:ext cx="5120640" cy="228600"/>
+          <p:cNvPr id="34" name="TextBox 33"/>
+          <p:cNvSpPr txBox="1"/>
+          <p:nvPr/>
+        </p:nvSpPr>
+        <p:spPr>
+          <a:xfrm>
+            <a:off x="4809744" y="2304288"/>
+            <a:ext cx="3749039" cy="219456"/>
           </a:xfrm>
           <a:prstGeom prst="rect">
             <a:avLst/>
@@ -13250,7 +12728,7 @@
               </a:spcAft>
             </a:pPr>
             <a:r>
-              <a:rPr sz="1100" b="1">
+              <a:rPr sz="1050" b="1">
                 <a:solidFill>
                   <a:srgbClr val="1F3864"/>
                 </a:solidFill>
@@ -13263,14 +12741,14 @@
       </p:sp>
       <p:sp>
         <p:nvSpPr>
-          <p:cNvPr id="32" name="TextBox 31"/>
-          <p:cNvSpPr txBox="1"/>
-          <p:nvPr/>
-        </p:nvSpPr>
-        <p:spPr>
-          <a:xfrm>
-            <a:off x="6336792" y="2514600"/>
-            <a:ext cx="5166360" cy="320040"/>
+          <p:cNvPr id="35" name="TextBox 34"/>
+          <p:cNvSpPr txBox="1"/>
+          <p:nvPr/>
+        </p:nvSpPr>
+        <p:spPr>
+          <a:xfrm>
+            <a:off x="4809744" y="2523744"/>
+            <a:ext cx="3794760" cy="329184"/>
           </a:xfrm>
           <a:prstGeom prst="rect">
             <a:avLst/>
@@ -13292,26 +12770,26 @@
               </a:spcAft>
             </a:pPr>
             <a:r>
-              <a:rPr sz="950" b="0">
+              <a:rPr sz="900" b="0">
                 <a:solidFill>
                   <a:srgbClr val="444C57"/>
                 </a:solidFill>
                 <a:latin typeface="Calibri"/>
               </a:rPr>
-              <a:t>Portal features usable from day one; AI and Digital Twin layers extend the same schema without rework.</a:t>
-            </a:r>
-          </a:p>
-        </p:txBody>
-      </p:sp>
-      <p:sp>
-        <p:nvSpPr>
-          <p:cNvPr id="33" name="Rounded Rectangle 32"/>
+              <a:t>Portal usable from day one; AI and Digital Twin extend the same schema later.</a:t>
+            </a:r>
+          </a:p>
+        </p:txBody>
+      </p:sp>
+      <p:sp>
+        <p:nvSpPr>
+          <p:cNvPr id="36" name="Rounded Rectangle 35"/>
           <p:cNvSpPr/>
           <p:nvPr/>
         </p:nvSpPr>
         <p:spPr>
           <a:xfrm>
-            <a:off x="457200" y="3008376"/>
+            <a:off x="457200" y="3099816"/>
             <a:ext cx="11292840" cy="347472"/>
           </a:xfrm>
           <a:prstGeom prst="roundRect">
@@ -13351,13 +12829,13 @@
       </p:sp>
       <p:sp>
         <p:nvSpPr>
-          <p:cNvPr id="34" name="TextBox 33"/>
-          <p:cNvSpPr txBox="1"/>
-          <p:nvPr/>
-        </p:nvSpPr>
-        <p:spPr>
-          <a:xfrm>
-            <a:off x="603504" y="3072384"/>
+          <p:cNvPr id="37" name="TextBox 36"/>
+          <p:cNvSpPr txBox="1"/>
+          <p:nvPr/>
+        </p:nvSpPr>
+        <p:spPr>
+          <a:xfrm>
+            <a:off x="603504" y="3163824"/>
             <a:ext cx="11018520" cy="256032"/>
           </a:xfrm>
           <a:prstGeom prst="rect">
@@ -13386,21 +12864,21 @@
                 </a:solidFill>
                 <a:latin typeface="Calibri"/>
               </a:rPr>
-              <a:t>Potential challenges and risks  →  Strategies for overcoming these challenges</a:t>
-            </a:r>
-          </a:p>
-        </p:txBody>
-      </p:sp>
-      <p:sp>
-        <p:nvSpPr>
-          <p:cNvPr id="35" name="Rectangle 34"/>
+              <a:t>Potential challenges and risks  -&gt;  Strategies for overcoming these challenges</a:t>
+            </a:r>
+          </a:p>
+        </p:txBody>
+      </p:sp>
+      <p:sp>
+        <p:nvSpPr>
+          <p:cNvPr id="38" name="Rectangle 37"/>
           <p:cNvSpPr/>
           <p:nvPr/>
         </p:nvSpPr>
         <p:spPr>
           <a:xfrm>
-            <a:off x="457200" y="3483864"/>
-            <a:ext cx="11292840" cy="310896"/>
+            <a:off x="457200" y="3575304"/>
+            <a:ext cx="11292840" cy="292608"/>
           </a:xfrm>
           <a:prstGeom prst="rect">
             <a:avLst/>
@@ -13437,14 +12915,14 @@
       </p:sp>
       <p:sp>
         <p:nvSpPr>
-          <p:cNvPr id="36" name="TextBox 35"/>
-          <p:cNvSpPr txBox="1"/>
-          <p:nvPr/>
-        </p:nvSpPr>
-        <p:spPr>
-          <a:xfrm>
-            <a:off x="640080" y="3538728"/>
-            <a:ext cx="4572000" cy="228600"/>
+          <p:cNvPr id="39" name="TextBox 38"/>
+          <p:cNvSpPr txBox="1"/>
+          <p:nvPr/>
+        </p:nvSpPr>
+        <p:spPr>
+          <a:xfrm>
+            <a:off x="640080" y="3621024"/>
+            <a:ext cx="4572000" cy="219456"/>
           </a:xfrm>
           <a:prstGeom prst="rect">
             <a:avLst/>
@@ -13466,7 +12944,7 @@
               </a:spcAft>
             </a:pPr>
             <a:r>
-              <a:rPr sz="1050" b="1">
+              <a:rPr sz="1000" b="1">
                 <a:solidFill>
                   <a:srgbClr val="FFFFFF"/>
                 </a:solidFill>
@@ -13479,14 +12957,14 @@
       </p:sp>
       <p:sp>
         <p:nvSpPr>
-          <p:cNvPr id="37" name="TextBox 36"/>
-          <p:cNvSpPr txBox="1"/>
-          <p:nvPr/>
-        </p:nvSpPr>
-        <p:spPr>
-          <a:xfrm>
-            <a:off x="5669280" y="3538728"/>
-            <a:ext cx="5852160" cy="228600"/>
+          <p:cNvPr id="40" name="TextBox 39"/>
+          <p:cNvSpPr txBox="1"/>
+          <p:nvPr/>
+        </p:nvSpPr>
+        <p:spPr>
+          <a:xfrm>
+            <a:off x="5669280" y="3621024"/>
+            <a:ext cx="5852160" cy="219456"/>
           </a:xfrm>
           <a:prstGeom prst="rect">
             <a:avLst/>
@@ -13508,7 +12986,7 @@
               </a:spcAft>
             </a:pPr>
             <a:r>
-              <a:rPr sz="1050" b="1">
+              <a:rPr sz="1000" b="1">
                 <a:solidFill>
                   <a:srgbClr val="FFFFFF"/>
                 </a:solidFill>
@@ -13521,14 +12999,14 @@
       </p:sp>
       <p:sp>
         <p:nvSpPr>
-          <p:cNvPr id="38" name="Rectangle 37"/>
+          <p:cNvPr id="41" name="Rectangle 40"/>
           <p:cNvSpPr/>
           <p:nvPr/>
         </p:nvSpPr>
         <p:spPr>
           <a:xfrm>
-            <a:off x="457200" y="3794760"/>
-            <a:ext cx="11292840" cy="429768"/>
+            <a:off x="457200" y="3867912"/>
+            <a:ext cx="11292840" cy="411480"/>
           </a:xfrm>
           <a:prstGeom prst="rect">
             <a:avLst/>
@@ -13567,14 +13045,14 @@
       </p:sp>
       <p:sp>
         <p:nvSpPr>
-          <p:cNvPr id="39" name="TextBox 38"/>
-          <p:cNvSpPr txBox="1"/>
-          <p:nvPr/>
-        </p:nvSpPr>
-        <p:spPr>
-          <a:xfrm>
-            <a:off x="640080" y="3858768"/>
-            <a:ext cx="4754880" cy="365760"/>
+          <p:cNvPr id="42" name="TextBox 41"/>
+          <p:cNvSpPr txBox="1"/>
+          <p:nvPr/>
+        </p:nvSpPr>
+        <p:spPr>
+          <a:xfrm>
+            <a:off x="640080" y="3931920"/>
+            <a:ext cx="4754880" cy="347472"/>
           </a:xfrm>
           <a:prstGeom prst="rect">
             <a:avLst/>
@@ -13596,7 +13074,7 @@
               </a:spcAft>
             </a:pPr>
             <a:r>
-              <a:rPr sz="1000" b="1">
+              <a:rPr sz="950" b="1">
                 <a:solidFill>
                   <a:srgbClr val="1F3864"/>
                 </a:solidFill>
@@ -13609,14 +13087,14 @@
       </p:sp>
       <p:sp>
         <p:nvSpPr>
-          <p:cNvPr id="40" name="TextBox 39"/>
-          <p:cNvSpPr txBox="1"/>
-          <p:nvPr/>
-        </p:nvSpPr>
-        <p:spPr>
-          <a:xfrm>
-            <a:off x="5669280" y="3858768"/>
-            <a:ext cx="5897880" cy="365760"/>
+          <p:cNvPr id="43" name="TextBox 42"/>
+          <p:cNvSpPr txBox="1"/>
+          <p:nvPr/>
+        </p:nvSpPr>
+        <p:spPr>
+          <a:xfrm>
+            <a:off x="5669280" y="3931920"/>
+            <a:ext cx="5897880" cy="347472"/>
           </a:xfrm>
           <a:prstGeom prst="rect">
             <a:avLst/>
@@ -13638,27 +13116,27 @@
               </a:spcAft>
             </a:pPr>
             <a:r>
-              <a:rPr sz="950" b="0">
+              <a:rPr sz="900" b="0">
                 <a:solidFill>
                   <a:srgbClr val="444C57"/>
                 </a:solidFill>
                 <a:latin typeface="Calibri"/>
               </a:rPr>
-              <a:t>Offline-first architecture: local operating DB + local AI node; sync ledger drains automatically on reconnect.</a:t>
-            </a:r>
-          </a:p>
-        </p:txBody>
-      </p:sp>
-      <p:sp>
-        <p:nvSpPr>
-          <p:cNvPr id="41" name="Rectangle 40"/>
+              <a:t>Offline-first architecture: local operating DB + local AI node; the sync ledger drains on reconnect.</a:t>
+            </a:r>
+          </a:p>
+        </p:txBody>
+      </p:sp>
+      <p:sp>
+        <p:nvSpPr>
+          <p:cNvPr id="44" name="Rectangle 43"/>
           <p:cNvSpPr/>
           <p:nvPr/>
         </p:nvSpPr>
         <p:spPr>
           <a:xfrm>
-            <a:off x="457200" y="4224528"/>
-            <a:ext cx="11292840" cy="429768"/>
+            <a:off x="457200" y="4279392"/>
+            <a:ext cx="11292840" cy="411480"/>
           </a:xfrm>
           <a:prstGeom prst="rect">
             <a:avLst/>
@@ -13697,14 +13175,14 @@
       </p:sp>
       <p:sp>
         <p:nvSpPr>
-          <p:cNvPr id="42" name="TextBox 41"/>
-          <p:cNvSpPr txBox="1"/>
-          <p:nvPr/>
-        </p:nvSpPr>
-        <p:spPr>
-          <a:xfrm>
-            <a:off x="640080" y="4288536"/>
-            <a:ext cx="4754880" cy="365760"/>
+          <p:cNvPr id="45" name="TextBox 44"/>
+          <p:cNvSpPr txBox="1"/>
+          <p:nvPr/>
+        </p:nvSpPr>
+        <p:spPr>
+          <a:xfrm>
+            <a:off x="640080" y="4343400"/>
+            <a:ext cx="4754880" cy="347472"/>
           </a:xfrm>
           <a:prstGeom prst="rect">
             <a:avLst/>
@@ -13726,7 +13204,7 @@
               </a:spcAft>
             </a:pPr>
             <a:r>
-              <a:rPr sz="1000" b="1">
+              <a:rPr sz="950" b="1">
                 <a:solidFill>
                   <a:srgbClr val="1F3864"/>
                 </a:solidFill>
@@ -13739,14 +13217,14 @@
       </p:sp>
       <p:sp>
         <p:nvSpPr>
-          <p:cNvPr id="43" name="TextBox 42"/>
-          <p:cNvSpPr txBox="1"/>
-          <p:nvPr/>
-        </p:nvSpPr>
-        <p:spPr>
-          <a:xfrm>
-            <a:off x="5669280" y="4288536"/>
-            <a:ext cx="5897880" cy="365760"/>
+          <p:cNvPr id="46" name="TextBox 45"/>
+          <p:cNvSpPr txBox="1"/>
+          <p:nvPr/>
+        </p:nvSpPr>
+        <p:spPr>
+          <a:xfrm>
+            <a:off x="5669280" y="4343400"/>
+            <a:ext cx="5897880" cy="347472"/>
           </a:xfrm>
           <a:prstGeom prst="rect">
             <a:avLst/>
@@ -13768,27 +13246,27 @@
               </a:spcAft>
             </a:pPr>
             <a:r>
-              <a:rPr sz="950" b="0">
+              <a:rPr sz="900" b="0">
                 <a:solidFill>
                   <a:srgbClr val="444C57"/>
                 </a:solidFill>
                 <a:latin typeface="Calibri"/>
               </a:rPr>
-              <a:t>Decimated LOD meshes by default, full-resolution GLB as optional download; renderer degrades to metadata-only view.</a:t>
-            </a:r>
-          </a:p>
-        </p:txBody>
-      </p:sp>
-      <p:sp>
-        <p:nvSpPr>
-          <p:cNvPr id="44" name="Rectangle 43"/>
+              <a:t>Decimated LOD meshes by default, full-resolution GLB optional; degrades to metadata-only view.</a:t>
+            </a:r>
+          </a:p>
+        </p:txBody>
+      </p:sp>
+      <p:sp>
+        <p:nvSpPr>
+          <p:cNvPr id="47" name="Rectangle 46"/>
           <p:cNvSpPr/>
           <p:nvPr/>
         </p:nvSpPr>
         <p:spPr>
           <a:xfrm>
-            <a:off x="457200" y="4654296"/>
-            <a:ext cx="11292840" cy="429768"/>
+            <a:off x="457200" y="4690872"/>
+            <a:ext cx="11292840" cy="411480"/>
           </a:xfrm>
           <a:prstGeom prst="rect">
             <a:avLst/>
@@ -13827,14 +13305,14 @@
       </p:sp>
       <p:sp>
         <p:nvSpPr>
-          <p:cNvPr id="45" name="TextBox 44"/>
-          <p:cNvSpPr txBox="1"/>
-          <p:nvPr/>
-        </p:nvSpPr>
-        <p:spPr>
-          <a:xfrm>
-            <a:off x="640080" y="4718304"/>
-            <a:ext cx="4754880" cy="365760"/>
+          <p:cNvPr id="48" name="TextBox 47"/>
+          <p:cNvSpPr txBox="1"/>
+          <p:nvPr/>
+        </p:nvSpPr>
+        <p:spPr>
+          <a:xfrm>
+            <a:off x="640080" y="4754880"/>
+            <a:ext cx="4754880" cy="347472"/>
           </a:xfrm>
           <a:prstGeom prst="rect">
             <a:avLst/>
@@ -13856,7 +13334,7 @@
               </a:spcAft>
             </a:pPr>
             <a:r>
-              <a:rPr sz="1000" b="1">
+              <a:rPr sz="950" b="1">
                 <a:solidFill>
                   <a:srgbClr val="1F3864"/>
                 </a:solidFill>
@@ -13869,14 +13347,14 @@
       </p:sp>
       <p:sp>
         <p:nvSpPr>
-          <p:cNvPr id="46" name="TextBox 45"/>
-          <p:cNvSpPr txBox="1"/>
-          <p:nvPr/>
-        </p:nvSpPr>
-        <p:spPr>
-          <a:xfrm>
-            <a:off x="5669280" y="4718304"/>
-            <a:ext cx="5897880" cy="365760"/>
+          <p:cNvPr id="49" name="TextBox 48"/>
+          <p:cNvSpPr txBox="1"/>
+          <p:nvPr/>
+        </p:nvSpPr>
+        <p:spPr>
+          <a:xfrm>
+            <a:off x="5669280" y="4754880"/>
+            <a:ext cx="5897880" cy="347472"/>
           </a:xfrm>
           <a:prstGeom prst="rect">
             <a:avLst/>
@@ -13898,27 +13376,27 @@
               </a:spcAft>
             </a:pPr>
             <a:r>
-              <a:rPr sz="950" b="0">
+              <a:rPr sz="900" b="0">
                 <a:solidFill>
                   <a:srgbClr val="444C57"/>
                 </a:solidFill>
                 <a:latin typeface="Calibri"/>
               </a:rPr>
-              <a:t>Admin-approved devices only, Argon2id verifier (never the password), bounded grace window, audit + re-verification on sync.</a:t>
-            </a:r>
-          </a:p>
-        </p:txBody>
-      </p:sp>
-      <p:sp>
-        <p:nvSpPr>
-          <p:cNvPr id="47" name="Rectangle 46"/>
+              <a:t>Admin-approved devices only, Argon2id verifier, bounded grace window, audit + re-verification.</a:t>
+            </a:r>
+          </a:p>
+        </p:txBody>
+      </p:sp>
+      <p:sp>
+        <p:nvSpPr>
+          <p:cNvPr id="50" name="Rectangle 49"/>
           <p:cNvSpPr/>
           <p:nvPr/>
         </p:nvSpPr>
         <p:spPr>
           <a:xfrm>
-            <a:off x="457200" y="5084064"/>
-            <a:ext cx="11292840" cy="429768"/>
+            <a:off x="457200" y="5102352"/>
+            <a:ext cx="11292840" cy="411480"/>
           </a:xfrm>
           <a:prstGeom prst="rect">
             <a:avLst/>
@@ -13957,14 +13435,14 @@
       </p:sp>
       <p:sp>
         <p:nvSpPr>
-          <p:cNvPr id="48" name="TextBox 47"/>
-          <p:cNvSpPr txBox="1"/>
-          <p:nvPr/>
-        </p:nvSpPr>
-        <p:spPr>
-          <a:xfrm>
-            <a:off x="640080" y="5148072"/>
-            <a:ext cx="4754880" cy="365760"/>
+          <p:cNvPr id="51" name="TextBox 50"/>
+          <p:cNvSpPr txBox="1"/>
+          <p:nvPr/>
+        </p:nvSpPr>
+        <p:spPr>
+          <a:xfrm>
+            <a:off x="640080" y="5166360"/>
+            <a:ext cx="4754880" cy="347472"/>
           </a:xfrm>
           <a:prstGeom prst="rect">
             <a:avLst/>
@@ -13986,7 +13464,7 @@
               </a:spcAft>
             </a:pPr>
             <a:r>
-              <a:rPr sz="1000" b="1">
+              <a:rPr sz="950" b="1">
                 <a:solidFill>
                   <a:srgbClr val="1F3864"/>
                 </a:solidFill>
@@ -13999,14 +13477,14 @@
       </p:sp>
       <p:sp>
         <p:nvSpPr>
-          <p:cNvPr id="49" name="TextBox 48"/>
-          <p:cNvSpPr txBox="1"/>
-          <p:nvPr/>
-        </p:nvSpPr>
-        <p:spPr>
-          <a:xfrm>
-            <a:off x="5669280" y="5148072"/>
-            <a:ext cx="5897880" cy="365760"/>
+          <p:cNvPr id="52" name="TextBox 51"/>
+          <p:cNvSpPr txBox="1"/>
+          <p:nvPr/>
+        </p:nvSpPr>
+        <p:spPr>
+          <a:xfrm>
+            <a:off x="5669280" y="5166360"/>
+            <a:ext cx="5897880" cy="347472"/>
           </a:xfrm>
           <a:prstGeom prst="rect">
             <a:avLst/>
@@ -14028,27 +13506,27 @@
               </a:spcAft>
             </a:pPr>
             <a:r>
-              <a:rPr sz="950" b="0">
+              <a:rPr sz="900" b="0">
                 <a:solidFill>
                   <a:srgbClr val="444C57"/>
                 </a:solidFill>
                 <a:latin typeface="Calibri"/>
               </a:rPr>
-              <a:t>Per-entity strategies (version compare, field merge, manual queue); diagnostic records are never silently overwritten.</a:t>
-            </a:r>
-          </a:p>
-        </p:txBody>
-      </p:sp>
-      <p:sp>
-        <p:nvSpPr>
-          <p:cNvPr id="50" name="Rectangle 49"/>
+              <a:t>Per-entity strategies with a manual-resolution queue; diagnostics are never silently overwritten.</a:t>
+            </a:r>
+          </a:p>
+        </p:txBody>
+      </p:sp>
+      <p:sp>
+        <p:nvSpPr>
+          <p:cNvPr id="53" name="Rectangle 52"/>
           <p:cNvSpPr/>
           <p:nvPr/>
         </p:nvSpPr>
         <p:spPr>
           <a:xfrm>
-            <a:off x="457200" y="5513831"/>
-            <a:ext cx="11292840" cy="429768"/>
+            <a:off x="457200" y="5513832"/>
+            <a:ext cx="11292840" cy="411480"/>
           </a:xfrm>
           <a:prstGeom prst="rect">
             <a:avLst/>
@@ -14087,14 +13565,14 @@
       </p:sp>
       <p:sp>
         <p:nvSpPr>
-          <p:cNvPr id="51" name="TextBox 50"/>
-          <p:cNvSpPr txBox="1"/>
-          <p:nvPr/>
-        </p:nvSpPr>
-        <p:spPr>
-          <a:xfrm>
-            <a:off x="640080" y="5577839"/>
-            <a:ext cx="4754880" cy="365760"/>
+          <p:cNvPr id="54" name="TextBox 53"/>
+          <p:cNvSpPr txBox="1"/>
+          <p:nvPr/>
+        </p:nvSpPr>
+        <p:spPr>
+          <a:xfrm>
+            <a:off x="640080" y="5577840"/>
+            <a:ext cx="4754880" cy="347472"/>
           </a:xfrm>
           <a:prstGeom prst="rect">
             <a:avLst/>
@@ -14116,7 +13594,7 @@
               </a:spcAft>
             </a:pPr>
             <a:r>
-              <a:rPr sz="1000" b="1">
+              <a:rPr sz="950" b="1">
                 <a:solidFill>
                   <a:srgbClr val="1F3864"/>
                 </a:solidFill>
@@ -14129,14 +13607,14 @@
       </p:sp>
       <p:sp>
         <p:nvSpPr>
-          <p:cNvPr id="52" name="TextBox 51"/>
-          <p:cNvSpPr txBox="1"/>
-          <p:nvPr/>
-        </p:nvSpPr>
-        <p:spPr>
-          <a:xfrm>
-            <a:off x="5669280" y="5577839"/>
-            <a:ext cx="5897880" cy="365760"/>
+          <p:cNvPr id="55" name="TextBox 54"/>
+          <p:cNvSpPr txBox="1"/>
+          <p:nvPr/>
+        </p:nvSpPr>
+        <p:spPr>
+          <a:xfrm>
+            <a:off x="5669280" y="5577840"/>
+            <a:ext cx="5897880" cy="347472"/>
           </a:xfrm>
           <a:prstGeom prst="rect">
             <a:avLst/>
@@ -14158,27 +13636,27 @@
               </a:spcAft>
             </a:pPr>
             <a:r>
-              <a:rPr sz="950" b="0">
+              <a:rPr sz="900" b="0">
                 <a:solidFill>
                   <a:srgbClr val="444C57"/>
                 </a:solidFill>
                 <a:latin typeface="Calibri"/>
               </a:rPr>
-              <a:t>Role-tailored simple UI, localisation-ready strings for Indian languages, optional voice input, in-app guided demo scenario.</a:t>
-            </a:r>
-          </a:p>
-        </p:txBody>
-      </p:sp>
-      <p:sp>
-        <p:nvSpPr>
-          <p:cNvPr id="53" name="Rectangle 52"/>
+              <a:t>Role-tailored simple UI, localisation-ready strings, optional voice input, in-app guided scenario.</a:t>
+            </a:r>
+          </a:p>
+        </p:txBody>
+      </p:sp>
+      <p:sp>
+        <p:nvSpPr>
+          <p:cNvPr id="56" name="Rectangle 55"/>
           <p:cNvSpPr/>
           <p:nvPr/>
         </p:nvSpPr>
         <p:spPr>
           <a:xfrm>
-            <a:off x="457200" y="5943599"/>
-            <a:ext cx="11292840" cy="429768"/>
+            <a:off x="457200" y="5925312"/>
+            <a:ext cx="11292840" cy="411480"/>
           </a:xfrm>
           <a:prstGeom prst="rect">
             <a:avLst/>
@@ -14217,14 +13695,14 @@
       </p:sp>
       <p:sp>
         <p:nvSpPr>
-          <p:cNvPr id="54" name="TextBox 53"/>
-          <p:cNvSpPr txBox="1"/>
-          <p:nvPr/>
-        </p:nvSpPr>
-        <p:spPr>
-          <a:xfrm>
-            <a:off x="640080" y="6007607"/>
-            <a:ext cx="4754880" cy="365760"/>
+          <p:cNvPr id="57" name="TextBox 56"/>
+          <p:cNvSpPr txBox="1"/>
+          <p:nvPr/>
+        </p:nvSpPr>
+        <p:spPr>
+          <a:xfrm>
+            <a:off x="640080" y="5989320"/>
+            <a:ext cx="4754880" cy="347472"/>
           </a:xfrm>
           <a:prstGeom prst="rect">
             <a:avLst/>
@@ -14246,7 +13724,7 @@
               </a:spcAft>
             </a:pPr>
             <a:r>
-              <a:rPr sz="1000" b="1">
+              <a:rPr sz="950" b="1">
                 <a:solidFill>
                   <a:srgbClr val="1F3864"/>
                 </a:solidFill>
@@ -14259,14 +13737,14 @@
       </p:sp>
       <p:sp>
         <p:nvSpPr>
-          <p:cNvPr id="55" name="TextBox 54"/>
-          <p:cNvSpPr txBox="1"/>
-          <p:nvPr/>
-        </p:nvSpPr>
-        <p:spPr>
-          <a:xfrm>
-            <a:off x="5669280" y="6007607"/>
-            <a:ext cx="5897880" cy="365760"/>
+          <p:cNvPr id="58" name="TextBox 57"/>
+          <p:cNvSpPr txBox="1"/>
+          <p:nvPr/>
+        </p:nvSpPr>
+        <p:spPr>
+          <a:xfrm>
+            <a:off x="5669280" y="5989320"/>
+            <a:ext cx="5897880" cy="347472"/>
           </a:xfrm>
           <a:prstGeom prst="rect">
             <a:avLst/>
@@ -14288,13 +13766,13 @@
               </a:spcAft>
             </a:pPr>
             <a:r>
-              <a:rPr sz="950" b="0">
+              <a:rPr sz="900" b="0">
                 <a:solidFill>
                   <a:srgbClr val="444C57"/>
                 </a:solidFill>
                 <a:latin typeface="Calibri"/>
               </a:rPr>
-              <a:t>Storage manager with per-category usage, resumable downloads, permissioned removal of optional assets only.</a:t>
+              <a:t>Storage manager with per-category usage, resumable downloads, permissioned asset removal.</a:t>
             </a:r>
           </a:p>
         </p:txBody>
@@ -14990,8 +14468,118 @@
         </p:nvSpPr>
         <p:spPr>
           <a:xfrm>
+            <a:off x="8896350" y="1507998"/>
+            <a:ext cx="2872740" cy="1638300"/>
+          </a:xfrm>
+          <a:prstGeom prst="rect">
+            <a:avLst/>
+          </a:prstGeom>
+          <a:solidFill>
+            <a:srgbClr val="1F3864"/>
+          </a:solidFill>
+          <a:ln>
+            <a:noFill/>
+          </a:ln>
+          <a:effectLst/>
+        </p:spPr>
+        <p:style>
+          <a:lnRef idx="1">
+            <a:schemeClr val="accent1"/>
+          </a:lnRef>
+          <a:fillRef idx="3">
+            <a:schemeClr val="accent1"/>
+          </a:fillRef>
+          <a:effectRef idx="2">
+            <a:schemeClr val="accent1"/>
+          </a:effectRef>
+          <a:fontRef idx="minor">
+            <a:schemeClr val="lt1"/>
+          </a:fontRef>
+        </p:style>
+        <p:txBody>
+          <a:bodyPr rtlCol="0" anchor="ctr"/>
+          <a:lstStyle/>
+          <a:p>
+            <a:pPr algn="ctr"/>
+          </a:p>
+        </p:txBody>
+      </p:sp>
+      <p:pic>
+        <p:nvPicPr>
+          <p:cNvPr id="18" name="Picture 17" descr="s5_training.jpg"/>
+          <p:cNvPicPr>
+            <a:picLocks noChangeAspect="1"/>
+          </p:cNvPicPr>
+          <p:nvPr/>
+        </p:nvPicPr>
+        <p:blipFill>
+          <a:blip r:embed="rId2"/>
+          <a:stretch>
+            <a:fillRect/>
+          </a:stretch>
+        </p:blipFill>
+        <p:spPr>
+          <a:xfrm>
+            <a:off x="8915400" y="1527048"/>
+            <a:ext cx="2834640" cy="1600200"/>
+          </a:xfrm>
+          <a:prstGeom prst="rect">
+            <a:avLst/>
+          </a:prstGeom>
+        </p:spPr>
+      </p:pic>
+      <p:sp>
+        <p:nvSpPr>
+          <p:cNvPr id="19" name="TextBox 18"/>
+          <p:cNvSpPr txBox="1"/>
+          <p:nvPr/>
+        </p:nvSpPr>
+        <p:spPr>
+          <a:xfrm>
+            <a:off x="8915400" y="3172968"/>
+            <a:ext cx="2834640" cy="201168"/>
+          </a:xfrm>
+          <a:prstGeom prst="rect">
+            <a:avLst/>
+          </a:prstGeom>
+          <a:noFill/>
+        </p:spPr>
+        <p:txBody>
+          <a:bodyPr wrap="square" lIns="0" rIns="0" tIns="0" bIns="0" anchor="t">
+            <a:spAutoFit/>
+          </a:bodyPr>
+          <a:lstStyle/>
+          <a:p>
+            <a:pPr algn="l">
+              <a:lnSpc>
+                <a:spcPct val="108000"/>
+              </a:lnSpc>
+              <a:spcAft>
+                <a:spcPts val="300"/>
+              </a:spcAft>
+            </a:pPr>
+            <a:r>
+              <a:rPr sz="800" b="0">
+                <a:solidFill>
+                  <a:srgbClr val="444C57"/>
+                </a:solidFill>
+                <a:latin typeface="Calibri"/>
+              </a:rPr>
+              <a:t>Trainers and trainees on one governed platform</a:t>
+            </a:r>
+          </a:p>
+        </p:txBody>
+      </p:sp>
+      <p:sp>
+        <p:nvSpPr>
+          <p:cNvPr id="20" name="Rectangle 19"/>
+          <p:cNvSpPr/>
+          <p:nvPr/>
+        </p:nvSpPr>
+        <p:spPr>
+          <a:xfrm>
             <a:off x="457200" y="1527048"/>
-            <a:ext cx="3611880" cy="1755648"/>
+            <a:ext cx="2606040" cy="1737360"/>
           </a:xfrm>
           <a:prstGeom prst="rect">
             <a:avLst/>
@@ -15030,14 +14618,14 @@
       </p:sp>
       <p:sp>
         <p:nvSpPr>
-          <p:cNvPr id="18" name="Rectangle 17"/>
+          <p:cNvPr id="21" name="Rectangle 20"/>
           <p:cNvSpPr/>
           <p:nvPr/>
         </p:nvSpPr>
         <p:spPr>
           <a:xfrm>
             <a:off x="457200" y="1527048"/>
-            <a:ext cx="3611880" cy="50800"/>
+            <a:ext cx="2606040" cy="50800"/>
           </a:xfrm>
           <a:prstGeom prst="rect">
             <a:avLst/>
@@ -15074,14 +14662,14 @@
       </p:sp>
       <p:sp>
         <p:nvSpPr>
-          <p:cNvPr id="19" name="TextBox 18"/>
-          <p:cNvSpPr txBox="1"/>
-          <p:nvPr/>
-        </p:nvSpPr>
-        <p:spPr>
-          <a:xfrm>
-            <a:off x="603504" y="1655064"/>
-            <a:ext cx="3291840" cy="256032"/>
+          <p:cNvPr id="22" name="TextBox 21"/>
+          <p:cNvSpPr txBox="1"/>
+          <p:nvPr/>
+        </p:nvSpPr>
+        <p:spPr>
+          <a:xfrm>
+            <a:off x="585216" y="1636776"/>
+            <a:ext cx="2377440" cy="237744"/>
           </a:xfrm>
           <a:prstGeom prst="rect">
             <a:avLst/>
@@ -15103,7 +14691,7 @@
               </a:spcAft>
             </a:pPr>
             <a:r>
-              <a:rPr sz="1100" b="1">
+              <a:rPr sz="1000" b="1">
                 <a:solidFill>
                   <a:srgbClr val="1E6FBA"/>
                 </a:solidFill>
@@ -15116,14 +14704,14 @@
       </p:sp>
       <p:sp>
         <p:nvSpPr>
-          <p:cNvPr id="20" name="TextBox 19"/>
-          <p:cNvSpPr txBox="1"/>
-          <p:nvPr/>
-        </p:nvSpPr>
-        <p:spPr>
-          <a:xfrm>
-            <a:off x="603504" y="1947672"/>
-            <a:ext cx="3291840" cy="402336"/>
+          <p:cNvPr id="23" name="TextBox 22"/>
+          <p:cNvSpPr txBox="1"/>
+          <p:nvPr/>
+        </p:nvSpPr>
+        <p:spPr>
+          <a:xfrm>
+            <a:off x="585216" y="1947672"/>
+            <a:ext cx="2377440" cy="402336"/>
           </a:xfrm>
           <a:prstGeom prst="rect">
             <a:avLst/>
@@ -15145,36 +14733,36 @@
               </a:spcAft>
             </a:pPr>
             <a:r>
-              <a:rPr sz="950" b="1">
+              <a:rPr sz="900" b="1">
                 <a:solidFill>
                   <a:srgbClr val="1E6FBA"/>
                 </a:solidFill>
                 <a:latin typeface="Calibri"/>
               </a:rPr>
-              <a:t>· </a:t>
-            </a:r>
-            <a:r>
-              <a:rPr sz="950" b="0">
+              <a:t>- </a:t>
+            </a:r>
+            <a:r>
+              <a:rPr sz="900" b="0">
                 <a:solidFill>
                   <a:srgbClr val="444C57"/>
                 </a:solidFill>
                 <a:latin typeface="Calibri"/>
               </a:rPr>
-              <a:t>Learn, test and certify with zero connectivity — at sea and at remote sites</a:t>
-            </a:r>
-          </a:p>
-        </p:txBody>
-      </p:sp>
-      <p:sp>
-        <p:nvSpPr>
-          <p:cNvPr id="21" name="TextBox 20"/>
-          <p:cNvSpPr txBox="1"/>
-          <p:nvPr/>
-        </p:nvSpPr>
-        <p:spPr>
-          <a:xfrm>
-            <a:off x="603504" y="2377440"/>
-            <a:ext cx="3291840" cy="402336"/>
+              <a:t>Learn, test and certify with zero connectivity</a:t>
+            </a:r>
+          </a:p>
+        </p:txBody>
+      </p:sp>
+      <p:sp>
+        <p:nvSpPr>
+          <p:cNvPr id="24" name="TextBox 23"/>
+          <p:cNvSpPr txBox="1"/>
+          <p:nvPr/>
+        </p:nvSpPr>
+        <p:spPr>
+          <a:xfrm>
+            <a:off x="585216" y="2377440"/>
+            <a:ext cx="2377440" cy="402336"/>
           </a:xfrm>
           <a:prstGeom prst="rect">
             <a:avLst/>
@@ -15196,16 +14784,16 @@
               </a:spcAft>
             </a:pPr>
             <a:r>
-              <a:rPr sz="950" b="1">
+              <a:rPr sz="900" b="1">
                 <a:solidFill>
                   <a:srgbClr val="1E6FBA"/>
                 </a:solidFill>
                 <a:latin typeface="Calibri"/>
               </a:rPr>
-              <a:t>· </a:t>
-            </a:r>
-            <a:r>
-              <a:rPr sz="950" b="0">
+              <a:t>- </a:t>
+            </a:r>
+            <a:r>
+              <a:rPr sz="900" b="0">
                 <a:solidFill>
                   <a:srgbClr val="444C57"/>
                 </a:solidFill>
@@ -15218,14 +14806,14 @@
       </p:sp>
       <p:sp>
         <p:nvSpPr>
-          <p:cNvPr id="22" name="TextBox 21"/>
-          <p:cNvSpPr txBox="1"/>
-          <p:nvPr/>
-        </p:nvSpPr>
-        <p:spPr>
-          <a:xfrm>
-            <a:off x="603504" y="2807208"/>
-            <a:ext cx="3291840" cy="402336"/>
+          <p:cNvPr id="25" name="TextBox 24"/>
+          <p:cNvSpPr txBox="1"/>
+          <p:nvPr/>
+        </p:nvSpPr>
+        <p:spPr>
+          <a:xfrm>
+            <a:off x="585216" y="2807208"/>
+            <a:ext cx="2377440" cy="402336"/>
           </a:xfrm>
           <a:prstGeom prst="rect">
             <a:avLst/>
@@ -15247,16 +14835,16 @@
               </a:spcAft>
             </a:pPr>
             <a:r>
-              <a:rPr sz="950" b="1">
+              <a:rPr sz="900" b="1">
                 <a:solidFill>
                   <a:srgbClr val="1E6FBA"/>
                 </a:solidFill>
                 <a:latin typeface="Calibri"/>
               </a:rPr>
-              <a:t>· </a:t>
-            </a:r>
-            <a:r>
-              <a:rPr sz="950" b="0">
+              <a:t>- </a:t>
+            </a:r>
+            <a:r>
+              <a:rPr sz="900" b="0">
                 <a:solidFill>
                   <a:srgbClr val="444C57"/>
                 </a:solidFill>
@@ -15269,14 +14857,14 @@
       </p:sp>
       <p:sp>
         <p:nvSpPr>
-          <p:cNvPr id="23" name="Rectangle 22"/>
+          <p:cNvPr id="26" name="Rectangle 25"/>
           <p:cNvSpPr/>
           <p:nvPr/>
         </p:nvSpPr>
         <p:spPr>
           <a:xfrm>
-            <a:off x="4251960" y="1527048"/>
-            <a:ext cx="3611880" cy="1755648"/>
+            <a:off x="3246120" y="1527048"/>
+            <a:ext cx="2606040" cy="1737360"/>
           </a:xfrm>
           <a:prstGeom prst="rect">
             <a:avLst/>
@@ -15315,14 +14903,14 @@
       </p:sp>
       <p:sp>
         <p:nvSpPr>
-          <p:cNvPr id="24" name="Rectangle 23"/>
+          <p:cNvPr id="27" name="Rectangle 26"/>
           <p:cNvSpPr/>
           <p:nvPr/>
         </p:nvSpPr>
         <p:spPr>
           <a:xfrm>
-            <a:off x="4251960" y="1527048"/>
-            <a:ext cx="3611880" cy="50800"/>
+            <a:off x="3246120" y="1527048"/>
+            <a:ext cx="2606040" cy="50800"/>
           </a:xfrm>
           <a:prstGeom prst="rect">
             <a:avLst/>
@@ -15359,14 +14947,14 @@
       </p:sp>
       <p:sp>
         <p:nvSpPr>
-          <p:cNvPr id="25" name="TextBox 24"/>
-          <p:cNvSpPr txBox="1"/>
-          <p:nvPr/>
-        </p:nvSpPr>
-        <p:spPr>
-          <a:xfrm>
-            <a:off x="4398264" y="1655064"/>
-            <a:ext cx="3291840" cy="256032"/>
+          <p:cNvPr id="28" name="TextBox 27"/>
+          <p:cNvSpPr txBox="1"/>
+          <p:nvPr/>
+        </p:nvSpPr>
+        <p:spPr>
+          <a:xfrm>
+            <a:off x="3374136" y="1636776"/>
+            <a:ext cx="2377440" cy="237744"/>
           </a:xfrm>
           <a:prstGeom prst="rect">
             <a:avLst/>
@@ -15388,7 +14976,7 @@
               </a:spcAft>
             </a:pPr>
             <a:r>
-              <a:rPr sz="1100" b="1">
+              <a:rPr sz="1000" b="1">
                 <a:solidFill>
                   <a:srgbClr val="F27C1E"/>
                 </a:solidFill>
@@ -15401,14 +14989,14 @@
       </p:sp>
       <p:sp>
         <p:nvSpPr>
-          <p:cNvPr id="26" name="TextBox 25"/>
-          <p:cNvSpPr txBox="1"/>
-          <p:nvPr/>
-        </p:nvSpPr>
-        <p:spPr>
-          <a:xfrm>
-            <a:off x="4398264" y="1947672"/>
-            <a:ext cx="3291840" cy="402336"/>
+          <p:cNvPr id="29" name="TextBox 28"/>
+          <p:cNvSpPr txBox="1"/>
+          <p:nvPr/>
+        </p:nvSpPr>
+        <p:spPr>
+          <a:xfrm>
+            <a:off x="3374136" y="1947672"/>
+            <a:ext cx="2377440" cy="402336"/>
           </a:xfrm>
           <a:prstGeom prst="rect">
             <a:avLst/>
@@ -15430,36 +15018,36 @@
               </a:spcAft>
             </a:pPr>
             <a:r>
-              <a:rPr sz="950" b="1">
+              <a:rPr sz="900" b="1">
                 <a:solidFill>
                   <a:srgbClr val="F27C1E"/>
                 </a:solidFill>
                 <a:latin typeface="Calibri"/>
               </a:rPr>
-              <a:t>· </a:t>
-            </a:r>
-            <a:r>
-              <a:rPr sz="950" b="0">
+              <a:t>- </a:t>
+            </a:r>
+            <a:r>
+              <a:rPr sz="900" b="0">
                 <a:solidFill>
                   <a:srgbClr val="444C57"/>
                 </a:solidFill>
                 <a:latin typeface="Calibri"/>
               </a:rPr>
-              <a:t>One versioned library for lectures, presentations and material</a:t>
-            </a:r>
-          </a:p>
-        </p:txBody>
-      </p:sp>
-      <p:sp>
-        <p:nvSpPr>
-          <p:cNvPr id="27" name="TextBox 26"/>
-          <p:cNvSpPr txBox="1"/>
-          <p:nvPr/>
-        </p:nvSpPr>
-        <p:spPr>
-          <a:xfrm>
-            <a:off x="4398264" y="2377440"/>
-            <a:ext cx="3291840" cy="402336"/>
+              <a:t>One versioned library for lectures and material</a:t>
+            </a:r>
+          </a:p>
+        </p:txBody>
+      </p:sp>
+      <p:sp>
+        <p:nvSpPr>
+          <p:cNvPr id="30" name="TextBox 29"/>
+          <p:cNvSpPr txBox="1"/>
+          <p:nvPr/>
+        </p:nvSpPr>
+        <p:spPr>
+          <a:xfrm>
+            <a:off x="3374136" y="2377440"/>
+            <a:ext cx="2377440" cy="402336"/>
           </a:xfrm>
           <a:prstGeom prst="rect">
             <a:avLst/>
@@ -15481,36 +15069,36 @@
               </a:spcAft>
             </a:pPr>
             <a:r>
-              <a:rPr sz="950" b="1">
+              <a:rPr sz="900" b="1">
                 <a:solidFill>
                   <a:srgbClr val="F27C1E"/>
                 </a:solidFill>
                 <a:latin typeface="Calibri"/>
               </a:rPr>
-              <a:t>· </a:t>
-            </a:r>
-            <a:r>
-              <a:rPr sz="950" b="0">
+              <a:t>- </a:t>
+            </a:r>
+            <a:r>
+              <a:rPr sz="900" b="0">
                 <a:solidFill>
                   <a:srgbClr val="444C57"/>
                 </a:solidFill>
                 <a:latin typeface="Calibri"/>
               </a:rPr>
-              <a:t>Questionnaires with deadlines, auto-scoring, live participation view</a:t>
-            </a:r>
-          </a:p>
-        </p:txBody>
-      </p:sp>
-      <p:sp>
-        <p:nvSpPr>
-          <p:cNvPr id="28" name="TextBox 27"/>
-          <p:cNvSpPr txBox="1"/>
-          <p:nvPr/>
-        </p:nvSpPr>
-        <p:spPr>
-          <a:xfrm>
-            <a:off x="4398264" y="2807208"/>
-            <a:ext cx="3291840" cy="402336"/>
+              <a:t>Questionnaires with deadlines and auto-scoring</a:t>
+            </a:r>
+          </a:p>
+        </p:txBody>
+      </p:sp>
+      <p:sp>
+        <p:nvSpPr>
+          <p:cNvPr id="31" name="TextBox 30"/>
+          <p:cNvSpPr txBox="1"/>
+          <p:nvPr/>
+        </p:nvSpPr>
+        <p:spPr>
+          <a:xfrm>
+            <a:off x="3374136" y="2807208"/>
+            <a:ext cx="2377440" cy="402336"/>
           </a:xfrm>
           <a:prstGeom prst="rect">
             <a:avLst/>
@@ -15532,36 +15120,36 @@
               </a:spcAft>
             </a:pPr>
             <a:r>
-              <a:rPr sz="950" b="1">
+              <a:rPr sz="900" b="1">
                 <a:solidFill>
                   <a:srgbClr val="F27C1E"/>
                 </a:solidFill>
                 <a:latin typeface="Calibri"/>
               </a:rPr>
-              <a:t>· </a:t>
-            </a:r>
-            <a:r>
-              <a:rPr sz="950" b="0">
+              <a:t>- </a:t>
+            </a:r>
+            <a:r>
+              <a:rPr sz="900" b="0">
                 <a:solidFill>
                   <a:srgbClr val="444C57"/>
                 </a:solidFill>
                 <a:latin typeface="Calibri"/>
               </a:rPr>
-              <a:t>Feedback shows which content actually works</a:t>
-            </a:r>
-          </a:p>
-        </p:txBody>
-      </p:sp>
-      <p:sp>
-        <p:nvSpPr>
-          <p:cNvPr id="29" name="Rectangle 28"/>
+              <a:t>Live participation and performance view</a:t>
+            </a:r>
+          </a:p>
+        </p:txBody>
+      </p:sp>
+      <p:sp>
+        <p:nvSpPr>
+          <p:cNvPr id="32" name="Rectangle 31"/>
           <p:cNvSpPr/>
           <p:nvPr/>
         </p:nvSpPr>
         <p:spPr>
           <a:xfrm>
-            <a:off x="8046720" y="1527048"/>
-            <a:ext cx="3611880" cy="1755648"/>
+            <a:off x="6035040" y="1527048"/>
+            <a:ext cx="2606040" cy="1737360"/>
           </a:xfrm>
           <a:prstGeom prst="rect">
             <a:avLst/>
@@ -15600,14 +15188,14 @@
       </p:sp>
       <p:sp>
         <p:nvSpPr>
-          <p:cNvPr id="30" name="Rectangle 29"/>
+          <p:cNvPr id="33" name="Rectangle 32"/>
           <p:cNvSpPr/>
           <p:nvPr/>
         </p:nvSpPr>
         <p:spPr>
           <a:xfrm>
-            <a:off x="8046720" y="1527048"/>
-            <a:ext cx="3611880" cy="50800"/>
+            <a:off x="6035040" y="1527048"/>
+            <a:ext cx="2606040" cy="50800"/>
           </a:xfrm>
           <a:prstGeom prst="rect">
             <a:avLst/>
@@ -15644,14 +15232,14 @@
       </p:sp>
       <p:sp>
         <p:nvSpPr>
-          <p:cNvPr id="31" name="TextBox 30"/>
-          <p:cNvSpPr txBox="1"/>
-          <p:nvPr/>
-        </p:nvSpPr>
-        <p:spPr>
-          <a:xfrm>
-            <a:off x="8193024" y="1655064"/>
-            <a:ext cx="3291840" cy="256032"/>
+          <p:cNvPr id="34" name="TextBox 33"/>
+          <p:cNvSpPr txBox="1"/>
+          <p:nvPr/>
+        </p:nvSpPr>
+        <p:spPr>
+          <a:xfrm>
+            <a:off x="6163056" y="1636776"/>
+            <a:ext cx="2377440" cy="237744"/>
           </a:xfrm>
           <a:prstGeom prst="rect">
             <a:avLst/>
@@ -15673,7 +15261,7 @@
               </a:spcAft>
             </a:pPr>
             <a:r>
-              <a:rPr sz="1100" b="1">
+              <a:rPr sz="1000" b="1">
                 <a:solidFill>
                   <a:srgbClr val="2E8B57"/>
                 </a:solidFill>
@@ -15686,14 +15274,14 @@
       </p:sp>
       <p:sp>
         <p:nvSpPr>
-          <p:cNvPr id="32" name="TextBox 31"/>
-          <p:cNvSpPr txBox="1"/>
-          <p:nvPr/>
-        </p:nvSpPr>
-        <p:spPr>
-          <a:xfrm>
-            <a:off x="8193024" y="1947672"/>
-            <a:ext cx="3291840" cy="402336"/>
+          <p:cNvPr id="35" name="TextBox 34"/>
+          <p:cNvSpPr txBox="1"/>
+          <p:nvPr/>
+        </p:nvSpPr>
+        <p:spPr>
+          <a:xfrm>
+            <a:off x="6163056" y="1947672"/>
+            <a:ext cx="2377440" cy="402336"/>
           </a:xfrm>
           <a:prstGeom prst="rect">
             <a:avLst/>
@@ -15715,36 +15303,36 @@
               </a:spcAft>
             </a:pPr>
             <a:r>
-              <a:rPr sz="950" b="1">
+              <a:rPr sz="900" b="1">
                 <a:solidFill>
                   <a:srgbClr val="2E8B57"/>
                 </a:solidFill>
                 <a:latin typeface="Calibri"/>
               </a:rPr>
-              <a:t>· </a:t>
-            </a:r>
-            <a:r>
-              <a:rPr sz="950" b="0">
+              <a:t>- </a:t>
+            </a:r>
+            <a:r>
+              <a:rPr sz="900" b="0">
                 <a:solidFill>
                   <a:srgbClr val="444C57"/>
                 </a:solidFill>
                 <a:latin typeface="Calibri"/>
               </a:rPr>
-              <a:t>Live dashboards of enrollment, certification and assessment</a:t>
-            </a:r>
-          </a:p>
-        </p:txBody>
-      </p:sp>
-      <p:sp>
-        <p:nvSpPr>
-          <p:cNvPr id="33" name="TextBox 32"/>
-          <p:cNvSpPr txBox="1"/>
-          <p:nvPr/>
-        </p:nvSpPr>
-        <p:spPr>
-          <a:xfrm>
-            <a:off x="8193024" y="2377440"/>
-            <a:ext cx="3291840" cy="402336"/>
+              <a:t>Dashboards: enrollment, certification, assessment</a:t>
+            </a:r>
+          </a:p>
+        </p:txBody>
+      </p:sp>
+      <p:sp>
+        <p:nvSpPr>
+          <p:cNvPr id="36" name="TextBox 35"/>
+          <p:cNvSpPr txBox="1"/>
+          <p:nvPr/>
+        </p:nvSpPr>
+        <p:spPr>
+          <a:xfrm>
+            <a:off x="6163056" y="2377440"/>
+            <a:ext cx="2377440" cy="402336"/>
           </a:xfrm>
           <a:prstGeom prst="rect">
             <a:avLst/>
@@ -15766,16 +15354,16 @@
               </a:spcAft>
             </a:pPr>
             <a:r>
-              <a:rPr sz="950" b="1">
+              <a:rPr sz="900" b="1">
                 <a:solidFill>
                   <a:srgbClr val="2E8B57"/>
                 </a:solidFill>
                 <a:latin typeface="Calibri"/>
               </a:rPr>
-              <a:t>· </a:t>
-            </a:r>
-            <a:r>
-              <a:rPr sz="950" b="0">
+              <a:t>- </a:t>
+            </a:r>
+            <a:r>
+              <a:rPr sz="900" b="0">
                 <a:solidFill>
                   <a:srgbClr val="444C57"/>
                 </a:solidFill>
@@ -15788,14 +15376,14 @@
       </p:sp>
       <p:sp>
         <p:nvSpPr>
-          <p:cNvPr id="34" name="TextBox 33"/>
-          <p:cNvSpPr txBox="1"/>
-          <p:nvPr/>
-        </p:nvSpPr>
-        <p:spPr>
-          <a:xfrm>
-            <a:off x="8193024" y="2807208"/>
-            <a:ext cx="3291840" cy="402336"/>
+          <p:cNvPr id="37" name="TextBox 36"/>
+          <p:cNvSpPr txBox="1"/>
+          <p:nvPr/>
+        </p:nvSpPr>
+        <p:spPr>
+          <a:xfrm>
+            <a:off x="6163056" y="2807208"/>
+            <a:ext cx="2377440" cy="402336"/>
           </a:xfrm>
           <a:prstGeom prst="rect">
             <a:avLst/>
@@ -15817,35 +15405,35 @@
               </a:spcAft>
             </a:pPr>
             <a:r>
-              <a:rPr sz="950" b="1">
+              <a:rPr sz="900" b="1">
                 <a:solidFill>
                   <a:srgbClr val="2E8B57"/>
                 </a:solidFill>
                 <a:latin typeface="Calibri"/>
               </a:rPr>
-              <a:t>· </a:t>
-            </a:r>
-            <a:r>
-              <a:rPr sz="950" b="0">
+              <a:t>- </a:t>
+            </a:r>
+            <a:r>
+              <a:rPr sz="900" b="0">
                 <a:solidFill>
                   <a:srgbClr val="444C57"/>
                 </a:solidFill>
                 <a:latin typeface="Calibri"/>
               </a:rPr>
-              <a:t>Complete audit trail for governance and reporting</a:t>
-            </a:r>
-          </a:p>
-        </p:txBody>
-      </p:sp>
-      <p:sp>
-        <p:nvSpPr>
-          <p:cNvPr id="35" name="Rounded Rectangle 34"/>
+              <a:t>Complete audit trail for governance</a:t>
+            </a:r>
+          </a:p>
+        </p:txBody>
+      </p:sp>
+      <p:sp>
+        <p:nvSpPr>
+          <p:cNvPr id="38" name="Rounded Rectangle 37"/>
           <p:cNvSpPr/>
           <p:nvPr/>
         </p:nvSpPr>
         <p:spPr>
           <a:xfrm>
-            <a:off x="457200" y="3483864"/>
+            <a:off x="457200" y="3465576"/>
             <a:ext cx="11292840" cy="347472"/>
           </a:xfrm>
           <a:prstGeom prst="roundRect">
@@ -15885,13 +15473,13 @@
       </p:sp>
       <p:sp>
         <p:nvSpPr>
-          <p:cNvPr id="36" name="TextBox 35"/>
-          <p:cNvSpPr txBox="1"/>
-          <p:nvPr/>
-        </p:nvSpPr>
-        <p:spPr>
-          <a:xfrm>
-            <a:off x="603504" y="3547872"/>
+          <p:cNvPr id="39" name="TextBox 38"/>
+          <p:cNvSpPr txBox="1"/>
+          <p:nvPr/>
+        </p:nvSpPr>
+        <p:spPr>
+          <a:xfrm>
+            <a:off x="603504" y="3529584"/>
             <a:ext cx="11018520" cy="256032"/>
           </a:xfrm>
           <a:prstGeom prst="rect">
@@ -15927,14 +15515,14 @@
       </p:sp>
       <p:sp>
         <p:nvSpPr>
-          <p:cNvPr id="37" name="Rectangle 36"/>
+          <p:cNvPr id="40" name="Rectangle 39"/>
           <p:cNvSpPr/>
           <p:nvPr/>
         </p:nvSpPr>
         <p:spPr>
           <a:xfrm>
-            <a:off x="457200" y="3959352"/>
-            <a:ext cx="3611880" cy="1234440"/>
+            <a:off x="457200" y="3941064"/>
+            <a:ext cx="3611880" cy="1188720"/>
           </a:xfrm>
           <a:prstGeom prst="rect">
             <a:avLst/>
@@ -15973,14 +15561,14 @@
       </p:sp>
       <p:sp>
         <p:nvSpPr>
-          <p:cNvPr id="38" name="Rectangle 37"/>
+          <p:cNvPr id="41" name="Rectangle 40"/>
           <p:cNvSpPr/>
           <p:nvPr/>
         </p:nvSpPr>
         <p:spPr>
           <a:xfrm>
-            <a:off x="457200" y="3959352"/>
-            <a:ext cx="50800" cy="1234440"/>
+            <a:off x="457200" y="3941064"/>
+            <a:ext cx="50800" cy="1188720"/>
           </a:xfrm>
           <a:prstGeom prst="rect">
             <a:avLst/>
@@ -16017,14 +15605,14 @@
       </p:sp>
       <p:sp>
         <p:nvSpPr>
-          <p:cNvPr id="39" name="TextBox 38"/>
-          <p:cNvSpPr txBox="1"/>
-          <p:nvPr/>
-        </p:nvSpPr>
-        <p:spPr>
-          <a:xfrm>
-            <a:off x="621792" y="4069080"/>
-            <a:ext cx="3291840" cy="228600"/>
+          <p:cNvPr id="42" name="TextBox 41"/>
+          <p:cNvSpPr txBox="1"/>
+          <p:nvPr/>
+        </p:nvSpPr>
+        <p:spPr>
+          <a:xfrm>
+            <a:off x="621792" y="4032504"/>
+            <a:ext cx="3291840" cy="219456"/>
           </a:xfrm>
           <a:prstGeom prst="rect">
             <a:avLst/>
@@ -16046,7 +15634,7 @@
               </a:spcAft>
             </a:pPr>
             <a:r>
-              <a:rPr sz="1100" b="1">
+              <a:rPr sz="1050" b="1">
                 <a:solidFill>
                   <a:srgbClr val="1F3864"/>
                 </a:solidFill>
@@ -16059,13 +15647,13 @@
       </p:sp>
       <p:sp>
         <p:nvSpPr>
-          <p:cNvPr id="40" name="TextBox 39"/>
-          <p:cNvSpPr txBox="1"/>
-          <p:nvPr/>
-        </p:nvSpPr>
-        <p:spPr>
-          <a:xfrm>
-            <a:off x="621792" y="4343400"/>
+          <p:cNvPr id="43" name="TextBox 42"/>
+          <p:cNvSpPr txBox="1"/>
+          <p:nvPr/>
+        </p:nvSpPr>
+        <p:spPr>
+          <a:xfrm>
+            <a:off x="621792" y="4288536"/>
             <a:ext cx="3291840" cy="777240"/>
           </a:xfrm>
           <a:prstGeom prst="rect">
@@ -16088,27 +15676,27 @@
               </a:spcAft>
             </a:pPr>
             <a:r>
-              <a:rPr sz="950" b="0">
+              <a:rPr sz="900" b="0">
                 <a:solidFill>
                   <a:srgbClr val="444C57"/>
                 </a:solidFill>
                 <a:latin typeface="Calibri"/>
               </a:rPr>
-              <a:t>Equitable access to training for remote and shipboard staff; skill recognition through verifiable certificates; localisation-ready for Indian-language expansion; safer field work through guided procedures.</a:t>
-            </a:r>
-          </a:p>
-        </p:txBody>
-      </p:sp>
-      <p:sp>
-        <p:nvSpPr>
-          <p:cNvPr id="41" name="Rectangle 40"/>
+              <a:t>Equitable access to training for remote and shipboard staff; skill recognition through verifiable certificates; localisation-ready for Indian languages; safer field work through guided procedures.</a:t>
+            </a:r>
+          </a:p>
+        </p:txBody>
+      </p:sp>
+      <p:sp>
+        <p:nvSpPr>
+          <p:cNvPr id="44" name="Rectangle 43"/>
           <p:cNvSpPr/>
           <p:nvPr/>
         </p:nvSpPr>
         <p:spPr>
           <a:xfrm>
-            <a:off x="4251960" y="3959352"/>
-            <a:ext cx="3611880" cy="1234440"/>
+            <a:off x="4251960" y="3941064"/>
+            <a:ext cx="3611880" cy="1188720"/>
           </a:xfrm>
           <a:prstGeom prst="rect">
             <a:avLst/>
@@ -16147,14 +15735,14 @@
       </p:sp>
       <p:sp>
         <p:nvSpPr>
-          <p:cNvPr id="42" name="Rectangle 41"/>
+          <p:cNvPr id="45" name="Rectangle 44"/>
           <p:cNvSpPr/>
           <p:nvPr/>
         </p:nvSpPr>
         <p:spPr>
           <a:xfrm>
-            <a:off x="4251960" y="3959352"/>
-            <a:ext cx="50800" cy="1234440"/>
+            <a:off x="4251960" y="3941064"/>
+            <a:ext cx="50800" cy="1188720"/>
           </a:xfrm>
           <a:prstGeom prst="rect">
             <a:avLst/>
@@ -16191,14 +15779,14 @@
       </p:sp>
       <p:sp>
         <p:nvSpPr>
-          <p:cNvPr id="43" name="TextBox 42"/>
-          <p:cNvSpPr txBox="1"/>
-          <p:nvPr/>
-        </p:nvSpPr>
-        <p:spPr>
-          <a:xfrm>
-            <a:off x="4416552" y="4069080"/>
-            <a:ext cx="3291840" cy="228600"/>
+          <p:cNvPr id="46" name="TextBox 45"/>
+          <p:cNvSpPr txBox="1"/>
+          <p:nvPr/>
+        </p:nvSpPr>
+        <p:spPr>
+          <a:xfrm>
+            <a:off x="4416552" y="4032504"/>
+            <a:ext cx="3291840" cy="219456"/>
           </a:xfrm>
           <a:prstGeom prst="rect">
             <a:avLst/>
@@ -16220,7 +15808,7 @@
               </a:spcAft>
             </a:pPr>
             <a:r>
-              <a:rPr sz="1100" b="1">
+              <a:rPr sz="1050" b="1">
                 <a:solidFill>
                   <a:srgbClr val="1F3864"/>
                 </a:solidFill>
@@ -16233,13 +15821,13 @@
       </p:sp>
       <p:sp>
         <p:nvSpPr>
-          <p:cNvPr id="44" name="TextBox 43"/>
-          <p:cNvSpPr txBox="1"/>
-          <p:nvPr/>
-        </p:nvSpPr>
-        <p:spPr>
-          <a:xfrm>
-            <a:off x="4416552" y="4343400"/>
+          <p:cNvPr id="47" name="TextBox 46"/>
+          <p:cNvSpPr txBox="1"/>
+          <p:nvPr/>
+        </p:nvSpPr>
+        <p:spPr>
+          <a:xfrm>
+            <a:off x="4416552" y="4288536"/>
             <a:ext cx="3291840" cy="777240"/>
           </a:xfrm>
           <a:prstGeom prst="rect">
@@ -16262,27 +15850,27 @@
               </a:spcAft>
             </a:pPr>
             <a:r>
-              <a:rPr sz="950" b="0">
+              <a:rPr sz="900" b="0">
                 <a:solidFill>
                   <a:srgbClr val="444C57"/>
                 </a:solidFill>
                 <a:latin typeface="Calibri"/>
               </a:rPr>
-              <a:t>Lower instrument downtime and fewer avoidable failures; reduced travel and physical-classroom cost; open-source stack with no licensing fees; reusable across INCOIS, NCPOR and NIOT on the same core.</a:t>
-            </a:r>
-          </a:p>
-        </p:txBody>
-      </p:sp>
-      <p:sp>
-        <p:nvSpPr>
-          <p:cNvPr id="45" name="Rectangle 44"/>
+              <a:t>Lower instrument downtime and fewer avoidable failures; reduced travel and classroom cost; open-source stack with no licensing fees; reusable across INCOIS, NCPOR and NIOT.</a:t>
+            </a:r>
+          </a:p>
+        </p:txBody>
+      </p:sp>
+      <p:sp>
+        <p:nvSpPr>
+          <p:cNvPr id="48" name="Rectangle 47"/>
           <p:cNvSpPr/>
           <p:nvPr/>
         </p:nvSpPr>
         <p:spPr>
           <a:xfrm>
-            <a:off x="8046720" y="3959352"/>
-            <a:ext cx="3611880" cy="1234440"/>
+            <a:off x="8046720" y="3941064"/>
+            <a:ext cx="3611880" cy="1188720"/>
           </a:xfrm>
           <a:prstGeom prst="rect">
             <a:avLst/>
@@ -16321,14 +15909,14 @@
       </p:sp>
       <p:sp>
         <p:nvSpPr>
-          <p:cNvPr id="46" name="Rectangle 45"/>
+          <p:cNvPr id="49" name="Rectangle 48"/>
           <p:cNvSpPr/>
           <p:nvPr/>
         </p:nvSpPr>
         <p:spPr>
           <a:xfrm>
-            <a:off x="8046720" y="3959352"/>
-            <a:ext cx="50800" cy="1234440"/>
+            <a:off x="8046720" y="3941064"/>
+            <a:ext cx="50800" cy="1188720"/>
           </a:xfrm>
           <a:prstGeom prst="rect">
             <a:avLst/>
@@ -16365,14 +15953,14 @@
       </p:sp>
       <p:sp>
         <p:nvSpPr>
-          <p:cNvPr id="47" name="TextBox 46"/>
-          <p:cNvSpPr txBox="1"/>
-          <p:nvPr/>
-        </p:nvSpPr>
-        <p:spPr>
-          <a:xfrm>
-            <a:off x="8211312" y="4069080"/>
-            <a:ext cx="3291840" cy="228600"/>
+          <p:cNvPr id="50" name="TextBox 49"/>
+          <p:cNvSpPr txBox="1"/>
+          <p:nvPr/>
+        </p:nvSpPr>
+        <p:spPr>
+          <a:xfrm>
+            <a:off x="8211312" y="4032504"/>
+            <a:ext cx="3291840" cy="219456"/>
           </a:xfrm>
           <a:prstGeom prst="rect">
             <a:avLst/>
@@ -16394,7 +15982,7 @@
               </a:spcAft>
             </a:pPr>
             <a:r>
-              <a:rPr sz="1100" b="1">
+              <a:rPr sz="1050" b="1">
                 <a:solidFill>
                   <a:srgbClr val="1F3864"/>
                 </a:solidFill>
@@ -16407,13 +15995,13 @@
       </p:sp>
       <p:sp>
         <p:nvSpPr>
-          <p:cNvPr id="48" name="TextBox 47"/>
-          <p:cNvSpPr txBox="1"/>
-          <p:nvPr/>
-        </p:nvSpPr>
-        <p:spPr>
-          <a:xfrm>
-            <a:off x="8211312" y="4343400"/>
+          <p:cNvPr id="51" name="TextBox 50"/>
+          <p:cNvSpPr txBox="1"/>
+          <p:nvPr/>
+        </p:nvSpPr>
+        <p:spPr>
+          <a:xfrm>
+            <a:off x="8211312" y="4288536"/>
             <a:ext cx="3291840" cy="777240"/>
           </a:xfrm>
           <a:prstGeom prst="rect">
@@ -16436,27 +16024,27 @@
               </a:spcAft>
             </a:pPr>
             <a:r>
-              <a:rPr sz="950" b="0">
+              <a:rPr sz="900" b="0">
                 <a:solidFill>
                   <a:srgbClr val="444C57"/>
                 </a:solidFill>
                 <a:latin typeface="Calibri"/>
               </a:rPr>
-              <a:t>Fewer service trips and paper-free assessments; longer instrument life through timely preventive maintenance; better-maintained ocean and weather sensors mean higher-quality earth-science data.</a:t>
-            </a:r>
-          </a:p>
-        </p:txBody>
-      </p:sp>
-      <p:sp>
-        <p:nvSpPr>
-          <p:cNvPr id="49" name="Rectangle 48"/>
+              <a:t>Fewer service trips and paper-free assessments; longer instrument life through timely preventive maintenance; better-maintained sensors mean higher-quality earth-science data.</a:t>
+            </a:r>
+          </a:p>
+        </p:txBody>
+      </p:sp>
+      <p:sp>
+        <p:nvSpPr>
+          <p:cNvPr id="52" name="Rectangle 51"/>
           <p:cNvSpPr/>
           <p:nvPr/>
         </p:nvSpPr>
         <p:spPr>
           <a:xfrm>
-            <a:off x="457200" y="5376672"/>
-            <a:ext cx="11292840" cy="566928"/>
+            <a:off x="457200" y="5312664"/>
+            <a:ext cx="11292840" cy="530352"/>
           </a:xfrm>
           <a:prstGeom prst="rect">
             <a:avLst/>
@@ -16495,14 +16083,14 @@
       </p:sp>
       <p:sp>
         <p:nvSpPr>
-          <p:cNvPr id="50" name="TextBox 49"/>
-          <p:cNvSpPr txBox="1"/>
-          <p:nvPr/>
-        </p:nvSpPr>
-        <p:spPr>
-          <a:xfrm>
-            <a:off x="548640" y="5468112"/>
-            <a:ext cx="1188720" cy="274320"/>
+          <p:cNvPr id="53" name="TextBox 52"/>
+          <p:cNvSpPr txBox="1"/>
+          <p:nvPr/>
+        </p:nvSpPr>
+        <p:spPr>
+          <a:xfrm>
+            <a:off x="548640" y="5394960"/>
+            <a:ext cx="1005840" cy="274320"/>
           </a:xfrm>
           <a:prstGeom prst="rect">
             <a:avLst/>
@@ -16524,7 +16112,7 @@
               </a:spcAft>
             </a:pPr>
             <a:r>
-              <a:rPr sz="1500" b="1">
+              <a:rPr sz="1400" b="1">
                 <a:solidFill>
                   <a:srgbClr val="F27C1E"/>
                 </a:solidFill>
@@ -16537,14 +16125,14 @@
       </p:sp>
       <p:sp>
         <p:nvSpPr>
-          <p:cNvPr id="51" name="TextBox 50"/>
-          <p:cNvSpPr txBox="1"/>
-          <p:nvPr/>
-        </p:nvSpPr>
-        <p:spPr>
-          <a:xfrm>
-            <a:off x="1783080" y="5541264"/>
-            <a:ext cx="1554480" cy="274320"/>
+          <p:cNvPr id="54" name="TextBox 53"/>
+          <p:cNvSpPr txBox="1"/>
+          <p:nvPr/>
+        </p:nvSpPr>
+        <p:spPr>
+          <a:xfrm>
+            <a:off x="1600200" y="5458968"/>
+            <a:ext cx="1737360" cy="274320"/>
           </a:xfrm>
           <a:prstGeom prst="rect">
             <a:avLst/>
@@ -16566,7 +16154,7 @@
               </a:spcAft>
             </a:pPr>
             <a:r>
-              <a:rPr sz="1000" b="0">
+              <a:rPr sz="900" b="0">
                 <a:solidFill>
                   <a:srgbClr val="444C57"/>
                 </a:solidFill>
@@ -16579,14 +16167,14 @@
       </p:sp>
       <p:sp>
         <p:nvSpPr>
-          <p:cNvPr id="52" name="TextBox 51"/>
-          <p:cNvSpPr txBox="1"/>
-          <p:nvPr/>
-        </p:nvSpPr>
-        <p:spPr>
-          <a:xfrm>
-            <a:off x="3355848" y="5468112"/>
-            <a:ext cx="1188720" cy="274320"/>
+          <p:cNvPr id="55" name="TextBox 54"/>
+          <p:cNvSpPr txBox="1"/>
+          <p:nvPr/>
+        </p:nvSpPr>
+        <p:spPr>
+          <a:xfrm>
+            <a:off x="3355848" y="5394960"/>
+            <a:ext cx="1005840" cy="274320"/>
           </a:xfrm>
           <a:prstGeom prst="rect">
             <a:avLst/>
@@ -16608,27 +16196,27 @@
               </a:spcAft>
             </a:pPr>
             <a:r>
-              <a:rPr sz="1500" b="1">
+              <a:rPr sz="1400" b="1">
                 <a:solidFill>
                   <a:srgbClr val="F27C1E"/>
                 </a:solidFill>
                 <a:latin typeface="Calibri"/>
               </a:rPr>
-              <a:t>↓ 40%</a:t>
-            </a:r>
-          </a:p>
-        </p:txBody>
-      </p:sp>
-      <p:sp>
-        <p:nvSpPr>
-          <p:cNvPr id="53" name="TextBox 52"/>
-          <p:cNvSpPr txBox="1"/>
-          <p:nvPr/>
-        </p:nvSpPr>
-        <p:spPr>
-          <a:xfrm>
-            <a:off x="4590288" y="5541264"/>
-            <a:ext cx="1554480" cy="274320"/>
+              <a:t>40%</a:t>
+            </a:r>
+          </a:p>
+        </p:txBody>
+      </p:sp>
+      <p:sp>
+        <p:nvSpPr>
+          <p:cNvPr id="56" name="TextBox 55"/>
+          <p:cNvSpPr txBox="1"/>
+          <p:nvPr/>
+        </p:nvSpPr>
+        <p:spPr>
+          <a:xfrm>
+            <a:off x="4407408" y="5458968"/>
+            <a:ext cx="1737360" cy="274320"/>
           </a:xfrm>
           <a:prstGeom prst="rect">
             <a:avLst/>
@@ -16650,27 +16238,27 @@
               </a:spcAft>
             </a:pPr>
             <a:r>
-              <a:rPr sz="1000" b="0">
+              <a:rPr sz="900" b="0">
                 <a:solidFill>
                   <a:srgbClr val="444C57"/>
                 </a:solidFill>
                 <a:latin typeface="Calibri"/>
               </a:rPr>
-              <a:t>target fault-resolution time</a:t>
-            </a:r>
-          </a:p>
-        </p:txBody>
-      </p:sp>
-      <p:sp>
-        <p:nvSpPr>
-          <p:cNvPr id="54" name="TextBox 53"/>
-          <p:cNvSpPr txBox="1"/>
-          <p:nvPr/>
-        </p:nvSpPr>
-        <p:spPr>
-          <a:xfrm>
-            <a:off x="6163055" y="5468112"/>
-            <a:ext cx="1188720" cy="274320"/>
+              <a:t>target cut in fault-resolution time</a:t>
+            </a:r>
+          </a:p>
+        </p:txBody>
+      </p:sp>
+      <p:sp>
+        <p:nvSpPr>
+          <p:cNvPr id="57" name="TextBox 56"/>
+          <p:cNvSpPr txBox="1"/>
+          <p:nvPr/>
+        </p:nvSpPr>
+        <p:spPr>
+          <a:xfrm>
+            <a:off x="6163055" y="5394960"/>
+            <a:ext cx="1005840" cy="274320"/>
           </a:xfrm>
           <a:prstGeom prst="rect">
             <a:avLst/>
@@ -16692,7 +16280,7 @@
               </a:spcAft>
             </a:pPr>
             <a:r>
-              <a:rPr sz="1500" b="1">
+              <a:rPr sz="1400" b="1">
                 <a:solidFill>
                   <a:srgbClr val="F27C1E"/>
                 </a:solidFill>
@@ -16705,14 +16293,14 @@
       </p:sp>
       <p:sp>
         <p:nvSpPr>
-          <p:cNvPr id="55" name="TextBox 54"/>
-          <p:cNvSpPr txBox="1"/>
-          <p:nvPr/>
-        </p:nvSpPr>
-        <p:spPr>
-          <a:xfrm>
-            <a:off x="7397495" y="5541264"/>
-            <a:ext cx="1554480" cy="274320"/>
+          <p:cNvPr id="58" name="TextBox 57"/>
+          <p:cNvSpPr txBox="1"/>
+          <p:nvPr/>
+        </p:nvSpPr>
+        <p:spPr>
+          <a:xfrm>
+            <a:off x="7214615" y="5458968"/>
+            <a:ext cx="1737360" cy="274320"/>
           </a:xfrm>
           <a:prstGeom prst="rect">
             <a:avLst/>
@@ -16734,7 +16322,7 @@
               </a:spcAft>
             </a:pPr>
             <a:r>
-              <a:rPr sz="1000" b="0">
+              <a:rPr sz="900" b="0">
                 <a:solidFill>
                   <a:srgbClr val="444C57"/>
                 </a:solidFill>
@@ -16747,14 +16335,14 @@
       </p:sp>
       <p:sp>
         <p:nvSpPr>
-          <p:cNvPr id="56" name="TextBox 55"/>
-          <p:cNvSpPr txBox="1"/>
-          <p:nvPr/>
-        </p:nvSpPr>
-        <p:spPr>
-          <a:xfrm>
-            <a:off x="8970263" y="5468112"/>
-            <a:ext cx="1188720" cy="274320"/>
+          <p:cNvPr id="59" name="TextBox 58"/>
+          <p:cNvSpPr txBox="1"/>
+          <p:nvPr/>
+        </p:nvSpPr>
+        <p:spPr>
+          <a:xfrm>
+            <a:off x="8970263" y="5394960"/>
+            <a:ext cx="1005840" cy="274320"/>
           </a:xfrm>
           <a:prstGeom prst="rect">
             <a:avLst/>
@@ -16776,7 +16364,7 @@
               </a:spcAft>
             </a:pPr>
             <a:r>
-              <a:rPr sz="1500" b="1">
+              <a:rPr sz="1400" b="1">
                 <a:solidFill>
                   <a:srgbClr val="F27C1E"/>
                 </a:solidFill>
@@ -16789,14 +16377,14 @@
       </p:sp>
       <p:sp>
         <p:nvSpPr>
-          <p:cNvPr id="57" name="TextBox 56"/>
-          <p:cNvSpPr txBox="1"/>
-          <p:nvPr/>
-        </p:nvSpPr>
-        <p:spPr>
-          <a:xfrm>
-            <a:off x="10204703" y="5541264"/>
-            <a:ext cx="1554480" cy="274320"/>
+          <p:cNvPr id="60" name="TextBox 59"/>
+          <p:cNvSpPr txBox="1"/>
+          <p:nvPr/>
+        </p:nvSpPr>
+        <p:spPr>
+          <a:xfrm>
+            <a:off x="10021823" y="5458968"/>
+            <a:ext cx="1737360" cy="274320"/>
           </a:xfrm>
           <a:prstGeom prst="rect">
             <a:avLst/>
@@ -16818,7 +16406,7 @@
               </a:spcAft>
             </a:pPr>
             <a:r>
-              <a:rPr sz="1000" b="0">
+              <a:rPr sz="900" b="0">
                 <a:solidFill>
                   <a:srgbClr val="444C57"/>
                 </a:solidFill>
@@ -17520,8 +17108,118 @@
         </p:nvSpPr>
         <p:spPr>
           <a:xfrm>
+            <a:off x="8896350" y="1507998"/>
+            <a:ext cx="2872740" cy="1821180"/>
+          </a:xfrm>
+          <a:prstGeom prst="rect">
+            <a:avLst/>
+          </a:prstGeom>
+          <a:solidFill>
+            <a:srgbClr val="1F3864"/>
+          </a:solidFill>
+          <a:ln>
+            <a:noFill/>
+          </a:ln>
+          <a:effectLst/>
+        </p:spPr>
+        <p:style>
+          <a:lnRef idx="1">
+            <a:schemeClr val="accent1"/>
+          </a:lnRef>
+          <a:fillRef idx="3">
+            <a:schemeClr val="accent1"/>
+          </a:fillRef>
+          <a:effectRef idx="2">
+            <a:schemeClr val="accent1"/>
+          </a:effectRef>
+          <a:fontRef idx="minor">
+            <a:schemeClr val="lt1"/>
+          </a:fontRef>
+        </p:style>
+        <p:txBody>
+          <a:bodyPr rtlCol="0" anchor="ctr"/>
+          <a:lstStyle/>
+          <a:p>
+            <a:pPr algn="ctr"/>
+          </a:p>
+        </p:txBody>
+      </p:sp>
+      <p:pic>
+        <p:nvPicPr>
+          <p:cNvPr id="18" name="Picture 17" descr="s6_refs.png"/>
+          <p:cNvPicPr>
+            <a:picLocks noChangeAspect="1"/>
+          </p:cNvPicPr>
+          <p:nvPr/>
+        </p:nvPicPr>
+        <p:blipFill>
+          <a:blip r:embed="rId2"/>
+          <a:stretch>
+            <a:fillRect/>
+          </a:stretch>
+        </p:blipFill>
+        <p:spPr>
+          <a:xfrm>
+            <a:off x="8915400" y="1527048"/>
+            <a:ext cx="2834640" cy="1783080"/>
+          </a:xfrm>
+          <a:prstGeom prst="rect">
+            <a:avLst/>
+          </a:prstGeom>
+        </p:spPr>
+      </p:pic>
+      <p:sp>
+        <p:nvSpPr>
+          <p:cNvPr id="19" name="TextBox 18"/>
+          <p:cNvSpPr txBox="1"/>
+          <p:nvPr/>
+        </p:nvSpPr>
+        <p:spPr>
+          <a:xfrm>
+            <a:off x="8915400" y="3355848"/>
+            <a:ext cx="2834640" cy="201168"/>
+          </a:xfrm>
+          <a:prstGeom prst="rect">
+            <a:avLst/>
+          </a:prstGeom>
+          <a:noFill/>
+        </p:spPr>
+        <p:txBody>
+          <a:bodyPr wrap="square" lIns="0" rIns="0" tIns="0" bIns="0" anchor="t">
+            <a:spAutoFit/>
+          </a:bodyPr>
+          <a:lstStyle/>
+          <a:p>
+            <a:pPr algn="l">
+              <a:lnSpc>
+                <a:spcPct val="108000"/>
+              </a:lnSpc>
+              <a:spcAft>
+                <a:spcPts val="300"/>
+              </a:spcAft>
+            </a:pPr>
+            <a:r>
+              <a:rPr sz="800" b="0">
+                <a:solidFill>
+                  <a:srgbClr val="444C57"/>
+                </a:solidFill>
+                <a:latin typeface="Calibri"/>
+              </a:rPr>
+              <a:t>Standards, manuals and prior art reviewed</a:t>
+            </a:r>
+          </a:p>
+        </p:txBody>
+      </p:sp>
+      <p:sp>
+        <p:nvSpPr>
+          <p:cNvPr id="20" name="Rectangle 19"/>
+          <p:cNvSpPr/>
+          <p:nvPr/>
+        </p:nvSpPr>
+        <p:spPr>
+          <a:xfrm>
             <a:off x="457200" y="1527048"/>
-            <a:ext cx="5486400" cy="2103120"/>
+            <a:ext cx="4023360" cy="1938528"/>
           </a:xfrm>
           <a:prstGeom prst="rect">
             <a:avLst/>
@@ -17560,14 +17258,14 @@
       </p:sp>
       <p:sp>
         <p:nvSpPr>
-          <p:cNvPr id="18" name="Rectangle 17"/>
+          <p:cNvPr id="21" name="Rectangle 20"/>
           <p:cNvSpPr/>
           <p:nvPr/>
         </p:nvSpPr>
         <p:spPr>
           <a:xfrm>
             <a:off x="457200" y="1527048"/>
-            <a:ext cx="5486400" cy="50800"/>
+            <a:ext cx="4023360" cy="50800"/>
           </a:xfrm>
           <a:prstGeom prst="rect">
             <a:avLst/>
@@ -17604,14 +17302,14 @@
       </p:sp>
       <p:sp>
         <p:nvSpPr>
-          <p:cNvPr id="19" name="TextBox 18"/>
-          <p:cNvSpPr txBox="1"/>
-          <p:nvPr/>
-        </p:nvSpPr>
-        <p:spPr>
-          <a:xfrm>
-            <a:off x="621792" y="1655064"/>
-            <a:ext cx="5120640" cy="256032"/>
+          <p:cNvPr id="22" name="TextBox 21"/>
+          <p:cNvSpPr txBox="1"/>
+          <p:nvPr/>
+        </p:nvSpPr>
+        <p:spPr>
+          <a:xfrm>
+            <a:off x="603504" y="1636776"/>
+            <a:ext cx="3703320" cy="237744"/>
           </a:xfrm>
           <a:prstGeom prst="rect">
             <a:avLst/>
@@ -17633,7 +17331,7 @@
               </a:spcAft>
             </a:pPr>
             <a:r>
-              <a:rPr sz="1150" b="1">
+              <a:rPr sz="1050" b="1">
                 <a:solidFill>
                   <a:srgbClr val="1E6FBA"/>
                 </a:solidFill>
@@ -17646,14 +17344,14 @@
       </p:sp>
       <p:sp>
         <p:nvSpPr>
-          <p:cNvPr id="20" name="TextBox 19"/>
-          <p:cNvSpPr txBox="1"/>
-          <p:nvPr/>
-        </p:nvSpPr>
-        <p:spPr>
-          <a:xfrm>
-            <a:off x="621792" y="1965960"/>
-            <a:ext cx="5120640" cy="246888"/>
+          <p:cNvPr id="23" name="TextBox 22"/>
+          <p:cNvSpPr txBox="1"/>
+          <p:nvPr/>
+        </p:nvSpPr>
+        <p:spPr>
+          <a:xfrm>
+            <a:off x="603504" y="1947672"/>
+            <a:ext cx="3749039" cy="274320"/>
           </a:xfrm>
           <a:prstGeom prst="rect">
             <a:avLst/>
@@ -17675,36 +17373,36 @@
               </a:spcAft>
             </a:pPr>
             <a:r>
-              <a:rPr sz="900" b="1">
+              <a:rPr sz="850" b="1">
                 <a:solidFill>
                   <a:srgbClr val="1E6FBA"/>
                 </a:solidFill>
                 <a:latin typeface="Calibri"/>
               </a:rPr>
-              <a:t>· </a:t>
-            </a:r>
-            <a:r>
-              <a:rPr sz="900" b="0">
+              <a:t>- </a:t>
+            </a:r>
+            <a:r>
+              <a:rPr sz="850" b="0">
                 <a:solidFill>
                   <a:srgbClr val="444C57"/>
                 </a:solidFill>
                 <a:latin typeface="Calibri"/>
               </a:rPr>
-              <a:t>SIH 2026 Problem Statement 26075 — Ministry of Earth Sciences (MoES) — sih.gov.in</a:t>
-            </a:r>
-          </a:p>
-        </p:txBody>
-      </p:sp>
-      <p:sp>
-        <p:nvSpPr>
-          <p:cNvPr id="21" name="TextBox 20"/>
-          <p:cNvSpPr txBox="1"/>
-          <p:nvPr/>
-        </p:nvSpPr>
-        <p:spPr>
-          <a:xfrm>
-            <a:off x="621792" y="2226563"/>
-            <a:ext cx="5120640" cy="246888"/>
+              <a:t>SIH 2026 Problem Statement 26075 - sih.gov.in</a:t>
+            </a:r>
+          </a:p>
+        </p:txBody>
+      </p:sp>
+      <p:sp>
+        <p:nvSpPr>
+          <p:cNvPr id="24" name="TextBox 23"/>
+          <p:cNvSpPr txBox="1"/>
+          <p:nvPr/>
+        </p:nvSpPr>
+        <p:spPr>
+          <a:xfrm>
+            <a:off x="603504" y="2240280"/>
+            <a:ext cx="3749039" cy="274320"/>
           </a:xfrm>
           <a:prstGeom prst="rect">
             <a:avLst/>
@@ -17726,36 +17424,36 @@
               </a:spcAft>
             </a:pPr>
             <a:r>
-              <a:rPr sz="900" b="1">
+              <a:rPr sz="850" b="1">
                 <a:solidFill>
                   <a:srgbClr val="1E6FBA"/>
                 </a:solidFill>
                 <a:latin typeface="Calibri"/>
               </a:rPr>
-              <a:t>· </a:t>
-            </a:r>
-            <a:r>
-              <a:rPr sz="900" b="0">
+              <a:t>- </a:t>
+            </a:r>
+            <a:r>
+              <a:rPr sz="850" b="0">
                 <a:solidFill>
                   <a:srgbClr val="444C57"/>
                 </a:solidFill>
                 <a:latin typeface="Calibri"/>
               </a:rPr>
-              <a:t>moes.gov.in  |  India Meteorological Department — mausam.imd.gov.in</a:t>
-            </a:r>
-          </a:p>
-        </p:txBody>
-      </p:sp>
-      <p:sp>
-        <p:nvSpPr>
-          <p:cNvPr id="22" name="TextBox 21"/>
-          <p:cNvSpPr txBox="1"/>
-          <p:nvPr/>
-        </p:nvSpPr>
-        <p:spPr>
-          <a:xfrm>
-            <a:off x="621792" y="2487166"/>
-            <a:ext cx="5120640" cy="246888"/>
+              <a:t>Ministry of Earth Sciences - moes.gov.in</a:t>
+            </a:r>
+          </a:p>
+        </p:txBody>
+      </p:sp>
+      <p:sp>
+        <p:nvSpPr>
+          <p:cNvPr id="25" name="TextBox 24"/>
+          <p:cNvSpPr txBox="1"/>
+          <p:nvPr/>
+        </p:nvSpPr>
+        <p:spPr>
+          <a:xfrm>
+            <a:off x="603504" y="2532888"/>
+            <a:ext cx="3749039" cy="274320"/>
           </a:xfrm>
           <a:prstGeom prst="rect">
             <a:avLst/>
@@ -17777,36 +17475,36 @@
               </a:spcAft>
             </a:pPr>
             <a:r>
-              <a:rPr sz="900" b="1">
+              <a:rPr sz="850" b="1">
                 <a:solidFill>
                   <a:srgbClr val="1E6FBA"/>
                 </a:solidFill>
                 <a:latin typeface="Calibri"/>
               </a:rPr>
-              <a:t>· </a:t>
-            </a:r>
-            <a:r>
-              <a:rPr sz="900" b="0">
+              <a:t>- </a:t>
+            </a:r>
+            <a:r>
+              <a:rPr sz="850" b="0">
                 <a:solidFill>
                   <a:srgbClr val="444C57"/>
                 </a:solidFill>
                 <a:latin typeface="Calibri"/>
               </a:rPr>
-              <a:t>MoES Annual Report — capacity building &amp; human-resource development</a:t>
-            </a:r>
-          </a:p>
-        </p:txBody>
-      </p:sp>
-      <p:sp>
-        <p:nvSpPr>
-          <p:cNvPr id="23" name="TextBox 22"/>
-          <p:cNvSpPr txBox="1"/>
-          <p:nvPr/>
-        </p:nvSpPr>
-        <p:spPr>
-          <a:xfrm>
-            <a:off x="621792" y="2747769"/>
-            <a:ext cx="5120640" cy="246888"/>
+              <a:t>India Meteorological Department - mausam.imd.gov.in</a:t>
+            </a:r>
+          </a:p>
+        </p:txBody>
+      </p:sp>
+      <p:sp>
+        <p:nvSpPr>
+          <p:cNvPr id="26" name="TextBox 25"/>
+          <p:cNvSpPr txBox="1"/>
+          <p:nvPr/>
+        </p:nvSpPr>
+        <p:spPr>
+          <a:xfrm>
+            <a:off x="603504" y="2825496"/>
+            <a:ext cx="3749039" cy="274320"/>
           </a:xfrm>
           <a:prstGeom prst="rect">
             <a:avLst/>
@@ -17828,36 +17526,36 @@
               </a:spcAft>
             </a:pPr>
             <a:r>
-              <a:rPr sz="900" b="1">
+              <a:rPr sz="850" b="1">
                 <a:solidFill>
                   <a:srgbClr val="1E6FBA"/>
                 </a:solidFill>
                 <a:latin typeface="Calibri"/>
               </a:rPr>
-              <a:t>· </a:t>
-            </a:r>
-            <a:r>
-              <a:rPr sz="900" b="0">
+              <a:t>- </a:t>
+            </a:r>
+            <a:r>
+              <a:rPr sz="850" b="0">
                 <a:solidFill>
                   <a:srgbClr val="444C57"/>
                 </a:solidFill>
                 <a:latin typeface="Calibri"/>
               </a:rPr>
-              <a:t>National Education Policy 2020 — digital, competency-based learning</a:t>
-            </a:r>
-          </a:p>
-        </p:txBody>
-      </p:sp>
-      <p:sp>
-        <p:nvSpPr>
-          <p:cNvPr id="24" name="TextBox 23"/>
-          <p:cNvSpPr txBox="1"/>
-          <p:nvPr/>
-        </p:nvSpPr>
-        <p:spPr>
-          <a:xfrm>
-            <a:off x="621792" y="3008372"/>
-            <a:ext cx="5120640" cy="246888"/>
+              <a:t>MoES Annual Report - capacity building programmes</a:t>
+            </a:r>
+          </a:p>
+        </p:txBody>
+      </p:sp>
+      <p:sp>
+        <p:nvSpPr>
+          <p:cNvPr id="27" name="TextBox 26"/>
+          <p:cNvSpPr txBox="1"/>
+          <p:nvPr/>
+        </p:nvSpPr>
+        <p:spPr>
+          <a:xfrm>
+            <a:off x="603504" y="3118104"/>
+            <a:ext cx="3749039" cy="274320"/>
           </a:xfrm>
           <a:prstGeom prst="rect">
             <a:avLst/>
@@ -17879,36 +17577,36 @@
               </a:spcAft>
             </a:pPr>
             <a:r>
-              <a:rPr sz="900" b="1">
+              <a:rPr sz="850" b="1">
                 <a:solidFill>
                   <a:srgbClr val="1E6FBA"/>
                 </a:solidFill>
                 <a:latin typeface="Calibri"/>
               </a:rPr>
-              <a:t>· </a:t>
-            </a:r>
-            <a:r>
-              <a:rPr sz="900" b="0">
+              <a:t>- </a:t>
+            </a:r>
+            <a:r>
+              <a:rPr sz="850" b="0">
                 <a:solidFill>
                   <a:srgbClr val="444C57"/>
                 </a:solidFill>
                 <a:latin typeface="Calibri"/>
               </a:rPr>
-              <a:t>SIH 2026 portal guidelines — idea submission format and evaluation criteria</a:t>
-            </a:r>
-          </a:p>
-        </p:txBody>
-      </p:sp>
-      <p:sp>
-        <p:nvSpPr>
-          <p:cNvPr id="25" name="Rectangle 24"/>
+              <a:t>National Education Policy 2020 - competency-based learning</a:t>
+            </a:r>
+          </a:p>
+        </p:txBody>
+      </p:sp>
+      <p:sp>
+        <p:nvSpPr>
+          <p:cNvPr id="28" name="Rectangle 27"/>
           <p:cNvSpPr/>
           <p:nvPr/>
         </p:nvSpPr>
         <p:spPr>
           <a:xfrm>
-            <a:off x="6172200" y="1527048"/>
-            <a:ext cx="5486400" cy="2103120"/>
+            <a:off x="4663440" y="1527048"/>
+            <a:ext cx="4023360" cy="1938528"/>
           </a:xfrm>
           <a:prstGeom prst="rect">
             <a:avLst/>
@@ -17947,14 +17645,14 @@
       </p:sp>
       <p:sp>
         <p:nvSpPr>
-          <p:cNvPr id="26" name="Rectangle 25"/>
+          <p:cNvPr id="29" name="Rectangle 28"/>
           <p:cNvSpPr/>
           <p:nvPr/>
         </p:nvSpPr>
         <p:spPr>
           <a:xfrm>
-            <a:off x="6172200" y="1527048"/>
-            <a:ext cx="5486400" cy="50800"/>
+            <a:off x="4663440" y="1527048"/>
+            <a:ext cx="4023360" cy="50800"/>
           </a:xfrm>
           <a:prstGeom prst="rect">
             <a:avLst/>
@@ -17991,14 +17689,14 @@
       </p:sp>
       <p:sp>
         <p:nvSpPr>
-          <p:cNvPr id="27" name="TextBox 26"/>
-          <p:cNvSpPr txBox="1"/>
-          <p:nvPr/>
-        </p:nvSpPr>
-        <p:spPr>
-          <a:xfrm>
-            <a:off x="6336792" y="1655064"/>
-            <a:ext cx="5120640" cy="256032"/>
+          <p:cNvPr id="30" name="TextBox 29"/>
+          <p:cNvSpPr txBox="1"/>
+          <p:nvPr/>
+        </p:nvSpPr>
+        <p:spPr>
+          <a:xfrm>
+            <a:off x="4809744" y="1636776"/>
+            <a:ext cx="3703320" cy="237744"/>
           </a:xfrm>
           <a:prstGeom prst="rect">
             <a:avLst/>
@@ -18020,7 +17718,7 @@
               </a:spcAft>
             </a:pPr>
             <a:r>
-              <a:rPr sz="1150" b="1">
+              <a:rPr sz="1050" b="1">
                 <a:solidFill>
                   <a:srgbClr val="F27C1E"/>
                 </a:solidFill>
@@ -18033,14 +17731,14 @@
       </p:sp>
       <p:sp>
         <p:nvSpPr>
-          <p:cNvPr id="28" name="TextBox 27"/>
-          <p:cNvSpPr txBox="1"/>
-          <p:nvPr/>
-        </p:nvSpPr>
-        <p:spPr>
-          <a:xfrm>
-            <a:off x="6336792" y="1965960"/>
-            <a:ext cx="5120640" cy="246888"/>
+          <p:cNvPr id="31" name="TextBox 30"/>
+          <p:cNvSpPr txBox="1"/>
+          <p:nvPr/>
+        </p:nvSpPr>
+        <p:spPr>
+          <a:xfrm>
+            <a:off x="4809744" y="1947672"/>
+            <a:ext cx="3749039" cy="274320"/>
           </a:xfrm>
           <a:prstGeom prst="rect">
             <a:avLst/>
@@ -18062,36 +17760,36 @@
               </a:spcAft>
             </a:pPr>
             <a:r>
-              <a:rPr sz="900" b="1">
+              <a:rPr sz="850" b="1">
                 <a:solidFill>
                   <a:srgbClr val="F27C1E"/>
                 </a:solidFill>
                 <a:latin typeface="Calibri"/>
               </a:rPr>
-              <a:t>· </a:t>
-            </a:r>
-            <a:r>
-              <a:rPr sz="900" b="0">
+              <a:t>- </a:t>
+            </a:r>
+            <a:r>
+              <a:rPr sz="850" b="0">
                 <a:solidFill>
                   <a:srgbClr val="444C57"/>
                 </a:solidFill>
                 <a:latin typeface="Calibri"/>
               </a:rPr>
-              <a:t>SCORM / xAPI (Experience API) — learning-record interoperability</a:t>
-            </a:r>
-          </a:p>
-        </p:txBody>
-      </p:sp>
-      <p:sp>
-        <p:nvSpPr>
-          <p:cNvPr id="29" name="TextBox 28"/>
-          <p:cNvSpPr txBox="1"/>
-          <p:nvPr/>
-        </p:nvSpPr>
-        <p:spPr>
-          <a:xfrm>
-            <a:off x="6336792" y="2226563"/>
-            <a:ext cx="5120640" cy="246888"/>
+              <a:t>SCORM / xAPI - learning-record interoperability</a:t>
+            </a:r>
+          </a:p>
+        </p:txBody>
+      </p:sp>
+      <p:sp>
+        <p:nvSpPr>
+          <p:cNvPr id="32" name="TextBox 31"/>
+          <p:cNvSpPr txBox="1"/>
+          <p:nvPr/>
+        </p:nvSpPr>
+        <p:spPr>
+          <a:xfrm>
+            <a:off x="4809744" y="2240280"/>
+            <a:ext cx="3749039" cy="274320"/>
           </a:xfrm>
           <a:prstGeom prst="rect">
             <a:avLst/>
@@ -18113,36 +17811,36 @@
               </a:spcAft>
             </a:pPr>
             <a:r>
-              <a:rPr sz="900" b="1">
+              <a:rPr sz="850" b="1">
                 <a:solidFill>
                   <a:srgbClr val="F27C1E"/>
                 </a:solidFill>
                 <a:latin typeface="Calibri"/>
               </a:rPr>
-              <a:t>· </a:t>
-            </a:r>
-            <a:r>
-              <a:rPr sz="900" b="0">
+              <a:t>- </a:t>
+            </a:r>
+            <a:r>
+              <a:rPr sz="850" b="0">
                 <a:solidFill>
                   <a:srgbClr val="444C57"/>
                 </a:solidFill>
                 <a:latin typeface="Calibri"/>
               </a:rPr>
-              <a:t>IEEE 1484 LOM — learning-object metadata for the course catalog</a:t>
-            </a:r>
-          </a:p>
-        </p:txBody>
-      </p:sp>
-      <p:sp>
-        <p:nvSpPr>
-          <p:cNvPr id="30" name="TextBox 29"/>
-          <p:cNvSpPr txBox="1"/>
-          <p:nvPr/>
-        </p:nvSpPr>
-        <p:spPr>
-          <a:xfrm>
-            <a:off x="6336792" y="2487166"/>
-            <a:ext cx="5120640" cy="246888"/>
+              <a:t>IEEE 1484 LOM - learning-object metadata</a:t>
+            </a:r>
+          </a:p>
+        </p:txBody>
+      </p:sp>
+      <p:sp>
+        <p:nvSpPr>
+          <p:cNvPr id="33" name="TextBox 32"/>
+          <p:cNvSpPr txBox="1"/>
+          <p:nvPr/>
+        </p:nvSpPr>
+        <p:spPr>
+          <a:xfrm>
+            <a:off x="4809744" y="2532888"/>
+            <a:ext cx="3749039" cy="274320"/>
           </a:xfrm>
           <a:prstGeom prst="rect">
             <a:avLst/>
@@ -18164,36 +17862,36 @@
               </a:spcAft>
             </a:pPr>
             <a:r>
-              <a:rPr sz="900" b="1">
+              <a:rPr sz="850" b="1">
                 <a:solidFill>
                   <a:srgbClr val="F27C1E"/>
                 </a:solidFill>
                 <a:latin typeface="Calibri"/>
               </a:rPr>
-              <a:t>· </a:t>
-            </a:r>
-            <a:r>
-              <a:rPr sz="900" b="0">
+              <a:t>- </a:t>
+            </a:r>
+            <a:r>
+              <a:rPr sz="850" b="0">
                 <a:solidFill>
                   <a:srgbClr val="444C57"/>
                 </a:solidFill>
                 <a:latin typeface="Calibri"/>
               </a:rPr>
-              <a:t>NIST SP 800-63B — digital identity &amp; authentication guidance</a:t>
-            </a:r>
-          </a:p>
-        </p:txBody>
-      </p:sp>
-      <p:sp>
-        <p:nvSpPr>
-          <p:cNvPr id="31" name="TextBox 30"/>
-          <p:cNvSpPr txBox="1"/>
-          <p:nvPr/>
-        </p:nvSpPr>
-        <p:spPr>
-          <a:xfrm>
-            <a:off x="6336792" y="2747769"/>
-            <a:ext cx="5120640" cy="246888"/>
+              <a:t>NIST SP 800-63B - identity and authentication</a:t>
+            </a:r>
+          </a:p>
+        </p:txBody>
+      </p:sp>
+      <p:sp>
+        <p:nvSpPr>
+          <p:cNvPr id="34" name="TextBox 33"/>
+          <p:cNvSpPr txBox="1"/>
+          <p:nvPr/>
+        </p:nvSpPr>
+        <p:spPr>
+          <a:xfrm>
+            <a:off x="4809744" y="2825496"/>
+            <a:ext cx="3749039" cy="274320"/>
           </a:xfrm>
           <a:prstGeom prst="rect">
             <a:avLst/>
@@ -18215,36 +17913,36 @@
               </a:spcAft>
             </a:pPr>
             <a:r>
-              <a:rPr sz="900" b="1">
+              <a:rPr sz="850" b="1">
                 <a:solidFill>
                   <a:srgbClr val="F27C1E"/>
                 </a:solidFill>
                 <a:latin typeface="Calibri"/>
               </a:rPr>
-              <a:t>· </a:t>
-            </a:r>
-            <a:r>
-              <a:rPr sz="900" b="0">
+              <a:t>- </a:t>
+            </a:r>
+            <a:r>
+              <a:rPr sz="850" b="0">
                 <a:solidFill>
                   <a:srgbClr val="444C57"/>
                 </a:solidFill>
                 <a:latin typeface="Calibri"/>
               </a:rPr>
-              <a:t>OWASP ASVS + Mobile Top 10 — application security verification baseline</a:t>
-            </a:r>
-          </a:p>
-        </p:txBody>
-      </p:sp>
-      <p:sp>
-        <p:nvSpPr>
-          <p:cNvPr id="32" name="TextBox 31"/>
-          <p:cNvSpPr txBox="1"/>
-          <p:nvPr/>
-        </p:nvSpPr>
-        <p:spPr>
-          <a:xfrm>
-            <a:off x="6336792" y="3008372"/>
-            <a:ext cx="5120640" cy="246888"/>
+              <a:t>NIST SP 800-38D - AES-256-GCM encryption</a:t>
+            </a:r>
+          </a:p>
+        </p:txBody>
+      </p:sp>
+      <p:sp>
+        <p:nvSpPr>
+          <p:cNvPr id="35" name="TextBox 34"/>
+          <p:cNvSpPr txBox="1"/>
+          <p:nvPr/>
+        </p:nvSpPr>
+        <p:spPr>
+          <a:xfrm>
+            <a:off x="4809744" y="3118104"/>
+            <a:ext cx="3749039" cy="274320"/>
           </a:xfrm>
           <a:prstGeom prst="rect">
             <a:avLst/>
@@ -18266,87 +17964,36 @@
               </a:spcAft>
             </a:pPr>
             <a:r>
-              <a:rPr sz="900" b="1">
+              <a:rPr sz="850" b="1">
                 <a:solidFill>
                   <a:srgbClr val="F27C1E"/>
                 </a:solidFill>
                 <a:latin typeface="Calibri"/>
               </a:rPr>
-              <a:t>· </a:t>
-            </a:r>
-            <a:r>
-              <a:rPr sz="900" b="0">
+              <a:t>- </a:t>
+            </a:r>
+            <a:r>
+              <a:rPr sz="850" b="0">
                 <a:solidFill>
                   <a:srgbClr val="444C57"/>
                 </a:solidFill>
                 <a:latin typeface="Calibri"/>
               </a:rPr>
-              <a:t>NIST SP 800-38D — AES-256-GCM authenticated encryption</a:t>
-            </a:r>
-          </a:p>
-        </p:txBody>
-      </p:sp>
-      <p:sp>
-        <p:nvSpPr>
-          <p:cNvPr id="33" name="TextBox 32"/>
-          <p:cNvSpPr txBox="1"/>
-          <p:nvPr/>
-        </p:nvSpPr>
-        <p:spPr>
-          <a:xfrm>
-            <a:off x="6336792" y="3268975"/>
-            <a:ext cx="5120640" cy="246888"/>
-          </a:xfrm>
-          <a:prstGeom prst="rect">
-            <a:avLst/>
-          </a:prstGeom>
-          <a:noFill/>
-        </p:spPr>
-        <p:txBody>
-          <a:bodyPr wrap="square" lIns="0" rIns="0" tIns="0" bIns="0" anchor="t">
-            <a:spAutoFit/>
-          </a:bodyPr>
-          <a:lstStyle/>
-          <a:p>
-            <a:pPr algn="l">
-              <a:lnSpc>
-                <a:spcPct val="105000"/>
-              </a:lnSpc>
-              <a:spcAft>
-                <a:spcPts val="300"/>
-              </a:spcAft>
-            </a:pPr>
-            <a:r>
-              <a:rPr sz="900" b="1">
-                <a:solidFill>
-                  <a:srgbClr val="F27C1E"/>
-                </a:solidFill>
-                <a:latin typeface="Calibri"/>
-              </a:rPr>
-              <a:t>· </a:t>
-            </a:r>
-            <a:r>
-              <a:rPr sz="900" b="0">
-                <a:solidFill>
-                  <a:srgbClr val="444C57"/>
-                </a:solidFill>
-                <a:latin typeface="Calibri"/>
-              </a:rPr>
-              <a:t>ISO/IEC 27001 Annex A — access control, logging, audit-trail controls</a:t>
-            </a:r>
-          </a:p>
-        </p:txBody>
-      </p:sp>
-      <p:sp>
-        <p:nvSpPr>
-          <p:cNvPr id="34" name="Rectangle 33"/>
+              <a:t>OWASP ASVS + Mobile Top 10; ISO/IEC 27001 Annex A</a:t>
+            </a:r>
+          </a:p>
+        </p:txBody>
+      </p:sp>
+      <p:sp>
+        <p:nvSpPr>
+          <p:cNvPr id="36" name="Rectangle 35"/>
           <p:cNvSpPr/>
           <p:nvPr/>
         </p:nvSpPr>
         <p:spPr>
           <a:xfrm>
-            <a:off x="457200" y="3767328"/>
-            <a:ext cx="5486400" cy="2103120"/>
+            <a:off x="457200" y="3611879"/>
+            <a:ext cx="4023360" cy="1938528"/>
           </a:xfrm>
           <a:prstGeom prst="rect">
             <a:avLst/>
@@ -18385,14 +18032,14 @@
       </p:sp>
       <p:sp>
         <p:nvSpPr>
-          <p:cNvPr id="35" name="Rectangle 34"/>
+          <p:cNvPr id="37" name="Rectangle 36"/>
           <p:cNvSpPr/>
           <p:nvPr/>
         </p:nvSpPr>
         <p:spPr>
           <a:xfrm>
-            <a:off x="457200" y="3767328"/>
-            <a:ext cx="5486400" cy="50800"/>
+            <a:off x="457200" y="3611879"/>
+            <a:ext cx="4023360" cy="50800"/>
           </a:xfrm>
           <a:prstGeom prst="rect">
             <a:avLst/>
@@ -18429,14 +18076,14 @@
       </p:sp>
       <p:sp>
         <p:nvSpPr>
-          <p:cNvPr id="36" name="TextBox 35"/>
-          <p:cNvSpPr txBox="1"/>
-          <p:nvPr/>
-        </p:nvSpPr>
-        <p:spPr>
-          <a:xfrm>
-            <a:off x="621792" y="3895344"/>
-            <a:ext cx="5120640" cy="256032"/>
+          <p:cNvPr id="38" name="TextBox 37"/>
+          <p:cNvSpPr txBox="1"/>
+          <p:nvPr/>
+        </p:nvSpPr>
+        <p:spPr>
+          <a:xfrm>
+            <a:off x="603504" y="3721607"/>
+            <a:ext cx="3703320" cy="237744"/>
           </a:xfrm>
           <a:prstGeom prst="rect">
             <a:avLst/>
@@ -18458,7 +18105,7 @@
               </a:spcAft>
             </a:pPr>
             <a:r>
-              <a:rPr sz="1150" b="1">
+              <a:rPr sz="1050" b="1">
                 <a:solidFill>
                   <a:srgbClr val="2E8B57"/>
                 </a:solidFill>
@@ -18471,14 +18118,14 @@
       </p:sp>
       <p:sp>
         <p:nvSpPr>
-          <p:cNvPr id="37" name="TextBox 36"/>
-          <p:cNvSpPr txBox="1"/>
-          <p:nvPr/>
-        </p:nvSpPr>
-        <p:spPr>
-          <a:xfrm>
-            <a:off x="621792" y="4206240"/>
-            <a:ext cx="5120640" cy="246888"/>
+          <p:cNvPr id="39" name="TextBox 38"/>
+          <p:cNvSpPr txBox="1"/>
+          <p:nvPr/>
+        </p:nvSpPr>
+        <p:spPr>
+          <a:xfrm>
+            <a:off x="603504" y="4032503"/>
+            <a:ext cx="3749039" cy="274320"/>
           </a:xfrm>
           <a:prstGeom prst="rect">
             <a:avLst/>
@@ -18500,36 +18147,36 @@
               </a:spcAft>
             </a:pPr>
             <a:r>
-              <a:rPr sz="900" b="1">
+              <a:rPr sz="850" b="1">
                 <a:solidFill>
                   <a:srgbClr val="2E8B57"/>
                 </a:solidFill>
                 <a:latin typeface="Calibri"/>
               </a:rPr>
-              <a:t>· </a:t>
-            </a:r>
-            <a:r>
-              <a:rPr sz="900" b="0">
+              <a:t>- </a:t>
+            </a:r>
+            <a:r>
+              <a:rPr sz="850" b="0">
                 <a:solidFill>
                   <a:srgbClr val="444C57"/>
                 </a:solidFill>
                 <a:latin typeface="Calibri"/>
               </a:rPr>
-              <a:t>Flutter &amp; Dart — docs.flutter.dev | Riverpod, GoRouter, Drift</a:t>
-            </a:r>
-          </a:p>
-        </p:txBody>
-      </p:sp>
-      <p:sp>
-        <p:nvSpPr>
-          <p:cNvPr id="38" name="TextBox 37"/>
-          <p:cNvSpPr txBox="1"/>
-          <p:nvPr/>
-        </p:nvSpPr>
-        <p:spPr>
-          <a:xfrm>
-            <a:off x="621792" y="4466843"/>
-            <a:ext cx="5120640" cy="246888"/>
+              <a:t>Flutter &amp; Dart - docs.flutter.dev</a:t>
+            </a:r>
+          </a:p>
+        </p:txBody>
+      </p:sp>
+      <p:sp>
+        <p:nvSpPr>
+          <p:cNvPr id="40" name="TextBox 39"/>
+          <p:cNvSpPr txBox="1"/>
+          <p:nvPr/>
+        </p:nvSpPr>
+        <p:spPr>
+          <a:xfrm>
+            <a:off x="603504" y="4325111"/>
+            <a:ext cx="3749039" cy="274320"/>
           </a:xfrm>
           <a:prstGeom prst="rect">
             <a:avLst/>
@@ -18551,36 +18198,36 @@
               </a:spcAft>
             </a:pPr>
             <a:r>
-              <a:rPr sz="900" b="1">
+              <a:rPr sz="850" b="1">
                 <a:solidFill>
                   <a:srgbClr val="2E8B57"/>
                 </a:solidFill>
                 <a:latin typeface="Calibri"/>
               </a:rPr>
-              <a:t>· </a:t>
-            </a:r>
-            <a:r>
-              <a:rPr sz="900" b="0">
+              <a:t>- </a:t>
+            </a:r>
+            <a:r>
+              <a:rPr sz="850" b="0">
                 <a:solidFill>
                   <a:srgbClr val="444C57"/>
                 </a:solidFill>
                 <a:latin typeface="Calibri"/>
               </a:rPr>
-              <a:t>FastAPI — fastapi.tiangolo.com  |  SQLAlchemy, Alembic, Pydantic official docs</a:t>
-            </a:r>
-          </a:p>
-        </p:txBody>
-      </p:sp>
-      <p:sp>
-        <p:nvSpPr>
-          <p:cNvPr id="39" name="TextBox 38"/>
-          <p:cNvSpPr txBox="1"/>
-          <p:nvPr/>
-        </p:nvSpPr>
-        <p:spPr>
-          <a:xfrm>
-            <a:off x="621792" y="4727446"/>
-            <a:ext cx="5120640" cy="246888"/>
+              <a:t>Riverpod, GoRouter, Drift (drift.simonbinder.eu)</a:t>
+            </a:r>
+          </a:p>
+        </p:txBody>
+      </p:sp>
+      <p:sp>
+        <p:nvSpPr>
+          <p:cNvPr id="41" name="TextBox 40"/>
+          <p:cNvSpPr txBox="1"/>
+          <p:nvPr/>
+        </p:nvSpPr>
+        <p:spPr>
+          <a:xfrm>
+            <a:off x="603504" y="4617719"/>
+            <a:ext cx="3749039" cy="274320"/>
           </a:xfrm>
           <a:prstGeom prst="rect">
             <a:avLst/>
@@ -18602,36 +18249,36 @@
               </a:spcAft>
             </a:pPr>
             <a:r>
-              <a:rPr sz="900" b="1">
+              <a:rPr sz="850" b="1">
                 <a:solidFill>
                   <a:srgbClr val="2E8B57"/>
                 </a:solidFill>
                 <a:latin typeface="Calibri"/>
               </a:rPr>
-              <a:t>· </a:t>
-            </a:r>
-            <a:r>
-              <a:rPr sz="900" b="0">
+              <a:t>- </a:t>
+            </a:r>
+            <a:r>
+              <a:rPr sz="850" b="0">
                 <a:solidFill>
                   <a:srgbClr val="444C57"/>
                 </a:solidFill>
                 <a:latin typeface="Calibri"/>
               </a:rPr>
-              <a:t>SQLCipher — full-database encryption for SQLite (zetetic.net/sqlcipher)</a:t>
-            </a:r>
-          </a:p>
-        </p:txBody>
-      </p:sp>
-      <p:sp>
-        <p:nvSpPr>
-          <p:cNvPr id="40" name="TextBox 39"/>
-          <p:cNvSpPr txBox="1"/>
-          <p:nvPr/>
-        </p:nvSpPr>
-        <p:spPr>
-          <a:xfrm>
-            <a:off x="621792" y="4988049"/>
-            <a:ext cx="5120640" cy="246888"/>
+              <a:t>FastAPI, SQLAlchemy, Alembic, Pydantic docs</a:t>
+            </a:r>
+          </a:p>
+        </p:txBody>
+      </p:sp>
+      <p:sp>
+        <p:nvSpPr>
+          <p:cNvPr id="42" name="TextBox 41"/>
+          <p:cNvSpPr txBox="1"/>
+          <p:nvPr/>
+        </p:nvSpPr>
+        <p:spPr>
+          <a:xfrm>
+            <a:off x="603504" y="4910327"/>
+            <a:ext cx="3749039" cy="274320"/>
           </a:xfrm>
           <a:prstGeom prst="rect">
             <a:avLst/>
@@ -18653,36 +18300,36 @@
               </a:spcAft>
             </a:pPr>
             <a:r>
-              <a:rPr sz="900" b="1">
+              <a:rPr sz="850" b="1">
                 <a:solidFill>
                   <a:srgbClr val="2E8B57"/>
                 </a:solidFill>
                 <a:latin typeface="Calibri"/>
               </a:rPr>
-              <a:t>· </a:t>
-            </a:r>
-            <a:r>
-              <a:rPr sz="900" b="0">
+              <a:t>- </a:t>
+            </a:r>
+            <a:r>
+              <a:rPr sz="850" b="0">
                 <a:solidFill>
                   <a:srgbClr val="444C57"/>
                 </a:solidFill>
                 <a:latin typeface="Calibri"/>
               </a:rPr>
-              <a:t>Khronos glTF 2.0 specification — 3D asset format for the Digital Twin</a:t>
-            </a:r>
-          </a:p>
-        </p:txBody>
-      </p:sp>
-      <p:sp>
-        <p:nvSpPr>
-          <p:cNvPr id="41" name="TextBox 40"/>
-          <p:cNvSpPr txBox="1"/>
-          <p:nvPr/>
-        </p:nvSpPr>
-        <p:spPr>
-          <a:xfrm>
-            <a:off x="621792" y="5248652"/>
-            <a:ext cx="5120640" cy="246888"/>
+              <a:t>SQLCipher - encrypted SQLite (zetetic.net)</a:t>
+            </a:r>
+          </a:p>
+        </p:txBody>
+      </p:sp>
+      <p:sp>
+        <p:nvSpPr>
+          <p:cNvPr id="43" name="TextBox 42"/>
+          <p:cNvSpPr txBox="1"/>
+          <p:nvPr/>
+        </p:nvSpPr>
+        <p:spPr>
+          <a:xfrm>
+            <a:off x="603504" y="5202935"/>
+            <a:ext cx="3749039" cy="274320"/>
           </a:xfrm>
           <a:prstGeom prst="rect">
             <a:avLst/>
@@ -18704,36 +18351,36 @@
               </a:spcAft>
             </a:pPr>
             <a:r>
-              <a:rPr sz="900" b="1">
+              <a:rPr sz="850" b="1">
                 <a:solidFill>
                   <a:srgbClr val="2E8B57"/>
                 </a:solidFill>
                 <a:latin typeface="Calibri"/>
               </a:rPr>
-              <a:t>· </a:t>
-            </a:r>
-            <a:r>
-              <a:rPr sz="900" b="0">
+              <a:t>- </a:t>
+            </a:r>
+            <a:r>
+              <a:rPr sz="850" b="0">
                 <a:solidFill>
                   <a:srgbClr val="444C57"/>
                 </a:solidFill>
                 <a:latin typeface="Calibri"/>
               </a:rPr>
-              <a:t>PostgreSQL 16 docs | Docker Compose deployment reference</a:t>
-            </a:r>
-          </a:p>
-        </p:txBody>
-      </p:sp>
-      <p:sp>
-        <p:nvSpPr>
-          <p:cNvPr id="42" name="Rectangle 41"/>
+              <a:t>Khronos glTF 2.0 specification; PostgreSQL 16</a:t>
+            </a:r>
+          </a:p>
+        </p:txBody>
+      </p:sp>
+      <p:sp>
+        <p:nvSpPr>
+          <p:cNvPr id="44" name="Rectangle 43"/>
           <p:cNvSpPr/>
           <p:nvPr/>
         </p:nvSpPr>
         <p:spPr>
           <a:xfrm>
-            <a:off x="6172200" y="3767328"/>
-            <a:ext cx="5486400" cy="2103120"/>
+            <a:off x="4663440" y="3611879"/>
+            <a:ext cx="4023360" cy="1938528"/>
           </a:xfrm>
           <a:prstGeom prst="rect">
             <a:avLst/>
@@ -18772,14 +18419,14 @@
       </p:sp>
       <p:sp>
         <p:nvSpPr>
-          <p:cNvPr id="43" name="Rectangle 42"/>
+          <p:cNvPr id="45" name="Rectangle 44"/>
           <p:cNvSpPr/>
           <p:nvPr/>
         </p:nvSpPr>
         <p:spPr>
           <a:xfrm>
-            <a:off x="6172200" y="3767328"/>
-            <a:ext cx="5486400" cy="50800"/>
+            <a:off x="4663440" y="3611879"/>
+            <a:ext cx="4023360" cy="50800"/>
           </a:xfrm>
           <a:prstGeom prst="rect">
             <a:avLst/>
@@ -18816,14 +18463,14 @@
       </p:sp>
       <p:sp>
         <p:nvSpPr>
-          <p:cNvPr id="44" name="TextBox 43"/>
-          <p:cNvSpPr txBox="1"/>
-          <p:nvPr/>
-        </p:nvSpPr>
-        <p:spPr>
-          <a:xfrm>
-            <a:off x="6336792" y="3895344"/>
-            <a:ext cx="5120640" cy="256032"/>
+          <p:cNvPr id="46" name="TextBox 45"/>
+          <p:cNvSpPr txBox="1"/>
+          <p:nvPr/>
+        </p:nvSpPr>
+        <p:spPr>
+          <a:xfrm>
+            <a:off x="4809744" y="3721607"/>
+            <a:ext cx="3703320" cy="237744"/>
           </a:xfrm>
           <a:prstGeom prst="rect">
             <a:avLst/>
@@ -18845,7 +18492,7 @@
               </a:spcAft>
             </a:pPr>
             <a:r>
-              <a:rPr sz="1150" b="1">
+              <a:rPr sz="1050" b="1">
                 <a:solidFill>
                   <a:srgbClr val="1F3864"/>
                 </a:solidFill>
@@ -18858,14 +18505,14 @@
       </p:sp>
       <p:sp>
         <p:nvSpPr>
-          <p:cNvPr id="45" name="TextBox 44"/>
-          <p:cNvSpPr txBox="1"/>
-          <p:nvPr/>
-        </p:nvSpPr>
-        <p:spPr>
-          <a:xfrm>
-            <a:off x="6336792" y="4206240"/>
-            <a:ext cx="5120640" cy="246888"/>
+          <p:cNvPr id="47" name="TextBox 46"/>
+          <p:cNvSpPr txBox="1"/>
+          <p:nvPr/>
+        </p:nvSpPr>
+        <p:spPr>
+          <a:xfrm>
+            <a:off x="4809744" y="4032503"/>
+            <a:ext cx="3749039" cy="274320"/>
           </a:xfrm>
           <a:prstGeom prst="rect">
             <a:avLst/>
@@ -18887,271 +18534,271 @@
               </a:spcAft>
             </a:pPr>
             <a:r>
+              <a:rPr sz="850" b="1">
+                <a:solidFill>
+                  <a:srgbClr val="1F3864"/>
+                </a:solidFill>
+                <a:latin typeface="Calibri"/>
+              </a:rPr>
+              <a:t>- </a:t>
+            </a:r>
+            <a:r>
+              <a:rPr sz="850" b="0">
+                <a:solidFill>
+                  <a:srgbClr val="444C57"/>
+                </a:solidFill>
+                <a:latin typeface="Calibri"/>
+              </a:rPr>
+              <a:t>Digital Twin for marine instrumentation (ISO 23247)</a:t>
+            </a:r>
+          </a:p>
+        </p:txBody>
+      </p:sp>
+      <p:sp>
+        <p:nvSpPr>
+          <p:cNvPr id="48" name="TextBox 47"/>
+          <p:cNvSpPr txBox="1"/>
+          <p:nvPr/>
+        </p:nvSpPr>
+        <p:spPr>
+          <a:xfrm>
+            <a:off x="4809744" y="4325111"/>
+            <a:ext cx="3749039" cy="274320"/>
+          </a:xfrm>
+          <a:prstGeom prst="rect">
+            <a:avLst/>
+          </a:prstGeom>
+          <a:noFill/>
+        </p:spPr>
+        <p:txBody>
+          <a:bodyPr wrap="square" lIns="0" rIns="0" tIns="0" bIns="0" anchor="t">
+            <a:spAutoFit/>
+          </a:bodyPr>
+          <a:lstStyle/>
+          <a:p>
+            <a:pPr algn="l">
+              <a:lnSpc>
+                <a:spcPct val="105000"/>
+              </a:lnSpc>
+              <a:spcAft>
+                <a:spcPts val="300"/>
+              </a:spcAft>
+            </a:pPr>
+            <a:r>
+              <a:rPr sz="850" b="1">
+                <a:solidFill>
+                  <a:srgbClr val="1F3864"/>
+                </a:solidFill>
+                <a:latin typeface="Calibri"/>
+              </a:rPr>
+              <a:t>- </a:t>
+            </a:r>
+            <a:r>
+              <a:rPr sz="850" b="0">
+                <a:solidFill>
+                  <a:srgbClr val="444C57"/>
+                </a:solidFill>
+                <a:latin typeface="Calibri"/>
+              </a:rPr>
+              <a:t>Argo programme documentation - argo.ucsd.edu</a:t>
+            </a:r>
+          </a:p>
+        </p:txBody>
+      </p:sp>
+      <p:sp>
+        <p:nvSpPr>
+          <p:cNvPr id="49" name="TextBox 48"/>
+          <p:cNvSpPr txBox="1"/>
+          <p:nvPr/>
+        </p:nvSpPr>
+        <p:spPr>
+          <a:xfrm>
+            <a:off x="4809744" y="4617719"/>
+            <a:ext cx="3749039" cy="274320"/>
+          </a:xfrm>
+          <a:prstGeom prst="rect">
+            <a:avLst/>
+          </a:prstGeom>
+          <a:noFill/>
+        </p:spPr>
+        <p:txBody>
+          <a:bodyPr wrap="square" lIns="0" rIns="0" tIns="0" bIns="0" anchor="t">
+            <a:spAutoFit/>
+          </a:bodyPr>
+          <a:lstStyle/>
+          <a:p>
+            <a:pPr algn="l">
+              <a:lnSpc>
+                <a:spcPct val="105000"/>
+              </a:lnSpc>
+              <a:spcAft>
+                <a:spcPts val="300"/>
+              </a:spcAft>
+            </a:pPr>
+            <a:r>
+              <a:rPr sz="850" b="1">
+                <a:solidFill>
+                  <a:srgbClr val="1F3864"/>
+                </a:solidFill>
+                <a:latin typeface="Calibri"/>
+              </a:rPr>
+              <a:t>- </a:t>
+            </a:r>
+            <a:r>
+              <a:rPr sz="850" b="0">
+                <a:solidFill>
+                  <a:srgbClr val="444C57"/>
+                </a:solidFill>
+                <a:latin typeface="Calibri"/>
+              </a:rPr>
+              <a:t>Offline-first patterns; CRDT vs ledger-based sync</a:t>
+            </a:r>
+          </a:p>
+        </p:txBody>
+      </p:sp>
+      <p:sp>
+        <p:nvSpPr>
+          <p:cNvPr id="50" name="TextBox 49"/>
+          <p:cNvSpPr txBox="1"/>
+          <p:nvPr/>
+        </p:nvSpPr>
+        <p:spPr>
+          <a:xfrm>
+            <a:off x="4809744" y="4910327"/>
+            <a:ext cx="3749039" cy="274320"/>
+          </a:xfrm>
+          <a:prstGeom prst="rect">
+            <a:avLst/>
+          </a:prstGeom>
+          <a:noFill/>
+        </p:spPr>
+        <p:txBody>
+          <a:bodyPr wrap="square" lIns="0" rIns="0" tIns="0" bIns="0" anchor="t">
+            <a:spAutoFit/>
+          </a:bodyPr>
+          <a:lstStyle/>
+          <a:p>
+            <a:pPr algn="l">
+              <a:lnSpc>
+                <a:spcPct val="105000"/>
+              </a:lnSpc>
+              <a:spcAft>
+                <a:spcPts val="300"/>
+              </a:spcAft>
+            </a:pPr>
+            <a:r>
+              <a:rPr sz="850" b="1">
+                <a:solidFill>
+                  <a:srgbClr val="1F3864"/>
+                </a:solidFill>
+                <a:latin typeface="Calibri"/>
+              </a:rPr>
+              <a:t>- </a:t>
+            </a:r>
+            <a:r>
+              <a:rPr sz="850" b="0">
+                <a:solidFill>
+                  <a:srgbClr val="444C57"/>
+                </a:solidFill>
+                <a:latin typeface="Calibri"/>
+              </a:rPr>
+              <a:t>Open-source LMS study (Moodle, Open edX)</a:t>
+            </a:r>
+          </a:p>
+        </p:txBody>
+      </p:sp>
+      <p:sp>
+        <p:nvSpPr>
+          <p:cNvPr id="51" name="TextBox 50"/>
+          <p:cNvSpPr txBox="1"/>
+          <p:nvPr/>
+        </p:nvSpPr>
+        <p:spPr>
+          <a:xfrm>
+            <a:off x="4809744" y="5202935"/>
+            <a:ext cx="3749039" cy="274320"/>
+          </a:xfrm>
+          <a:prstGeom prst="rect">
+            <a:avLst/>
+          </a:prstGeom>
+          <a:noFill/>
+        </p:spPr>
+        <p:txBody>
+          <a:bodyPr wrap="square" lIns="0" rIns="0" tIns="0" bIns="0" anchor="t">
+            <a:spAutoFit/>
+          </a:bodyPr>
+          <a:lstStyle/>
+          <a:p>
+            <a:pPr algn="l">
+              <a:lnSpc>
+                <a:spcPct val="105000"/>
+              </a:lnSpc>
+              <a:spcAft>
+                <a:spcPts val="300"/>
+              </a:spcAft>
+            </a:pPr>
+            <a:r>
+              <a:rPr sz="850" b="1">
+                <a:solidFill>
+                  <a:srgbClr val="1F3864"/>
+                </a:solidFill>
+                <a:latin typeface="Calibri"/>
+              </a:rPr>
+              <a:t>- </a:t>
+            </a:r>
+            <a:r>
+              <a:rPr sz="850" b="0">
+                <a:solidFill>
+                  <a:srgbClr val="444C57"/>
+                </a:solidFill>
+                <a:latin typeface="Calibri"/>
+              </a:rPr>
+              <a:t>RapidFuzz / TF-IDF retrieval - confidence scoring</a:t>
+            </a:r>
+          </a:p>
+        </p:txBody>
+      </p:sp>
+      <p:sp>
+        <p:nvSpPr>
+          <p:cNvPr id="52" name="TextBox 51"/>
+          <p:cNvSpPr txBox="1"/>
+          <p:nvPr/>
+        </p:nvSpPr>
+        <p:spPr>
+          <a:xfrm>
+            <a:off x="457200" y="5943600"/>
+            <a:ext cx="11247120" cy="274320"/>
+          </a:xfrm>
+          <a:prstGeom prst="rect">
+            <a:avLst/>
+          </a:prstGeom>
+          <a:noFill/>
+        </p:spPr>
+        <p:txBody>
+          <a:bodyPr wrap="square" lIns="0" rIns="0" tIns="0" bIns="0" anchor="t">
+            <a:spAutoFit/>
+          </a:bodyPr>
+          <a:lstStyle/>
+          <a:p>
+            <a:pPr algn="l">
+              <a:lnSpc>
+                <a:spcPct val="108000"/>
+              </a:lnSpc>
+              <a:spcAft>
+                <a:spcPts val="300"/>
+              </a:spcAft>
+            </a:pPr>
+            <a:r>
               <a:rPr sz="900" b="1">
                 <a:solidFill>
                   <a:srgbClr val="1F3864"/>
                 </a:solidFill>
                 <a:latin typeface="Calibri"/>
               </a:rPr>
-              <a:t>· </a:t>
+              <a:t>Note: </a:t>
             </a:r>
             <a:r>
               <a:rPr sz="900" b="0">
-                <a:solidFill>
-                  <a:srgbClr val="444C57"/>
-                </a:solidFill>
-                <a:latin typeface="Calibri"/>
-              </a:rPr>
-              <a:t>Digital Twin concepts for marine instrumentation (ISO 23247 framing)</a:t>
-            </a:r>
-          </a:p>
-        </p:txBody>
-      </p:sp>
-      <p:sp>
-        <p:nvSpPr>
-          <p:cNvPr id="46" name="TextBox 45"/>
-          <p:cNvSpPr txBox="1"/>
-          <p:nvPr/>
-        </p:nvSpPr>
-        <p:spPr>
-          <a:xfrm>
-            <a:off x="6336792" y="4466843"/>
-            <a:ext cx="5120640" cy="246888"/>
-          </a:xfrm>
-          <a:prstGeom prst="rect">
-            <a:avLst/>
-          </a:prstGeom>
-          <a:noFill/>
-        </p:spPr>
-        <p:txBody>
-          <a:bodyPr wrap="square" lIns="0" rIns="0" tIns="0" bIns="0" anchor="t">
-            <a:spAutoFit/>
-          </a:bodyPr>
-          <a:lstStyle/>
-          <a:p>
-            <a:pPr algn="l">
-              <a:lnSpc>
-                <a:spcPct val="105000"/>
-              </a:lnSpc>
-              <a:spcAft>
-                <a:spcPts val="300"/>
-              </a:spcAft>
-            </a:pPr>
-            <a:r>
-              <a:rPr sz="900" b="1">
-                <a:solidFill>
-                  <a:srgbClr val="1F3864"/>
-                </a:solidFill>
-                <a:latin typeface="Calibri"/>
-              </a:rPr>
-              <a:t>· </a:t>
-            </a:r>
-            <a:r>
-              <a:rPr sz="900" b="0">
-                <a:solidFill>
-                  <a:srgbClr val="444C57"/>
-                </a:solidFill>
-                <a:latin typeface="Calibri"/>
-              </a:rPr>
-              <a:t>Argo programme documentation — argo.ucsd.edu — float operations</a:t>
-            </a:r>
-          </a:p>
-        </p:txBody>
-      </p:sp>
-      <p:sp>
-        <p:nvSpPr>
-          <p:cNvPr id="47" name="TextBox 46"/>
-          <p:cNvSpPr txBox="1"/>
-          <p:nvPr/>
-        </p:nvSpPr>
-        <p:spPr>
-          <a:xfrm>
-            <a:off x="6336792" y="4727446"/>
-            <a:ext cx="5120640" cy="246888"/>
-          </a:xfrm>
-          <a:prstGeom prst="rect">
-            <a:avLst/>
-          </a:prstGeom>
-          <a:noFill/>
-        </p:spPr>
-        <p:txBody>
-          <a:bodyPr wrap="square" lIns="0" rIns="0" tIns="0" bIns="0" anchor="t">
-            <a:spAutoFit/>
-          </a:bodyPr>
-          <a:lstStyle/>
-          <a:p>
-            <a:pPr algn="l">
-              <a:lnSpc>
-                <a:spcPct val="105000"/>
-              </a:lnSpc>
-              <a:spcAft>
-                <a:spcPts val="300"/>
-              </a:spcAft>
-            </a:pPr>
-            <a:r>
-              <a:rPr sz="900" b="1">
-                <a:solidFill>
-                  <a:srgbClr val="1F3864"/>
-                </a:solidFill>
-                <a:latin typeface="Calibri"/>
-              </a:rPr>
-              <a:t>· </a:t>
-            </a:r>
-            <a:r>
-              <a:rPr sz="900" b="0">
-                <a:solidFill>
-                  <a:srgbClr val="444C57"/>
-                </a:solidFill>
-                <a:latin typeface="Calibri"/>
-              </a:rPr>
-              <a:t>Offline-first patterns; CRDT vs. ledger-based synchronisation literature</a:t>
-            </a:r>
-          </a:p>
-        </p:txBody>
-      </p:sp>
-      <p:sp>
-        <p:nvSpPr>
-          <p:cNvPr id="48" name="TextBox 47"/>
-          <p:cNvSpPr txBox="1"/>
-          <p:nvPr/>
-        </p:nvSpPr>
-        <p:spPr>
-          <a:xfrm>
-            <a:off x="6336792" y="4988049"/>
-            <a:ext cx="5120640" cy="246888"/>
-          </a:xfrm>
-          <a:prstGeom prst="rect">
-            <a:avLst/>
-          </a:prstGeom>
-          <a:noFill/>
-        </p:spPr>
-        <p:txBody>
-          <a:bodyPr wrap="square" lIns="0" rIns="0" tIns="0" bIns="0" anchor="t">
-            <a:spAutoFit/>
-          </a:bodyPr>
-          <a:lstStyle/>
-          <a:p>
-            <a:pPr algn="l">
-              <a:lnSpc>
-                <a:spcPct val="105000"/>
-              </a:lnSpc>
-              <a:spcAft>
-                <a:spcPts val="300"/>
-              </a:spcAft>
-            </a:pPr>
-            <a:r>
-              <a:rPr sz="900" b="1">
-                <a:solidFill>
-                  <a:srgbClr val="1F3864"/>
-                </a:solidFill>
-                <a:latin typeface="Calibri"/>
-              </a:rPr>
-              <a:t>· </a:t>
-            </a:r>
-            <a:r>
-              <a:rPr sz="900" b="0">
-                <a:solidFill>
-                  <a:srgbClr val="444C57"/>
-                </a:solidFill>
-                <a:latin typeface="Calibri"/>
-              </a:rPr>
-              <a:t>Open-source LMS study (Moodle, Open edX) — role model &amp; gap analysis</a:t>
-            </a:r>
-          </a:p>
-        </p:txBody>
-      </p:sp>
-      <p:sp>
-        <p:nvSpPr>
-          <p:cNvPr id="49" name="TextBox 48"/>
-          <p:cNvSpPr txBox="1"/>
-          <p:nvPr/>
-        </p:nvSpPr>
-        <p:spPr>
-          <a:xfrm>
-            <a:off x="6336792" y="5248652"/>
-            <a:ext cx="5120640" cy="246888"/>
-          </a:xfrm>
-          <a:prstGeom prst="rect">
-            <a:avLst/>
-          </a:prstGeom>
-          <a:noFill/>
-        </p:spPr>
-        <p:txBody>
-          <a:bodyPr wrap="square" lIns="0" rIns="0" tIns="0" bIns="0" anchor="t">
-            <a:spAutoFit/>
-          </a:bodyPr>
-          <a:lstStyle/>
-          <a:p>
-            <a:pPr algn="l">
-              <a:lnSpc>
-                <a:spcPct val="105000"/>
-              </a:lnSpc>
-              <a:spcAft>
-                <a:spcPts val="300"/>
-              </a:spcAft>
-            </a:pPr>
-            <a:r>
-              <a:rPr sz="900" b="1">
-                <a:solidFill>
-                  <a:srgbClr val="1F3864"/>
-                </a:solidFill>
-                <a:latin typeface="Calibri"/>
-              </a:rPr>
-              <a:t>· </a:t>
-            </a:r>
-            <a:r>
-              <a:rPr sz="900" b="0">
-                <a:solidFill>
-                  <a:srgbClr val="444C57"/>
-                </a:solidFill>
-                <a:latin typeface="Calibri"/>
-              </a:rPr>
-              <a:t>RapidFuzz / TF-IDF retrieval literature — basis of the confidence score</a:t>
-            </a:r>
-          </a:p>
-        </p:txBody>
-      </p:sp>
-      <p:sp>
-        <p:nvSpPr>
-          <p:cNvPr id="50" name="TextBox 49"/>
-          <p:cNvSpPr txBox="1"/>
-          <p:nvPr/>
-        </p:nvSpPr>
-        <p:spPr>
-          <a:xfrm>
-            <a:off x="457200" y="5989320"/>
-            <a:ext cx="11247120" cy="274320"/>
-          </a:xfrm>
-          <a:prstGeom prst="rect">
-            <a:avLst/>
-          </a:prstGeom>
-          <a:noFill/>
-        </p:spPr>
-        <p:txBody>
-          <a:bodyPr wrap="square" lIns="0" rIns="0" tIns="0" bIns="0" anchor="t">
-            <a:spAutoFit/>
-          </a:bodyPr>
-          <a:lstStyle/>
-          <a:p>
-            <a:pPr algn="l">
-              <a:lnSpc>
-                <a:spcPct val="108000"/>
-              </a:lnSpc>
-              <a:spcAft>
-                <a:spcPts val="300"/>
-              </a:spcAft>
-            </a:pPr>
-            <a:r>
-              <a:rPr sz="950" b="1">
-                <a:solidFill>
-                  <a:srgbClr val="1F3864"/>
-                </a:solidFill>
-                <a:latin typeface="Calibri"/>
-              </a:rPr>
-              <a:t>Note: </a:t>
-            </a:r>
-            <a:r>
-              <a:rPr sz="950" b="0">
                 <a:solidFill>
                   <a:srgbClr val="444C57"/>
                 </a:solidFill>
